--- a/Gate2/Deliverables/Stakeholder_Presentation.pptx
+++ b/Gate2/Deliverables/Stakeholder_Presentation.pptx
@@ -4,24 +4,28 @@
   <p:sldMasterIdLst>
     <p:sldMasterId id="2147483648" r:id="rId1"/>
   </p:sldMasterIdLst>
+  <p:notesMasterIdLst>
+    <p:notesMasterId r:id="rId18"/>
+  </p:notesMasterIdLst>
   <p:sldIdLst>
-    <p:sldId id="256" r:id="rId7"/>
-    <p:sldId id="257" r:id="rId9"/>
-    <p:sldId id="258" r:id="rId10"/>
-    <p:sldId id="259" r:id="rId11"/>
-    <p:sldId id="260" r:id="rId12"/>
-    <p:sldId id="261" r:id="rId13"/>
-    <p:sldId id="262" r:id="rId14"/>
-    <p:sldId id="263" r:id="rId15"/>
-    <p:sldId id="264" r:id="rId16"/>
-    <p:sldId id="265" r:id="rId17"/>
-    <p:sldId id="266" r:id="rId18"/>
-    <p:sldId id="267" r:id="rId19"/>
-    <p:sldId id="268" r:id="rId20"/>
-    <p:sldId id="269" r:id="rId21"/>
-    <p:sldId id="270" r:id="rId22"/>
+    <p:sldId id="256" r:id="rId2"/>
+    <p:sldId id="257" r:id="rId3"/>
+    <p:sldId id="258" r:id="rId4"/>
+    <p:sldId id="271" r:id="rId5"/>
+    <p:sldId id="259" r:id="rId6"/>
+    <p:sldId id="260" r:id="rId7"/>
+    <p:sldId id="261" r:id="rId8"/>
+    <p:sldId id="262" r:id="rId9"/>
+    <p:sldId id="263" r:id="rId10"/>
+    <p:sldId id="264" r:id="rId11"/>
+    <p:sldId id="265" r:id="rId12"/>
+    <p:sldId id="266" r:id="rId13"/>
+    <p:sldId id="267" r:id="rId14"/>
+    <p:sldId id="268" r:id="rId15"/>
+    <p:sldId id="269" r:id="rId16"/>
+    <p:sldId id="270" r:id="rId17"/>
   </p:sldIdLst>
-  <p:sldSz cx="12188952" cy="6858000" type="screen4x3"/>
+  <p:sldSz cx="12188825" cy="6858000"/>
   <p:notesSz cx="6858000" cy="9144000"/>
   <p:defaultTextStyle>
     <a:defPPr>
@@ -118,11 +122,27 @@
       </a:defRPr>
     </a:lvl9pPr>
   </p:defaultTextStyle>
+  <p:extLst>
+    <p:ext uri="{EFAFB233-063F-42B5-8137-9DF3F51BA10A}">
+      <p15:sldGuideLst xmlns:p15="http://schemas.microsoft.com/office/powerpoint/2012/main">
+        <p15:guide id="1" orient="horz" pos="2160">
+          <p15:clr>
+            <a:srgbClr val="A4A3A4"/>
+          </p15:clr>
+        </p15:guide>
+        <p15:guide id="2" pos="2880">
+          <p15:clr>
+            <a:srgbClr val="A4A3A4"/>
+          </p15:clr>
+        </p15:guide>
+      </p15:sldGuideLst>
+    </p:ext>
+  </p:extLst>
 </p:presentation>
 </file>
 
 <file path=ppt/notesMasters/notesMaster1.xml><?xml version="1.0" encoding="utf-8"?>
-<p:notesMaster xmlns:a="http://schemas.openxmlformats.org/drawingml/2006/main" xmlns:p="http://schemas.openxmlformats.org/presentationml/2006/main" xmlns:r="http://schemas.openxmlformats.org/officeDocument/2006/relationships">
+<p:notesMaster xmlns:a="http://schemas.openxmlformats.org/drawingml/2006/main" xmlns:r="http://schemas.openxmlformats.org/officeDocument/2006/relationships" xmlns:p="http://schemas.openxmlformats.org/presentationml/2006/main">
   <p:cSld>
     <p:bg>
       <p:bgRef idx="1001">
@@ -143,241 +163,16 @@
           <a:chExt cx="0" cy="0"/>
         </a:xfrm>
       </p:grpSpPr>
-      <p:sp>
-        <p:nvSpPr>
-          <p:cNvPr id="2" name="Header Placeholder 1"/>
-          <p:cNvSpPr>
-            <a:spLocks noGrp="1"/>
-          </p:cNvSpPr>
-          <p:nvPr>
-            <p:ph type="hdr" sz="quarter"/>
-          </p:nvPr>
-        </p:nvSpPr>
-        <p:spPr>
-          <a:xfrm>
-            <a:off x="0" y="0"/>
-            <a:ext cx="2971800" cy="457200"/>
-          </a:xfrm>
-          <a:prstGeom prst="rect">
-            <a:avLst/>
-          </a:prstGeom>
-        </p:spPr>
-        <p:txBody>
-          <a:bodyPr vert="horz" lIns="91440" tIns="45720" rIns="91440" bIns="45720" rtlCol="0"/>
-          <a:lstStyle>
-            <a:lvl1pPr algn="l">
-              <a:defRPr sz="1200"/>
-            </a:lvl1pPr>
-          </a:lstStyle>
-          <a:p>
-            <a:endParaRPr lang="en-US"/>
-          </a:p>
-        </p:txBody>
-      </p:sp>
-      <p:sp>
-        <p:nvSpPr>
-          <p:cNvPr id="3" name="Date Placeholder 2"/>
-          <p:cNvSpPr>
-            <a:spLocks noGrp="1"/>
-          </p:cNvSpPr>
-          <p:nvPr>
-            <p:ph type="dt" idx="1"/>
-          </p:nvPr>
-        </p:nvSpPr>
-        <p:spPr>
-          <a:xfrm>
-            <a:off x="3884613" y="0"/>
-            <a:ext cx="2971800" cy="457200"/>
-          </a:xfrm>
-          <a:prstGeom prst="rect">
-            <a:avLst/>
-          </a:prstGeom>
-        </p:spPr>
-        <p:txBody>
-          <a:bodyPr vert="horz" lIns="91440" tIns="45720" rIns="91440" bIns="45720" rtlCol="0"/>
-          <a:lstStyle>
-            <a:lvl1pPr algn="r">
-              <a:defRPr sz="1200"/>
-            </a:lvl1pPr>
-          </a:lstStyle>
-          <a:p>
-            <a:fld id="{0F89C1C7-3DCD-1040-A9CF-14679D8B5DDD}" type="datetimeFigureOut">
-              <a:rPr lang="en-US" smtClean="0"/>
-              <a:t>10/17/16</a:t>
-            </a:fld>
-            <a:endParaRPr lang="en-US"/>
-          </a:p>
-        </p:txBody>
-      </p:sp>
-      <p:sp>
-        <p:nvSpPr>
-          <p:cNvPr id="4" name="Slide Image Placeholder 3"/>
-          <p:cNvSpPr>
-            <a:spLocks noGrp="1" noRot="1" noChangeAspect="1"/>
-          </p:cNvSpPr>
-          <p:nvPr>
-            <p:ph type="sldImg" idx="2"/>
-          </p:nvPr>
-        </p:nvSpPr>
-        <p:spPr>
-          <a:xfrm>
-            <a:off x="1143000" y="685800"/>
-            <a:ext cx="4572000" cy="3429000"/>
-          </a:xfrm>
-          <a:prstGeom prst="rect">
-            <a:avLst/>
-          </a:prstGeom>
-          <a:noFill/>
-          <a:ln w="12700">
-            <a:solidFill>
-              <a:prstClr val="black"/>
-            </a:solidFill>
-          </a:ln>
-        </p:spPr>
-        <p:txBody>
-          <a:bodyPr vert="horz" lIns="91440" tIns="45720" rIns="91440" bIns="45720" rtlCol="0" anchor="ctr"/>
-          <a:lstStyle/>
-          <a:p>
-            <a:endParaRPr lang="en-US"/>
-          </a:p>
-        </p:txBody>
-      </p:sp>
-      <p:sp>
-        <p:nvSpPr>
-          <p:cNvPr id="5" name="Notes Placeholder 4"/>
-          <p:cNvSpPr>
-            <a:spLocks noGrp="1"/>
-          </p:cNvSpPr>
-          <p:nvPr>
-            <p:ph type="body" sz="quarter" idx="3"/>
-          </p:nvPr>
-        </p:nvSpPr>
-        <p:spPr>
-          <a:xfrm>
-            <a:off x="685800" y="4343400"/>
-            <a:ext cx="5486400" cy="4114800"/>
-          </a:xfrm>
-          <a:prstGeom prst="rect">
-            <a:avLst/>
-          </a:prstGeom>
-        </p:spPr>
-        <p:txBody>
-          <a:bodyPr vert="horz" lIns="91440" tIns="45720" rIns="91440" bIns="45720" rtlCol="0"/>
-          <a:lstStyle/>
-          <a:p>
-            <a:pPr lvl="0"/>
-            <a:r>
-              <a:rPr lang="en-US" smtClean="0"/>
-              <a:t>Click to edit Master text styles</a:t>
-            </a:r>
-          </a:p>
-          <a:p>
-            <a:pPr lvl="1"/>
-            <a:r>
-              <a:rPr lang="en-US" smtClean="0"/>
-              <a:t>Second level</a:t>
-            </a:r>
-          </a:p>
-          <a:p>
-            <a:pPr lvl="2"/>
-            <a:r>
-              <a:rPr lang="en-US" smtClean="0"/>
-              <a:t>Third level</a:t>
-            </a:r>
-          </a:p>
-          <a:p>
-            <a:pPr lvl="3"/>
-            <a:r>
-              <a:rPr lang="en-US" smtClean="0"/>
-              <a:t>Fourth level</a:t>
-            </a:r>
-          </a:p>
-          <a:p>
-            <a:pPr lvl="4"/>
-            <a:r>
-              <a:rPr lang="en-US" smtClean="0"/>
-              <a:t>Fifth level</a:t>
-            </a:r>
-            <a:endParaRPr lang="en-US"/>
-          </a:p>
-        </p:txBody>
-      </p:sp>
-      <p:sp>
-        <p:nvSpPr>
-          <p:cNvPr id="6" name="Footer Placeholder 5"/>
-          <p:cNvSpPr>
-            <a:spLocks noGrp="1"/>
-          </p:cNvSpPr>
-          <p:nvPr>
-            <p:ph type="ftr" sz="quarter" idx="4"/>
-          </p:nvPr>
-        </p:nvSpPr>
-        <p:spPr>
-          <a:xfrm>
-            <a:off x="0" y="8685213"/>
-            <a:ext cx="2971800" cy="457200"/>
-          </a:xfrm>
-          <a:prstGeom prst="rect">
-            <a:avLst/>
-          </a:prstGeom>
-        </p:spPr>
-        <p:txBody>
-          <a:bodyPr vert="horz" lIns="91440" tIns="45720" rIns="91440" bIns="45720" rtlCol="0" anchor="b"/>
-          <a:lstStyle>
-            <a:lvl1pPr algn="l">
-              <a:defRPr sz="1200"/>
-            </a:lvl1pPr>
-          </a:lstStyle>
-          <a:p>
-            <a:endParaRPr lang="en-US"/>
-          </a:p>
-        </p:txBody>
-      </p:sp>
-      <p:sp>
-        <p:nvSpPr>
-          <p:cNvPr id="7" name="Slide Number Placeholder 6"/>
-          <p:cNvSpPr>
-            <a:spLocks noGrp="1"/>
-          </p:cNvSpPr>
-          <p:nvPr>
-            <p:ph type="sldNum" sz="quarter" idx="5"/>
-          </p:nvPr>
-        </p:nvSpPr>
-        <p:spPr>
-          <a:xfrm>
-            <a:off x="3884613" y="8685213"/>
-            <a:ext cx="2971800" cy="457200"/>
-          </a:xfrm>
-          <a:prstGeom prst="rect">
-            <a:avLst/>
-          </a:prstGeom>
-        </p:spPr>
-        <p:txBody>
-          <a:bodyPr vert="horz" lIns="91440" tIns="45720" rIns="91440" bIns="45720" rtlCol="0" anchor="b"/>
-          <a:lstStyle>
-            <a:lvl1pPr algn="r">
-              <a:defRPr sz="1200"/>
-            </a:lvl1pPr>
-          </a:lstStyle>
-          <a:p>
-            <a:fld id="{BB5E49A5-4136-284D-997B-48E1D791AD67}" type="slidenum">
-              <a:rPr lang="en-US" smtClean="0"/>
-              <a:t>‹#›</a:t>
-            </a:fld>
-            <a:endParaRPr lang="en-US"/>
-          </a:p>
-        </p:txBody>
-      </p:sp>
     </p:spTree>
     <p:extLst>
       <p:ext uri="{BB962C8B-B14F-4D97-AF65-F5344CB8AC3E}">
-        <p14:creationId xmlns:p14="http://schemas.microsoft.com/office/powerpoint/2010/main" val="2623252185"/>
+        <p14:creationId xmlns:p14="http://schemas.microsoft.com/office/powerpoint/2010/main" val="1604783540"/>
       </p:ext>
     </p:extLst>
   </p:cSld>
   <p:clrMap bg1="lt1" tx1="dk1" bg2="lt2" tx2="dk2" accent1="accent1" accent2="accent2" accent3="accent3" accent4="accent4" accent5="accent5" accent6="accent6" hlink="hlink" folHlink="folHlink"/>
   <p:notesStyle>
-    <a:lvl1pPr marL="0" algn="l" defTabSz="457200" rtl="0" eaLnBrk="1" latinLnBrk="0" hangingPunct="1">
+    <a:lvl1pPr marL="0" algn="l" defTabSz="914400" rtl="0" eaLnBrk="1" latinLnBrk="0" hangingPunct="1">
       <a:defRPr sz="1200" kern="1200">
         <a:solidFill>
           <a:schemeClr val="tx1"/>
@@ -387,7 +182,7 @@
         <a:cs typeface="+mn-cs"/>
       </a:defRPr>
     </a:lvl1pPr>
-    <a:lvl2pPr marL="457200" algn="l" defTabSz="457200" rtl="0" eaLnBrk="1" latinLnBrk="0" hangingPunct="1">
+    <a:lvl2pPr marL="457200" algn="l" defTabSz="914400" rtl="0" eaLnBrk="1" latinLnBrk="0" hangingPunct="1">
       <a:defRPr sz="1200" kern="1200">
         <a:solidFill>
           <a:schemeClr val="tx1"/>
@@ -397,7 +192,7 @@
         <a:cs typeface="+mn-cs"/>
       </a:defRPr>
     </a:lvl2pPr>
-    <a:lvl3pPr marL="914400" algn="l" defTabSz="457200" rtl="0" eaLnBrk="1" latinLnBrk="0" hangingPunct="1">
+    <a:lvl3pPr marL="914400" algn="l" defTabSz="914400" rtl="0" eaLnBrk="1" latinLnBrk="0" hangingPunct="1">
       <a:defRPr sz="1200" kern="1200">
         <a:solidFill>
           <a:schemeClr val="tx1"/>
@@ -407,7 +202,7 @@
         <a:cs typeface="+mn-cs"/>
       </a:defRPr>
     </a:lvl3pPr>
-    <a:lvl4pPr marL="1371600" algn="l" defTabSz="457200" rtl="0" eaLnBrk="1" latinLnBrk="0" hangingPunct="1">
+    <a:lvl4pPr marL="1371600" algn="l" defTabSz="914400" rtl="0" eaLnBrk="1" latinLnBrk="0" hangingPunct="1">
       <a:defRPr sz="1200" kern="1200">
         <a:solidFill>
           <a:schemeClr val="tx1"/>
@@ -417,7 +212,7 @@
         <a:cs typeface="+mn-cs"/>
       </a:defRPr>
     </a:lvl4pPr>
-    <a:lvl5pPr marL="1828800" algn="l" defTabSz="457200" rtl="0" eaLnBrk="1" latinLnBrk="0" hangingPunct="1">
+    <a:lvl5pPr marL="1828800" algn="l" defTabSz="914400" rtl="0" eaLnBrk="1" latinLnBrk="0" hangingPunct="1">
       <a:defRPr sz="1200" kern="1200">
         <a:solidFill>
           <a:schemeClr val="tx1"/>
@@ -427,7 +222,7 @@
         <a:cs typeface="+mn-cs"/>
       </a:defRPr>
     </a:lvl5pPr>
-    <a:lvl6pPr marL="2286000" algn="l" defTabSz="457200" rtl="0" eaLnBrk="1" latinLnBrk="0" hangingPunct="1">
+    <a:lvl6pPr marL="2286000" algn="l" defTabSz="914400" rtl="0" eaLnBrk="1" latinLnBrk="0" hangingPunct="1">
       <a:defRPr sz="1200" kern="1200">
         <a:solidFill>
           <a:schemeClr val="tx1"/>
@@ -437,7 +232,7 @@
         <a:cs typeface="+mn-cs"/>
       </a:defRPr>
     </a:lvl6pPr>
-    <a:lvl7pPr marL="2743200" algn="l" defTabSz="457200" rtl="0" eaLnBrk="1" latinLnBrk="0" hangingPunct="1">
+    <a:lvl7pPr marL="2743200" algn="l" defTabSz="914400" rtl="0" eaLnBrk="1" latinLnBrk="0" hangingPunct="1">
       <a:defRPr sz="1200" kern="1200">
         <a:solidFill>
           <a:schemeClr val="tx1"/>
@@ -447,7 +242,7 @@
         <a:cs typeface="+mn-cs"/>
       </a:defRPr>
     </a:lvl7pPr>
-    <a:lvl8pPr marL="3200400" algn="l" defTabSz="457200" rtl="0" eaLnBrk="1" latinLnBrk="0" hangingPunct="1">
+    <a:lvl8pPr marL="3200400" algn="l" defTabSz="914400" rtl="0" eaLnBrk="1" latinLnBrk="0" hangingPunct="1">
       <a:defRPr sz="1200" kern="1200">
         <a:solidFill>
           <a:schemeClr val="tx1"/>
@@ -457,7 +252,7 @@
         <a:cs typeface="+mn-cs"/>
       </a:defRPr>
     </a:lvl8pPr>
-    <a:lvl9pPr marL="3657600" algn="l" defTabSz="457200" rtl="0" eaLnBrk="1" latinLnBrk="0" hangingPunct="1">
+    <a:lvl9pPr marL="3657600" algn="l" defTabSz="914400" rtl="0" eaLnBrk="1" latinLnBrk="0" hangingPunct="1">
       <a:defRPr sz="1200" kern="1200">
         <a:solidFill>
           <a:schemeClr val="tx1"/>
@@ -472,7 +267,7 @@
 </file>
 
 <file path=ppt/notesSlides/notesSlide1.xml><?xml version="1.0" encoding="utf-8"?>
-<p:notes xmlns:a="http://schemas.openxmlformats.org/drawingml/2006/main" xmlns:p="http://schemas.openxmlformats.org/presentationml/2006/main" xmlns:r="http://schemas.openxmlformats.org/officeDocument/2006/relationships">
+<p:notes xmlns:a="http://schemas.openxmlformats.org/drawingml/2006/main" xmlns:r="http://schemas.openxmlformats.org/officeDocument/2006/relationships" xmlns:p="http://schemas.openxmlformats.org/presentationml/2006/main">
   <p:cSld>
     <p:spTree>
       <p:nvGrpSpPr>
@@ -492,7 +287,7 @@
         <p:nvSpPr>
           <p:cNvPr id="2" name="Slide Image Placeholder 1"/>
           <p:cNvSpPr>
-            <a:spLocks noGrp="1"/>
+            <a:spLocks noGrp="1" noRot="1" noChangeAspect="1"/>
           </p:cNvSpPr>
           <p:nvPr>
             <p:ph type="sldImg" idx="2"/>
@@ -507,7 +302,7 @@
             <a:spLocks noGrp="1"/>
           </p:cNvSpPr>
           <p:nvPr>
-            <p:ph type="body" idx="3" sz="quarter"/>
+            <p:ph type="body" sz="quarter" idx="3"/>
           </p:nvPr>
         </p:nvSpPr>
         <p:spPr/>
@@ -528,7 +323,7 @@
             <a:spLocks noGrp="1"/>
           </p:cNvSpPr>
           <p:nvPr>
-            <p:ph type="sldNum" idx="5" sz="quarter"/>
+            <p:ph type="sldNum" sz="quarter" idx="5"/>
           </p:nvPr>
         </p:nvSpPr>
         <p:spPr/>
@@ -542,7 +337,7 @@
 </file>
 
 <file path=ppt/notesSlides/notesSlide10.xml><?xml version="1.0" encoding="utf-8"?>
-<p:notes xmlns:a="http://schemas.openxmlformats.org/drawingml/2006/main" xmlns:p="http://schemas.openxmlformats.org/presentationml/2006/main" xmlns:r="http://schemas.openxmlformats.org/officeDocument/2006/relationships">
+<p:notes xmlns:a="http://schemas.openxmlformats.org/drawingml/2006/main" xmlns:r="http://schemas.openxmlformats.org/officeDocument/2006/relationships" xmlns:p="http://schemas.openxmlformats.org/presentationml/2006/main">
   <p:cSld>
     <p:spTree>
       <p:nvGrpSpPr>
@@ -562,7 +357,7 @@
         <p:nvSpPr>
           <p:cNvPr id="2" name="Slide Image Placeholder 1"/>
           <p:cNvSpPr>
-            <a:spLocks noGrp="1"/>
+            <a:spLocks noGrp="1" noRot="1" noChangeAspect="1"/>
           </p:cNvSpPr>
           <p:nvPr>
             <p:ph type="sldImg" idx="2"/>
@@ -577,7 +372,7 @@
             <a:spLocks noGrp="1"/>
           </p:cNvSpPr>
           <p:nvPr>
-            <p:ph type="body" idx="3" sz="quarter"/>
+            <p:ph type="body" sz="quarter" idx="3"/>
           </p:nvPr>
         </p:nvSpPr>
         <p:spPr/>
@@ -586,7 +381,7 @@
           <a:lstStyle/>
           <a:p>
             <a:r>
-              <a:t>I want to spend a moment on the middle row, because it's the most important one. The reason Sandra's £170 credit appeared in the Artefact 2 case with no audit log entry is that the current process relies on people following a procedure under time pressure. That's a procedure-dependent control — and we've already seen it fail. What we're building is a system-dependent control: the credit record cannot be written until a human has authenticated. That's not a rule we're asking your team to follow. It's a technical constraint.</a:t>
+              <a:t>What this agent replaces is the data assembly and the audit trail enforcement — the parts of Sandra's job that take the most time but require the least judgment. What it does not replace is the part that actually requires Sandra: deciding whether a credit is warranted, how much, and — in the cases that don't fit the standard types — making a call. The target outcome is that Sandra spends 8 minutes reviewing a pre-assembled case and confirming an amount, rather than 28 minutes rebuilding the picture from scratch and then writing it up informally.</a:t>
             </a:r>
           </a:p>
         </p:txBody>
@@ -598,7 +393,7 @@
             <a:spLocks noGrp="1"/>
           </p:cNvSpPr>
           <p:nvPr>
-            <p:ph type="sldNum" idx="5" sz="quarter"/>
+            <p:ph type="sldNum" sz="quarter" idx="5"/>
           </p:nvPr>
         </p:nvSpPr>
         <p:spPr/>
@@ -612,7 +407,7 @@
 </file>
 
 <file path=ppt/notesSlides/notesSlide11.xml><?xml version="1.0" encoding="utf-8"?>
-<p:notes xmlns:a="http://schemas.openxmlformats.org/drawingml/2006/main" xmlns:p="http://schemas.openxmlformats.org/presentationml/2006/main" xmlns:r="http://schemas.openxmlformats.org/officeDocument/2006/relationships">
+<p:notes xmlns:a="http://schemas.openxmlformats.org/drawingml/2006/main" xmlns:r="http://schemas.openxmlformats.org/officeDocument/2006/relationships" xmlns:p="http://schemas.openxmlformats.org/presentationml/2006/main">
   <p:cSld>
     <p:spTree>
       <p:nvGrpSpPr>
@@ -632,7 +427,7 @@
         <p:nvSpPr>
           <p:cNvPr id="2" name="Slide Image Placeholder 1"/>
           <p:cNvSpPr>
-            <a:spLocks noGrp="1"/>
+            <a:spLocks noGrp="1" noRot="1" noChangeAspect="1"/>
           </p:cNvSpPr>
           <p:nvPr>
             <p:ph type="sldImg" idx="2"/>
@@ -647,7 +442,7 @@
             <a:spLocks noGrp="1"/>
           </p:cNvSpPr>
           <p:nvPr>
-            <p:ph type="body" idx="3" sz="quarter"/>
+            <p:ph type="body" sz="quarter" idx="3"/>
           </p:nvPr>
         </p:nvSpPr>
         <p:spPr/>
@@ -656,7 +451,7 @@
           <a:lstStyle/>
           <a:p>
             <a:r>
-              <a:t>The amber and two reds are not reasons not to build. They're the specific things that need to be resolved before we can commit to a timeline. The Salesforce amber is likely a configuration question — your IT team or Salesforce admin should be able to answer it in a day. The two reds are genuinely blocking: we cannot build the credit recommendation or credit write capability until they're resolved. The good news is that neither requires a new system to be built. One is a policy design decision — who owns it, and what are the rules. The other is a question for your Aurum vendor that we'd like to ask together.</a:t>
+              <a:t>I want to spend a moment on the middle row, because it's the most important one. The reason Sandra's £170 credit appeared in the Artefact 2 case with no audit log entry is that the current process relies on people following a procedure under time pressure. That's a procedure-dependent control — and we've already seen it fail. What we're building is a system-dependent control: the credit record cannot be written until a human has authenticated. That's not a rule we're asking your team to follow. It's a technical constraint.</a:t>
             </a:r>
           </a:p>
         </p:txBody>
@@ -668,7 +463,7 @@
             <a:spLocks noGrp="1"/>
           </p:cNvSpPr>
           <p:nvPr>
-            <p:ph type="sldNum" idx="5" sz="quarter"/>
+            <p:ph type="sldNum" sz="quarter" idx="5"/>
           </p:nvPr>
         </p:nvSpPr>
         <p:spPr/>
@@ -682,7 +477,7 @@
 </file>
 
 <file path=ppt/notesSlides/notesSlide12.xml><?xml version="1.0" encoding="utf-8"?>
-<p:notes xmlns:a="http://schemas.openxmlformats.org/drawingml/2006/main" xmlns:p="http://schemas.openxmlformats.org/presentationml/2006/main" xmlns:r="http://schemas.openxmlformats.org/officeDocument/2006/relationships">
+<p:notes xmlns:a="http://schemas.openxmlformats.org/drawingml/2006/main" xmlns:r="http://schemas.openxmlformats.org/officeDocument/2006/relationships" xmlns:p="http://schemas.openxmlformats.org/presentationml/2006/main">
   <p:cSld>
     <p:spTree>
       <p:nvGrpSpPr>
@@ -702,7 +497,7 @@
         <p:nvSpPr>
           <p:cNvPr id="2" name="Slide Image Placeholder 1"/>
           <p:cNvSpPr>
-            <a:spLocks noGrp="1"/>
+            <a:spLocks noGrp="1" noRot="1" noChangeAspect="1"/>
           </p:cNvSpPr>
           <p:nvPr>
             <p:ph type="sldImg" idx="2"/>
@@ -717,7 +512,7 @@
             <a:spLocks noGrp="1"/>
           </p:cNvSpPr>
           <p:nvPr>
-            <p:ph type="body" idx="3" sz="quarter"/>
+            <p:ph type="body" sz="quarter" idx="3"/>
           </p:nvPr>
         </p:nvSpPr>
         <p:spPr/>
@@ -726,7 +521,7 @@
           <a:lstStyle/>
           <a:p>
             <a:r>
-              <a:t>I want to be clear about why these are the five questions and not others. We're not asking about your systems — we have the Aurum exports and the CRM data. We're not asking about volumes — they're in the scenario. These five are the ones where the answer materially changes what we build. The credit policy question is the most important: if the answer is that no policy exists and you're not sure who would own writing one, that changes the build timeline more than any technical question. I'd like to spend most of our discussion time on questions two and one.</a:t>
+              <a:t>The amber and two reds are not reasons not to build. They're the specific things that need to be resolved before we can commit to a timeline. The Salesforce amber is likely a configuration question — your IT team or Salesforce admin should be able to answer it in a day. The two reds are genuinely blocking: we cannot build the credit recommendation or credit write capability until they're resolved. The good news is that neither requires a new system to be built. One is a policy design decision — who owns it, and what are the rules. The other is a question for your Aurum vendor that we'd like to ask together.</a:t>
             </a:r>
           </a:p>
         </p:txBody>
@@ -738,7 +533,7 @@
             <a:spLocks noGrp="1"/>
           </p:cNvSpPr>
           <p:nvPr>
-            <p:ph type="sldNum" idx="5" sz="quarter"/>
+            <p:ph type="sldNum" sz="quarter" idx="5"/>
           </p:nvPr>
         </p:nvSpPr>
         <p:spPr/>
@@ -752,7 +547,7 @@
 </file>
 
 <file path=ppt/notesSlides/notesSlide13.xml><?xml version="1.0" encoding="utf-8"?>
-<p:notes xmlns:a="http://schemas.openxmlformats.org/drawingml/2006/main" xmlns:p="http://schemas.openxmlformats.org/presentationml/2006/main" xmlns:r="http://schemas.openxmlformats.org/officeDocument/2006/relationships">
+<p:notes xmlns:a="http://schemas.openxmlformats.org/drawingml/2006/main" xmlns:r="http://schemas.openxmlformats.org/officeDocument/2006/relationships" xmlns:p="http://schemas.openxmlformats.org/presentationml/2006/main">
   <p:cSld>
     <p:spTree>
       <p:nvGrpSpPr>
@@ -772,7 +567,7 @@
         <p:nvSpPr>
           <p:cNvPr id="2" name="Slide Image Placeholder 1"/>
           <p:cNvSpPr>
-            <a:spLocks noGrp="1"/>
+            <a:spLocks noGrp="1" noRot="1" noChangeAspect="1"/>
           </p:cNvSpPr>
           <p:nvPr>
             <p:ph type="sldImg" idx="2"/>
@@ -787,7 +582,7 @@
             <a:spLocks noGrp="1"/>
           </p:cNvSpPr>
           <p:nvPr>
-            <p:ph type="body" idx="3" sz="quarter"/>
+            <p:ph type="body" sz="quarter" idx="3"/>
           </p:nvPr>
         </p:nvSpPr>
         <p:spPr/>
@@ -796,7 +591,7 @@
           <a:lstStyle/>
           <a:p>
             <a:r>
-              <a:t>These three prompts are the places where the assessment surfaces tensions that can't be resolved with better data — they need a decision from this room. The first one is about change management: I'd rather have that conversation now than discover it during rollout. The second is a genuine fork in the build design with real cost and timeline differences. The third is the most important: if there is a version of a credit policy somewhere — a finance memo, a management email, even a whiteboard photo — that's a very different starting point than writing from scratch.</a:t>
+              <a:t>I want to be clear about why these are the five questions and not others. We're not asking about your systems — we have the Aurum exports and the CRM data. We're not asking about volumes — they're in the scenario. These five are the ones where the answer materially changes what we build. The credit policy question is the most important: if the answer is that no policy exists and you're not sure who would own writing one, that changes the build timeline more than any technical question. I'd like to spend most of our discussion time on questions two and one.</a:t>
             </a:r>
           </a:p>
         </p:txBody>
@@ -808,7 +603,7 @@
             <a:spLocks noGrp="1"/>
           </p:cNvSpPr>
           <p:nvPr>
-            <p:ph type="sldNum" idx="5" sz="quarter"/>
+            <p:ph type="sldNum" sz="quarter" idx="5"/>
           </p:nvPr>
         </p:nvSpPr>
         <p:spPr/>
@@ -822,7 +617,7 @@
 </file>
 
 <file path=ppt/notesSlides/notesSlide14.xml><?xml version="1.0" encoding="utf-8"?>
-<p:notes xmlns:a="http://schemas.openxmlformats.org/drawingml/2006/main" xmlns:p="http://schemas.openxmlformats.org/presentationml/2006/main" xmlns:r="http://schemas.openxmlformats.org/officeDocument/2006/relationships">
+<p:notes xmlns:a="http://schemas.openxmlformats.org/drawingml/2006/main" xmlns:r="http://schemas.openxmlformats.org/officeDocument/2006/relationships" xmlns:p="http://schemas.openxmlformats.org/presentationml/2006/main">
   <p:cSld>
     <p:spTree>
       <p:nvGrpSpPr>
@@ -842,7 +637,7 @@
         <p:nvSpPr>
           <p:cNvPr id="2" name="Slide Image Placeholder 1"/>
           <p:cNvSpPr>
-            <a:spLocks noGrp="1"/>
+            <a:spLocks noGrp="1" noRot="1" noChangeAspect="1"/>
           </p:cNvSpPr>
           <p:nvPr>
             <p:ph type="sldImg" idx="2"/>
@@ -857,7 +652,7 @@
             <a:spLocks noGrp="1"/>
           </p:cNvSpPr>
           <p:nvPr>
-            <p:ph type="body" idx="3" sz="quarter"/>
+            <p:ph type="body" sz="quarter" idx="3"/>
           </p:nvPr>
         </p:nvSpPr>
         <p:spPr/>
@@ -866,7 +661,7 @@
           <a:lstStyle/>
           <a:p>
             <a:r>
-              <a:t>The first two actions are discovery — they can happen in parallel and in under two weeks if the right people are in the room. The third is the most consequential: it's not a task we can do for you, but we can provide the template and the framing. The fourth is the pre-deployment safety requirement — we will not deploy an agent that makes autonomous validity assessments until we've validated its confidence scores against 150 real cases labelled by your own senior agents. That's the answer to the question about what's different this time.</a:t>
+              <a:t>These three prompts are the places where the assessment surfaces tensions that can't be resolved with better data — they need a decision from this room. The first one is about change management: I'd rather have that conversation now than discover it during rollout. The second is a genuine fork in the build design with real cost and timeline differences. The third is the most important: if there is a version of a credit policy somewhere — a finance memo, a management email, even a whiteboard photo — that's a very different starting point than writing from scratch.</a:t>
             </a:r>
           </a:p>
         </p:txBody>
@@ -878,7 +673,7 @@
             <a:spLocks noGrp="1"/>
           </p:cNvSpPr>
           <p:nvPr>
-            <p:ph type="sldNum" idx="5" sz="quarter"/>
+            <p:ph type="sldNum" sz="quarter" idx="5"/>
           </p:nvPr>
         </p:nvSpPr>
         <p:spPr/>
@@ -892,7 +687,7 @@
 </file>
 
 <file path=ppt/notesSlides/notesSlide15.xml><?xml version="1.0" encoding="utf-8"?>
-<p:notes xmlns:a="http://schemas.openxmlformats.org/drawingml/2006/main" xmlns:p="http://schemas.openxmlformats.org/presentationml/2006/main" xmlns:r="http://schemas.openxmlformats.org/officeDocument/2006/relationships">
+<p:notes xmlns:a="http://schemas.openxmlformats.org/drawingml/2006/main" xmlns:r="http://schemas.openxmlformats.org/officeDocument/2006/relationships" xmlns:p="http://schemas.openxmlformats.org/presentationml/2006/main">
   <p:cSld>
     <p:spTree>
       <p:nvGrpSpPr>
@@ -912,7 +707,7 @@
         <p:nvSpPr>
           <p:cNvPr id="2" name="Slide Image Placeholder 1"/>
           <p:cNvSpPr>
-            <a:spLocks noGrp="1"/>
+            <a:spLocks noGrp="1" noRot="1" noChangeAspect="1"/>
           </p:cNvSpPr>
           <p:nvPr>
             <p:ph type="sldImg" idx="2"/>
@@ -927,7 +722,7 @@
             <a:spLocks noGrp="1"/>
           </p:cNvSpPr>
           <p:nvPr>
-            <p:ph type="body" idx="3" sz="quarter"/>
+            <p:ph type="body" sz="quarter" idx="3"/>
           </p:nvPr>
         </p:nvSpPr>
         <p:spPr/>
@@ -936,7 +731,7 @@
           <a:lstStyle/>
           <a:p>
             <a:r>
-              <a:t>Close by returning to the question the assessment set out to answer: can a targeted agent reduce dispute handling time, close the compliance gap, and give Apex an auditable trace of every credit decision without repeating the failures of 2024? The answer is yes — but only if the two blocking gaps are resolved first. Those are your decisions, and I'd like to leave this room with clarity on who owns each one and what the timeline is.</a:t>
+              <a:t>The first two actions are discovery — they can happen in parallel and in under two weeks if the right people are in the room. The third is the most consequential: it's not a task we can do for you, but we can provide the template and the framing. The fourth is the pre-deployment safety requirement — we will not deploy an agent that makes autonomous validity assessments until we've validated its confidence scores against 150 real cases labelled by your own senior agents. That's the answer to the question about what's different this time.</a:t>
             </a:r>
           </a:p>
         </p:txBody>
@@ -948,7 +743,7 @@
             <a:spLocks noGrp="1"/>
           </p:cNvSpPr>
           <p:nvPr>
-            <p:ph type="sldNum" idx="5" sz="quarter"/>
+            <p:ph type="sldNum" sz="quarter" idx="5"/>
           </p:nvPr>
         </p:nvSpPr>
         <p:spPr/>
@@ -961,8 +756,8 @@
 </p:notes>
 </file>
 
-<file path=ppt/notesSlides/notesSlide2.xml><?xml version="1.0" encoding="utf-8"?>
-<p:notes xmlns:a="http://schemas.openxmlformats.org/drawingml/2006/main" xmlns:p="http://schemas.openxmlformats.org/presentationml/2006/main" xmlns:r="http://schemas.openxmlformats.org/officeDocument/2006/relationships">
+<file path=ppt/notesSlides/notesSlide16.xml><?xml version="1.0" encoding="utf-8"?>
+<p:notes xmlns:a="http://schemas.openxmlformats.org/drawingml/2006/main" xmlns:r="http://schemas.openxmlformats.org/officeDocument/2006/relationships" xmlns:p="http://schemas.openxmlformats.org/presentationml/2006/main">
   <p:cSld>
     <p:spTree>
       <p:nvGrpSpPr>
@@ -982,7 +777,7 @@
         <p:nvSpPr>
           <p:cNvPr id="2" name="Slide Image Placeholder 1"/>
           <p:cNvSpPr>
-            <a:spLocks noGrp="1"/>
+            <a:spLocks noGrp="1" noRot="1" noChangeAspect="1"/>
           </p:cNvSpPr>
           <p:nvPr>
             <p:ph type="sldImg" idx="2"/>
@@ -997,7 +792,7 @@
             <a:spLocks noGrp="1"/>
           </p:cNvSpPr>
           <p:nvPr>
-            <p:ph type="body" idx="3" sz="quarter"/>
+            <p:ph type="body" sz="quarter" idx="3"/>
           </p:nvPr>
         </p:nvSpPr>
         <p:spPr/>
@@ -1006,7 +801,7 @@
           <a:lstStyle/>
           <a:p>
             <a:r>
-              <a:t>We'll move through five sections. The first two are about what we observed. The third is our recommendation. The fourth is where I'll need your answers — not hypotheticals, but specific operational facts that change what we build. The fifth is a concrete action list. I'll leave time for open discussion before next steps.</a:t>
+              <a:t>Close by returning to the question the assessment set out to answer: can a targeted agent reduce dispute handling time, close the compliance gap, and give Apex an auditable trace of every credit decision without repeating the failures of 2024? The answer is yes — but only if the two blocking gaps are resolved first. Those are your decisions, and I'd like to leave this room with clarity on who owns each one and what the timeline is.</a:t>
             </a:r>
           </a:p>
         </p:txBody>
@@ -1018,7 +813,7 @@
             <a:spLocks noGrp="1"/>
           </p:cNvSpPr>
           <p:nvPr>
-            <p:ph type="sldNum" idx="5" sz="quarter"/>
+            <p:ph type="sldNum" sz="quarter" idx="5"/>
           </p:nvPr>
         </p:nvSpPr>
         <p:spPr/>
@@ -1031,8 +826,8 @@
 </p:notes>
 </file>
 
-<file path=ppt/notesSlides/notesSlide3.xml><?xml version="1.0" encoding="utf-8"?>
-<p:notes xmlns:a="http://schemas.openxmlformats.org/drawingml/2006/main" xmlns:p="http://schemas.openxmlformats.org/presentationml/2006/main" xmlns:r="http://schemas.openxmlformats.org/officeDocument/2006/relationships">
+<file path=ppt/notesSlides/notesSlide2.xml><?xml version="1.0" encoding="utf-8"?>
+<p:notes xmlns:a="http://schemas.openxmlformats.org/drawingml/2006/main" xmlns:r="http://schemas.openxmlformats.org/officeDocument/2006/relationships" xmlns:p="http://schemas.openxmlformats.org/presentationml/2006/main">
   <p:cSld>
     <p:spTree>
       <p:nvGrpSpPr>
@@ -1052,7 +847,7 @@
         <p:nvSpPr>
           <p:cNvPr id="2" name="Slide Image Placeholder 1"/>
           <p:cNvSpPr>
-            <a:spLocks noGrp="1"/>
+            <a:spLocks noGrp="1" noRot="1" noChangeAspect="1"/>
           </p:cNvSpPr>
           <p:nvPr>
             <p:ph type="sldImg" idx="2"/>
@@ -1067,7 +862,7 @@
             <a:spLocks noGrp="1"/>
           </p:cNvSpPr>
           <p:nvPr>
-            <p:ph type="body" idx="3" sz="quarter"/>
+            <p:ph type="body" sz="quarter" idx="3"/>
           </p:nvPr>
         </p:nvSpPr>
         <p:spPr/>
@@ -1076,7 +871,7 @@
           <a:lstStyle/>
           <a:p>
             <a:r>
-              <a:t>Before I show you what we found in billing disputes specifically, I want to be transparent about how we chose to focus there. We looked at all four work streams and applied a consistent assessment lens — volume, complexity, system readiness, and compliance risk. Dispatch adjustments score highly on complexity but the dispatch console is a Citrix-hosted Java application with no confirmed API surface, and building a brittle integration there would recreate exactly the failure mode of the 2024 RPA. ETA inquiries are your highest-volume work stream but they're mostly a lookup — that's an automation, not an agent. Billing disputes is where complexity, compliance risk, and confirmed data access converge. That's why it's the recommendation.</a:t>
+              <a:t>We'll move through five sections. The first two are about what we observed. The third is our recommendation. The fourth is where I'll need your answers — not hypotheticals, but specific operational facts that change what we build. The fifth is a concrete action list. I'll leave time for open discussion before next steps.</a:t>
             </a:r>
           </a:p>
         </p:txBody>
@@ -1088,7 +883,7 @@
             <a:spLocks noGrp="1"/>
           </p:cNvSpPr>
           <p:nvPr>
-            <p:ph type="sldNum" idx="5" sz="quarter"/>
+            <p:ph type="sldNum" sz="quarter" idx="5"/>
           </p:nvPr>
         </p:nvSpPr>
         <p:spPr/>
@@ -1101,8 +896,8 @@
 </p:notes>
 </file>
 
-<file path=ppt/notesSlides/notesSlide4.xml><?xml version="1.0" encoding="utf-8"?>
-<p:notes xmlns:a="http://schemas.openxmlformats.org/drawingml/2006/main" xmlns:p="http://schemas.openxmlformats.org/presentationml/2006/main" xmlns:r="http://schemas.openxmlformats.org/officeDocument/2006/relationships">
+<file path=ppt/notesSlides/notesSlide3.xml><?xml version="1.0" encoding="utf-8"?>
+<p:notes xmlns:a="http://schemas.openxmlformats.org/drawingml/2006/main" xmlns:r="http://schemas.openxmlformats.org/officeDocument/2006/relationships" xmlns:p="http://schemas.openxmlformats.org/presentationml/2006/main">
   <p:cSld>
     <p:spTree>
       <p:nvGrpSpPr>
@@ -1122,7 +917,7 @@
         <p:nvSpPr>
           <p:cNvPr id="2" name="Slide Image Placeholder 1"/>
           <p:cNvSpPr>
-            <a:spLocks noGrp="1"/>
+            <a:spLocks noGrp="1" noRot="1" noChangeAspect="1"/>
           </p:cNvSpPr>
           <p:nvPr>
             <p:ph type="sldImg" idx="2"/>
@@ -1137,7 +932,7 @@
             <a:spLocks noGrp="1"/>
           </p:cNvSpPr>
           <p:nvPr>
-            <p:ph type="body" idx="3" sz="quarter"/>
+            <p:ph type="body" sz="quarter" idx="3"/>
           </p:nvPr>
         </p:nvSpPr>
         <p:spPr/>
@@ -1146,7 +941,7 @@
           <a:lstStyle/>
           <a:p>
             <a:r>
-              <a:t>The 2024 chatbot and the billing RPA are in the room. I want to address them directly: both failed for specific, diagnosable reasons — the chatbot was customer-facing without a clear job to do, and the RPA broke because Aurum's data format changed without warning. What we're recommending today is different in both scope and design, and I'll show you specifically what we've built in to prevent the Aurum schema failure from happening again. But first, let me show you what the process actually looks like today.</a:t>
+              <a:t>Before I show you what we found in billing disputes specifically, I want to be transparent about how we chose to focus there. We looked at all four work streams and applied a consistent assessment lens — volume, complexity, system readiness, and compliance risk. Dispatch adjustments score highly on complexity but the dispatch console is a Citrix-hosted Java application with no confirmed API surface, and building a brittle integration there would recreate exactly the failure mode of the 2024 RPA. ETA inquiries are your highest-volume work stream but they're mostly a lookup — that's an automation, not an agent. Billing disputes is where complexity, compliance risk, and confirmed data access converge. That's why it's the recommendation.</a:t>
             </a:r>
           </a:p>
         </p:txBody>
@@ -1158,7 +953,7 @@
             <a:spLocks noGrp="1"/>
           </p:cNvSpPr>
           <p:nvPr>
-            <p:ph type="sldNum" idx="5" sz="quarter"/>
+            <p:ph type="sldNum" sz="quarter" idx="5"/>
           </p:nvPr>
         </p:nvSpPr>
         <p:spPr/>
@@ -1171,8 +966,8 @@
 </p:notes>
 </file>
 
-<file path=ppt/notesSlides/notesSlide5.xml><?xml version="1.0" encoding="utf-8"?>
-<p:notes xmlns:a="http://schemas.openxmlformats.org/drawingml/2006/main" xmlns:p="http://schemas.openxmlformats.org/presentationml/2006/main" xmlns:r="http://schemas.openxmlformats.org/officeDocument/2006/relationships">
+<file path=ppt/notesSlides/notesSlide4.xml><?xml version="1.0" encoding="utf-8"?>
+<p:notes xmlns:a="http://schemas.openxmlformats.org/drawingml/2006/main" xmlns:r="http://schemas.openxmlformats.org/officeDocument/2006/relationships" xmlns:p="http://schemas.openxmlformats.org/presentationml/2006/main">
   <p:cSld>
     <p:spTree>
       <p:nvGrpSpPr>
@@ -1192,7 +987,7 @@
         <p:nvSpPr>
           <p:cNvPr id="2" name="Slide Image Placeholder 1"/>
           <p:cNvSpPr>
-            <a:spLocks noGrp="1"/>
+            <a:spLocks noGrp="1" noRot="1" noChangeAspect="1"/>
           </p:cNvSpPr>
           <p:nvPr>
             <p:ph type="sldImg" idx="2"/>
@@ -1207,7 +1002,7 @@
             <a:spLocks noGrp="1"/>
           </p:cNvSpPr>
           <p:nvPr>
-            <p:ph type="body" idx="3" sz="quarter"/>
+            <p:ph type="body" sz="quarter" idx="3"/>
           </p:nvPr>
         </p:nvSpPr>
         <p:spPr/>
@@ -1216,7 +1011,7 @@
           <a:lstStyle/>
           <a:p>
             <a:r>
-              <a:t>The flow I've drawn is based on actual case records, not the SOP. The SOP references DispatchHub, which was retired eighteen months ago, and the section covering damaged consignments is blank — marked TBD. So your team is resolving sixty cases a day against no documented policy and using a system that wasn't designed to give them the information they need at the time they need it. The result is what you see in that internal note on the Hayes &amp; Sons case: a credit applied with no record of who approved it.</a:t>
+              <a:t>The axes here are non-determinism — how much reasoning, judgment, and synthesis the work actually requires — and volume. An agent earns its keep in the top-right quadrant: high enough volume that the time saving compounds, and high enough reasoning complexity that a simpler automation can't do the job. ETA inquiries score high on volume but low on non-determinism — that's a lookup, not an agent. Dispatch adjustments would sit in the primary target zone if the dispatch console had a confirmed API surface; it doesn't yet, so it stays conditional. Billing disputes is the target: highest non-determinism in the portfolio, confirmed data access, and an active compliance gap the agent closes at the same time as it cuts handle time.</a:t>
             </a:r>
           </a:p>
         </p:txBody>
@@ -1228,7 +1023,7 @@
             <a:spLocks noGrp="1"/>
           </p:cNvSpPr>
           <p:nvPr>
-            <p:ph type="sldNum" idx="5" sz="quarter"/>
+            <p:ph type="sldNum" sz="quarter" idx="5"/>
           </p:nvPr>
         </p:nvSpPr>
         <p:spPr/>
@@ -1241,8 +1036,8 @@
 </p:notes>
 </file>
 
-<file path=ppt/notesSlides/notesSlide6.xml><?xml version="1.0" encoding="utf-8"?>
-<p:notes xmlns:a="http://schemas.openxmlformats.org/drawingml/2006/main" xmlns:p="http://schemas.openxmlformats.org/presentationml/2006/main" xmlns:r="http://schemas.openxmlformats.org/officeDocument/2006/relationships">
+<file path=ppt/notesSlides/notesSlide5.xml><?xml version="1.0" encoding="utf-8"?>
+<p:notes xmlns:a="http://schemas.openxmlformats.org/drawingml/2006/main" xmlns:r="http://schemas.openxmlformats.org/officeDocument/2006/relationships" xmlns:p="http://schemas.openxmlformats.org/presentationml/2006/main">
   <p:cSld>
     <p:spTree>
       <p:nvGrpSpPr>
@@ -1262,7 +1057,7 @@
         <p:nvSpPr>
           <p:cNvPr id="2" name="Slide Image Placeholder 1"/>
           <p:cNvSpPr>
-            <a:spLocks noGrp="1"/>
+            <a:spLocks noGrp="1" noRot="1" noChangeAspect="1"/>
           </p:cNvSpPr>
           <p:nvPr>
             <p:ph type="sldImg" idx="2"/>
@@ -1277,7 +1072,7 @@
             <a:spLocks noGrp="1"/>
           </p:cNvSpPr>
           <p:nvPr>
-            <p:ph type="body" idx="3" sz="quarter"/>
+            <p:ph type="body" sz="quarter" idx="3"/>
           </p:nvPr>
         </p:nvSpPr>
         <p:spPr/>
@@ -1286,7 +1081,7 @@
           <a:lstStyle/>
           <a:p>
             <a:r>
-              <a:t>The first hotspot is the one an agent fixes most directly and most safely — data assembly is not a judgment call, it's a retrieval task that takes time because the systems aren't integrated. The second hotspot is the one that requires a policy decision from you before we can build anything. The third hotspot is the reason the compliance argument for this agent is as strong as the efficiency argument — we're not just saving time, we're closing a gap that's already creating audit exposure today.</a:t>
+              <a:t>The 2024 chatbot and the billing RPA are in the room. I want to address them directly: both failed for specific, diagnosable reasons — the chatbot was customer-facing without a clear job to do, and the RPA broke because Aurum's data format changed without warning. What we're recommending today is different in both scope and design, and I'll show you specifically what we've built in to prevent the Aurum schema failure from happening again. But first, let me show you what the process actually looks like today.</a:t>
             </a:r>
           </a:p>
         </p:txBody>
@@ -1298,7 +1093,7 @@
             <a:spLocks noGrp="1"/>
           </p:cNvSpPr>
           <p:nvPr>
-            <p:ph type="sldNum" idx="5" sz="quarter"/>
+            <p:ph type="sldNum" sz="quarter" idx="5"/>
           </p:nvPr>
         </p:nvSpPr>
         <p:spPr/>
@@ -1311,8 +1106,8 @@
 </p:notes>
 </file>
 
-<file path=ppt/notesSlides/notesSlide7.xml><?xml version="1.0" encoding="utf-8"?>
-<p:notes xmlns:a="http://schemas.openxmlformats.org/drawingml/2006/main" xmlns:p="http://schemas.openxmlformats.org/presentationml/2006/main" xmlns:r="http://schemas.openxmlformats.org/officeDocument/2006/relationships">
+<file path=ppt/notesSlides/notesSlide6.xml><?xml version="1.0" encoding="utf-8"?>
+<p:notes xmlns:a="http://schemas.openxmlformats.org/drawingml/2006/main" xmlns:r="http://schemas.openxmlformats.org/officeDocument/2006/relationships" xmlns:p="http://schemas.openxmlformats.org/presentationml/2006/main">
   <p:cSld>
     <p:spTree>
       <p:nvGrpSpPr>
@@ -1332,7 +1127,7 @@
         <p:nvSpPr>
           <p:cNvPr id="2" name="Slide Image Placeholder 1"/>
           <p:cNvSpPr>
-            <a:spLocks noGrp="1"/>
+            <a:spLocks noGrp="1" noRot="1" noChangeAspect="1"/>
           </p:cNvSpPr>
           <p:nvPr>
             <p:ph type="sldImg" idx="2"/>
@@ -1347,7 +1142,7 @@
             <a:spLocks noGrp="1"/>
           </p:cNvSpPr>
           <p:nvPr>
-            <p:ph type="body" idx="3" sz="quarter"/>
+            <p:ph type="body" sz="quarter" idx="3"/>
           </p:nvPr>
         </p:nvSpPr>
         <p:spPr/>
@@ -1356,7 +1151,7 @@
           <a:lstStyle/>
           <a:p>
             <a:r>
-              <a:t>The right column is not a shortlist of things we couldn't figure out how to automate. It's where the design draws a deliberate line. The credit amount decision needs a written policy before any agent can apply it consistently — and that policy doesn't exist yet, which is one of the decisions I'll come back to. The approval gate is different: that's a system constraint we're building in as a hard rule. The agent physically cannot write a credit record until a named human has authenticated and confirmed it in the workflow.</a:t>
+              <a:t>The flow I've drawn is based on actual case records, not the SOP. The SOP references DispatchHub, which was retired eighteen months ago, and the section covering damaged consignments is blank — marked TBD. So your team is resolving sixty cases a day against no documented policy and using a system that wasn't designed to give them the information they need at the time they need it. The result is what you see in that internal note on the Hayes &amp; Sons case: a credit applied with no record of who approved it.</a:t>
             </a:r>
           </a:p>
         </p:txBody>
@@ -1368,7 +1163,7 @@
             <a:spLocks noGrp="1"/>
           </p:cNvSpPr>
           <p:nvPr>
-            <p:ph type="sldNum" idx="5" sz="quarter"/>
+            <p:ph type="sldNum" sz="quarter" idx="5"/>
           </p:nvPr>
         </p:nvSpPr>
         <p:spPr/>
@@ -1381,8 +1176,8 @@
 </p:notes>
 </file>
 
-<file path=ppt/notesSlides/notesSlide8.xml><?xml version="1.0" encoding="utf-8"?>
-<p:notes xmlns:a="http://schemas.openxmlformats.org/drawingml/2006/main" xmlns:p="http://schemas.openxmlformats.org/presentationml/2006/main" xmlns:r="http://schemas.openxmlformats.org/officeDocument/2006/relationships">
+<file path=ppt/notesSlides/notesSlide7.xml><?xml version="1.0" encoding="utf-8"?>
+<p:notes xmlns:a="http://schemas.openxmlformats.org/drawingml/2006/main" xmlns:r="http://schemas.openxmlformats.org/officeDocument/2006/relationships" xmlns:p="http://schemas.openxmlformats.org/presentationml/2006/main">
   <p:cSld>
     <p:spTree>
       <p:nvGrpSpPr>
@@ -1402,7 +1197,7 @@
         <p:nvSpPr>
           <p:cNvPr id="2" name="Slide Image Placeholder 1"/>
           <p:cNvSpPr>
-            <a:spLocks noGrp="1"/>
+            <a:spLocks noGrp="1" noRot="1" noChangeAspect="1"/>
           </p:cNvSpPr>
           <p:nvPr>
             <p:ph type="sldImg" idx="2"/>
@@ -1417,7 +1212,7 @@
             <a:spLocks noGrp="1"/>
           </p:cNvSpPr>
           <p:nvPr>
-            <p:ph type="body" idx="3" sz="quarter"/>
+            <p:ph type="body" sz="quarter" idx="3"/>
           </p:nvPr>
         </p:nvSpPr>
         <p:spPr/>
@@ -1426,7 +1221,7 @@
           <a:lstStyle/>
           <a:p>
             <a:r>
-              <a:t>The chart shows why billing disputes is the right first target. It has the highest combination of case complexity and daily volume — not so high in volume that it's already been automated, but high enough in complexity that it genuinely needs an agent rather than a simple automation script. ETA inquiries are high volume but low complexity — closer to a lookup than an agent. Dispatch adjustments score similarly to billing disputes, but the dispatch console runs on Citrix and doesn't have a confirmed API surface, so building there would risk recreating exactly the brittle integration that broke in 2024.</a:t>
+              <a:t>The first hotspot is the one an agent fixes most directly and most safely — data assembly is not a judgment call, it's a retrieval task that takes time because the systems aren't integrated. The second hotspot is the one that requires a policy decision from you before we can build anything. The third hotspot is the reason the compliance argument for this agent is as strong as the efficiency argument — we're not just saving time, we're closing a gap that's already creating audit exposure today.</a:t>
             </a:r>
           </a:p>
         </p:txBody>
@@ -1438,7 +1233,7 @@
             <a:spLocks noGrp="1"/>
           </p:cNvSpPr>
           <p:nvPr>
-            <p:ph type="sldNum" idx="5" sz="quarter"/>
+            <p:ph type="sldNum" sz="quarter" idx="5"/>
           </p:nvPr>
         </p:nvSpPr>
         <p:spPr/>
@@ -1451,8 +1246,8 @@
 </p:notes>
 </file>
 
-<file path=ppt/notesSlides/notesSlide9.xml><?xml version="1.0" encoding="utf-8"?>
-<p:notes xmlns:a="http://schemas.openxmlformats.org/drawingml/2006/main" xmlns:p="http://schemas.openxmlformats.org/presentationml/2006/main" xmlns:r="http://schemas.openxmlformats.org/officeDocument/2006/relationships">
+<file path=ppt/notesSlides/notesSlide8.xml><?xml version="1.0" encoding="utf-8"?>
+<p:notes xmlns:a="http://schemas.openxmlformats.org/drawingml/2006/main" xmlns:r="http://schemas.openxmlformats.org/officeDocument/2006/relationships" xmlns:p="http://schemas.openxmlformats.org/presentationml/2006/main">
   <p:cSld>
     <p:spTree>
       <p:nvGrpSpPr>
@@ -1472,7 +1267,7 @@
         <p:nvSpPr>
           <p:cNvPr id="2" name="Slide Image Placeholder 1"/>
           <p:cNvSpPr>
-            <a:spLocks noGrp="1"/>
+            <a:spLocks noGrp="1" noRot="1" noChangeAspect="1"/>
           </p:cNvSpPr>
           <p:nvPr>
             <p:ph type="sldImg" idx="2"/>
@@ -1487,7 +1282,7 @@
             <a:spLocks noGrp="1"/>
           </p:cNvSpPr>
           <p:nvPr>
-            <p:ph type="body" idx="3" sz="quarter"/>
+            <p:ph type="body" sz="quarter" idx="3"/>
           </p:nvPr>
         </p:nvSpPr>
         <p:spPr/>
@@ -1496,7 +1291,7 @@
           <a:lstStyle/>
           <a:p>
             <a:r>
-              <a:t>What this agent replaces is the data assembly and the audit trail enforcement — the parts of Sandra's job that take the most time but require the least judgment. What it does not replace is the part that actually requires Sandra: deciding whether a credit is warranted, how much, and — in the cases that don't fit the standard types — making a call. The target outcome is that Sandra spends 8 minutes reviewing a pre-assembled case and confirming an amount, rather than 28 minutes rebuilding the picture from scratch and then writing it up informally.</a:t>
+              <a:t>The right column is not a shortlist of things we couldn't figure out how to automate. It's where the design draws a deliberate line. The credit amount decision needs a written policy before any agent can apply it consistently — and that policy doesn't exist yet, which is one of the decisions I'll come back to. The approval gate is different: that's a system constraint we're building in as a hard rule. The agent physically cannot write a credit record until a named human has authenticated and confirmed it in the workflow.</a:t>
             </a:r>
           </a:p>
         </p:txBody>
@@ -1508,7 +1303,77 @@
             <a:spLocks noGrp="1"/>
           </p:cNvSpPr>
           <p:nvPr>
-            <p:ph type="sldNum" idx="5" sz="quarter"/>
+            <p:ph type="sldNum" sz="quarter" idx="5"/>
+          </p:nvPr>
+        </p:nvSpPr>
+        <p:spPr/>
+      </p:sp>
+    </p:spTree>
+  </p:cSld>
+  <p:clrMapOvr>
+    <a:masterClrMapping/>
+  </p:clrMapOvr>
+</p:notes>
+</file>
+
+<file path=ppt/notesSlides/notesSlide9.xml><?xml version="1.0" encoding="utf-8"?>
+<p:notes xmlns:a="http://schemas.openxmlformats.org/drawingml/2006/main" xmlns:r="http://schemas.openxmlformats.org/officeDocument/2006/relationships" xmlns:p="http://schemas.openxmlformats.org/presentationml/2006/main">
+  <p:cSld>
+    <p:spTree>
+      <p:nvGrpSpPr>
+        <p:cNvPr id="1" name=""/>
+        <p:cNvGrpSpPr/>
+        <p:nvPr/>
+      </p:nvGrpSpPr>
+      <p:grpSpPr>
+        <a:xfrm>
+          <a:off x="0" y="0"/>
+          <a:ext cx="0" cy="0"/>
+          <a:chOff x="0" y="0"/>
+          <a:chExt cx="0" cy="0"/>
+        </a:xfrm>
+      </p:grpSpPr>
+      <p:sp>
+        <p:nvSpPr>
+          <p:cNvPr id="2" name="Slide Image Placeholder 1"/>
+          <p:cNvSpPr>
+            <a:spLocks noGrp="1" noRot="1" noChangeAspect="1"/>
+          </p:cNvSpPr>
+          <p:nvPr>
+            <p:ph type="sldImg" idx="2"/>
+          </p:nvPr>
+        </p:nvSpPr>
+        <p:spPr/>
+      </p:sp>
+      <p:sp>
+        <p:nvSpPr>
+          <p:cNvPr id="3" name="Notes Placeholder 2"/>
+          <p:cNvSpPr>
+            <a:spLocks noGrp="1"/>
+          </p:cNvSpPr>
+          <p:nvPr>
+            <p:ph type="body" sz="quarter" idx="3"/>
+          </p:nvPr>
+        </p:nvSpPr>
+        <p:spPr/>
+        <p:txBody>
+          <a:bodyPr/>
+          <a:lstStyle/>
+          <a:p>
+            <a:r>
+              <a:t>The chart shows why billing disputes is the right first target. It has the highest combination of case complexity and daily volume — not so high in volume that it's already been automated, but high enough in complexity that it genuinely needs an agent rather than a simple automation script. ETA inquiries are high volume but low complexity — closer to a lookup than an agent. Dispatch adjustments score similarly to billing disputes, but the dispatch console runs on Citrix and doesn't have a confirmed API surface, so building there would risk recreating exactly the brittle integration that broke in 2024.</a:t>
+            </a:r>
+          </a:p>
+        </p:txBody>
+      </p:sp>
+      <p:sp>
+        <p:nvSpPr>
+          <p:cNvPr id="4" name="Slide Number Placeholder 3"/>
+          <p:cNvSpPr>
+            <a:spLocks noGrp="1"/>
+          </p:cNvSpPr>
+          <p:nvPr>
+            <p:ph type="sldNum" sz="quarter" idx="5"/>
           </p:nvPr>
         </p:nvSpPr>
         <p:spPr/>
@@ -1559,10 +1424,9 @@
           <a:lstStyle/>
           <a:p>
             <a:r>
-              <a:rPr lang="en-US" smtClean="0"/>
+              <a:rPr lang="en-US"/>
               <a:t>Click to edit Master title style</a:t>
             </a:r>
-            <a:endParaRPr lang="en-US"/>
           </a:p>
         </p:txBody>
       </p:sp>
@@ -1678,10 +1542,9 @@
           </a:lstStyle>
           <a:p>
             <a:r>
-              <a:rPr lang="en-US" smtClean="0"/>
+              <a:rPr lang="en-US"/>
               <a:t>Click to edit Master subtitle style</a:t>
             </a:r>
-            <a:endParaRPr lang="en-US"/>
           </a:p>
         </p:txBody>
       </p:sp>
@@ -1702,7 +1565,7 @@
           <a:p>
             <a:fld id="{5BCAD085-E8A6-8845-BD4E-CB4CCA059FC4}" type="datetimeFigureOut">
               <a:rPr lang="en-US" smtClean="0"/>
-              <a:t>1/27/13</a:t>
+              <a:t>5/6/2026</a:t>
             </a:fld>
             <a:endParaRPr lang="en-US"/>
           </a:p>
@@ -1796,10 +1659,9 @@
           <a:lstStyle/>
           <a:p>
             <a:r>
-              <a:rPr lang="en-US" smtClean="0"/>
+              <a:rPr lang="en-US"/>
               <a:t>Click to edit Master title style</a:t>
             </a:r>
-            <a:endParaRPr lang="en-US"/>
           </a:p>
         </p:txBody>
       </p:sp>
@@ -1820,38 +1682,37 @@
           <a:p>
             <a:pPr lvl="0"/>
             <a:r>
-              <a:rPr lang="en-US" smtClean="0"/>
+              <a:rPr lang="en-US"/>
               <a:t>Click to edit Master text styles</a:t>
             </a:r>
           </a:p>
           <a:p>
             <a:pPr lvl="1"/>
             <a:r>
-              <a:rPr lang="en-US" smtClean="0"/>
+              <a:rPr lang="en-US"/>
               <a:t>Second level</a:t>
             </a:r>
           </a:p>
           <a:p>
             <a:pPr lvl="2"/>
             <a:r>
-              <a:rPr lang="en-US" smtClean="0"/>
+              <a:rPr lang="en-US"/>
               <a:t>Third level</a:t>
             </a:r>
           </a:p>
           <a:p>
             <a:pPr lvl="3"/>
             <a:r>
-              <a:rPr lang="en-US" smtClean="0"/>
+              <a:rPr lang="en-US"/>
               <a:t>Fourth level</a:t>
             </a:r>
           </a:p>
           <a:p>
             <a:pPr lvl="4"/>
             <a:r>
-              <a:rPr lang="en-US" smtClean="0"/>
+              <a:rPr lang="en-US"/>
               <a:t>Fifth level</a:t>
             </a:r>
-            <a:endParaRPr lang="en-US"/>
           </a:p>
         </p:txBody>
       </p:sp>
@@ -1872,7 +1733,7 @@
           <a:p>
             <a:fld id="{5BCAD085-E8A6-8845-BD4E-CB4CCA059FC4}" type="datetimeFigureOut">
               <a:rPr lang="en-US" smtClean="0"/>
-              <a:t>1/27/13</a:t>
+              <a:t>5/6/2026</a:t>
             </a:fld>
             <a:endParaRPr lang="en-US"/>
           </a:p>
@@ -1971,10 +1832,9 @@
           <a:lstStyle/>
           <a:p>
             <a:r>
-              <a:rPr lang="en-US" smtClean="0"/>
+              <a:rPr lang="en-US"/>
               <a:t>Click to edit Master title style</a:t>
             </a:r>
-            <a:endParaRPr lang="en-US"/>
           </a:p>
         </p:txBody>
       </p:sp>
@@ -2000,38 +1860,37 @@
           <a:p>
             <a:pPr lvl="0"/>
             <a:r>
-              <a:rPr lang="en-US" smtClean="0"/>
+              <a:rPr lang="en-US"/>
               <a:t>Click to edit Master text styles</a:t>
             </a:r>
           </a:p>
           <a:p>
             <a:pPr lvl="1"/>
             <a:r>
-              <a:rPr lang="en-US" smtClean="0"/>
+              <a:rPr lang="en-US"/>
               <a:t>Second level</a:t>
             </a:r>
           </a:p>
           <a:p>
             <a:pPr lvl="2"/>
             <a:r>
-              <a:rPr lang="en-US" smtClean="0"/>
+              <a:rPr lang="en-US"/>
               <a:t>Third level</a:t>
             </a:r>
           </a:p>
           <a:p>
             <a:pPr lvl="3"/>
             <a:r>
-              <a:rPr lang="en-US" smtClean="0"/>
+              <a:rPr lang="en-US"/>
               <a:t>Fourth level</a:t>
             </a:r>
           </a:p>
           <a:p>
             <a:pPr lvl="4"/>
             <a:r>
-              <a:rPr lang="en-US" smtClean="0"/>
+              <a:rPr lang="en-US"/>
               <a:t>Fifth level</a:t>
             </a:r>
-            <a:endParaRPr lang="en-US"/>
           </a:p>
         </p:txBody>
       </p:sp>
@@ -2052,7 +1911,7 @@
           <a:p>
             <a:fld id="{5BCAD085-E8A6-8845-BD4E-CB4CCA059FC4}" type="datetimeFigureOut">
               <a:rPr lang="en-US" smtClean="0"/>
-              <a:t>1/27/13</a:t>
+              <a:t>5/6/2026</a:t>
             </a:fld>
             <a:endParaRPr lang="en-US"/>
           </a:p>
@@ -2146,10 +2005,9 @@
           <a:lstStyle/>
           <a:p>
             <a:r>
-              <a:rPr lang="en-US" smtClean="0"/>
+              <a:rPr lang="en-US"/>
               <a:t>Click to edit Master title style</a:t>
             </a:r>
-            <a:endParaRPr lang="en-US"/>
           </a:p>
         </p:txBody>
       </p:sp>
@@ -2170,38 +2028,37 @@
           <a:p>
             <a:pPr lvl="0"/>
             <a:r>
-              <a:rPr lang="en-US" smtClean="0"/>
+              <a:rPr lang="en-US"/>
               <a:t>Click to edit Master text styles</a:t>
             </a:r>
           </a:p>
           <a:p>
             <a:pPr lvl="1"/>
             <a:r>
-              <a:rPr lang="en-US" smtClean="0"/>
+              <a:rPr lang="en-US"/>
               <a:t>Second level</a:t>
             </a:r>
           </a:p>
           <a:p>
             <a:pPr lvl="2"/>
             <a:r>
-              <a:rPr lang="en-US" smtClean="0"/>
+              <a:rPr lang="en-US"/>
               <a:t>Third level</a:t>
             </a:r>
           </a:p>
           <a:p>
             <a:pPr lvl="3"/>
             <a:r>
-              <a:rPr lang="en-US" smtClean="0"/>
+              <a:rPr lang="en-US"/>
               <a:t>Fourth level</a:t>
             </a:r>
           </a:p>
           <a:p>
             <a:pPr lvl="4"/>
             <a:r>
-              <a:rPr lang="en-US" smtClean="0"/>
+              <a:rPr lang="en-US"/>
               <a:t>Fifth level</a:t>
             </a:r>
-            <a:endParaRPr lang="en-US"/>
           </a:p>
         </p:txBody>
       </p:sp>
@@ -2222,7 +2079,7 @@
           <a:p>
             <a:fld id="{5BCAD085-E8A6-8845-BD4E-CB4CCA059FC4}" type="datetimeFigureOut">
               <a:rPr lang="en-US" smtClean="0"/>
-              <a:t>1/27/13</a:t>
+              <a:t>5/6/2026</a:t>
             </a:fld>
             <a:endParaRPr lang="en-US"/>
           </a:p>
@@ -2325,10 +2182,9 @@
           </a:lstStyle>
           <a:p>
             <a:r>
-              <a:rPr lang="en-US" smtClean="0"/>
+              <a:rPr lang="en-US"/>
               <a:t>Click to edit Master title style</a:t>
             </a:r>
-            <a:endParaRPr lang="en-US"/>
           </a:p>
         </p:txBody>
       </p:sp>
@@ -2445,7 +2301,7 @@
           <a:p>
             <a:pPr lvl="0"/>
             <a:r>
-              <a:rPr lang="en-US" smtClean="0"/>
+              <a:rPr lang="en-US"/>
               <a:t>Click to edit Master text styles</a:t>
             </a:r>
           </a:p>
@@ -2468,7 +2324,7 @@
           <a:p>
             <a:fld id="{5BCAD085-E8A6-8845-BD4E-CB4CCA059FC4}" type="datetimeFigureOut">
               <a:rPr lang="en-US" smtClean="0"/>
-              <a:t>1/27/13</a:t>
+              <a:t>5/6/2026</a:t>
             </a:fld>
             <a:endParaRPr lang="en-US"/>
           </a:p>
@@ -2562,10 +2418,9 @@
           <a:lstStyle/>
           <a:p>
             <a:r>
-              <a:rPr lang="en-US" smtClean="0"/>
+              <a:rPr lang="en-US"/>
               <a:t>Click to edit Master title style</a:t>
             </a:r>
-            <a:endParaRPr lang="en-US"/>
           </a:p>
         </p:txBody>
       </p:sp>
@@ -2619,38 +2474,37 @@
           <a:p>
             <a:pPr lvl="0"/>
             <a:r>
-              <a:rPr lang="en-US" smtClean="0"/>
+              <a:rPr lang="en-US"/>
               <a:t>Click to edit Master text styles</a:t>
             </a:r>
           </a:p>
           <a:p>
             <a:pPr lvl="1"/>
             <a:r>
-              <a:rPr lang="en-US" smtClean="0"/>
+              <a:rPr lang="en-US"/>
               <a:t>Second level</a:t>
             </a:r>
           </a:p>
           <a:p>
             <a:pPr lvl="2"/>
             <a:r>
-              <a:rPr lang="en-US" smtClean="0"/>
+              <a:rPr lang="en-US"/>
               <a:t>Third level</a:t>
             </a:r>
           </a:p>
           <a:p>
             <a:pPr lvl="3"/>
             <a:r>
-              <a:rPr lang="en-US" smtClean="0"/>
+              <a:rPr lang="en-US"/>
               <a:t>Fourth level</a:t>
             </a:r>
           </a:p>
           <a:p>
             <a:pPr lvl="4"/>
             <a:r>
-              <a:rPr lang="en-US" smtClean="0"/>
+              <a:rPr lang="en-US"/>
               <a:t>Fifth level</a:t>
             </a:r>
-            <a:endParaRPr lang="en-US"/>
           </a:p>
         </p:txBody>
       </p:sp>
@@ -2704,38 +2558,37 @@
           <a:p>
             <a:pPr lvl="0"/>
             <a:r>
-              <a:rPr lang="en-US" smtClean="0"/>
+              <a:rPr lang="en-US"/>
               <a:t>Click to edit Master text styles</a:t>
             </a:r>
           </a:p>
           <a:p>
             <a:pPr lvl="1"/>
             <a:r>
-              <a:rPr lang="en-US" smtClean="0"/>
+              <a:rPr lang="en-US"/>
               <a:t>Second level</a:t>
             </a:r>
           </a:p>
           <a:p>
             <a:pPr lvl="2"/>
             <a:r>
-              <a:rPr lang="en-US" smtClean="0"/>
+              <a:rPr lang="en-US"/>
               <a:t>Third level</a:t>
             </a:r>
           </a:p>
           <a:p>
             <a:pPr lvl="3"/>
             <a:r>
-              <a:rPr lang="en-US" smtClean="0"/>
+              <a:rPr lang="en-US"/>
               <a:t>Fourth level</a:t>
             </a:r>
           </a:p>
           <a:p>
             <a:pPr lvl="4"/>
             <a:r>
-              <a:rPr lang="en-US" smtClean="0"/>
+              <a:rPr lang="en-US"/>
               <a:t>Fifth level</a:t>
             </a:r>
-            <a:endParaRPr lang="en-US"/>
           </a:p>
         </p:txBody>
       </p:sp>
@@ -2756,7 +2609,7 @@
           <a:p>
             <a:fld id="{5BCAD085-E8A6-8845-BD4E-CB4CCA059FC4}" type="datetimeFigureOut">
               <a:rPr lang="en-US" smtClean="0"/>
-              <a:t>1/27/13</a:t>
+              <a:t>5/6/2026</a:t>
             </a:fld>
             <a:endParaRPr lang="en-US"/>
           </a:p>
@@ -2854,10 +2707,9 @@
           </a:lstStyle>
           <a:p>
             <a:r>
-              <a:rPr lang="en-US" smtClean="0"/>
+              <a:rPr lang="en-US"/>
               <a:t>Click to edit Master title style</a:t>
             </a:r>
-            <a:endParaRPr lang="en-US"/>
           </a:p>
         </p:txBody>
       </p:sp>
@@ -2920,7 +2772,7 @@
           <a:p>
             <a:pPr lvl="0"/>
             <a:r>
-              <a:rPr lang="en-US" smtClean="0"/>
+              <a:rPr lang="en-US"/>
               <a:t>Click to edit Master text styles</a:t>
             </a:r>
           </a:p>
@@ -2976,38 +2828,37 @@
           <a:p>
             <a:pPr lvl="0"/>
             <a:r>
-              <a:rPr lang="en-US" smtClean="0"/>
+              <a:rPr lang="en-US"/>
               <a:t>Click to edit Master text styles</a:t>
             </a:r>
           </a:p>
           <a:p>
             <a:pPr lvl="1"/>
             <a:r>
-              <a:rPr lang="en-US" smtClean="0"/>
+              <a:rPr lang="en-US"/>
               <a:t>Second level</a:t>
             </a:r>
           </a:p>
           <a:p>
             <a:pPr lvl="2"/>
             <a:r>
-              <a:rPr lang="en-US" smtClean="0"/>
+              <a:rPr lang="en-US"/>
               <a:t>Third level</a:t>
             </a:r>
           </a:p>
           <a:p>
             <a:pPr lvl="3"/>
             <a:r>
-              <a:rPr lang="en-US" smtClean="0"/>
+              <a:rPr lang="en-US"/>
               <a:t>Fourth level</a:t>
             </a:r>
           </a:p>
           <a:p>
             <a:pPr lvl="4"/>
             <a:r>
-              <a:rPr lang="en-US" smtClean="0"/>
+              <a:rPr lang="en-US"/>
               <a:t>Fifth level</a:t>
             </a:r>
-            <a:endParaRPr lang="en-US"/>
           </a:p>
         </p:txBody>
       </p:sp>
@@ -3070,7 +2921,7 @@
           <a:p>
             <a:pPr lvl="0"/>
             <a:r>
-              <a:rPr lang="en-US" smtClean="0"/>
+              <a:rPr lang="en-US"/>
               <a:t>Click to edit Master text styles</a:t>
             </a:r>
           </a:p>
@@ -3126,38 +2977,37 @@
           <a:p>
             <a:pPr lvl="0"/>
             <a:r>
-              <a:rPr lang="en-US" smtClean="0"/>
+              <a:rPr lang="en-US"/>
               <a:t>Click to edit Master text styles</a:t>
             </a:r>
           </a:p>
           <a:p>
             <a:pPr lvl="1"/>
             <a:r>
-              <a:rPr lang="en-US" smtClean="0"/>
+              <a:rPr lang="en-US"/>
               <a:t>Second level</a:t>
             </a:r>
           </a:p>
           <a:p>
             <a:pPr lvl="2"/>
             <a:r>
-              <a:rPr lang="en-US" smtClean="0"/>
+              <a:rPr lang="en-US"/>
               <a:t>Third level</a:t>
             </a:r>
           </a:p>
           <a:p>
             <a:pPr lvl="3"/>
             <a:r>
-              <a:rPr lang="en-US" smtClean="0"/>
+              <a:rPr lang="en-US"/>
               <a:t>Fourth level</a:t>
             </a:r>
           </a:p>
           <a:p>
             <a:pPr lvl="4"/>
             <a:r>
-              <a:rPr lang="en-US" smtClean="0"/>
+              <a:rPr lang="en-US"/>
               <a:t>Fifth level</a:t>
             </a:r>
-            <a:endParaRPr lang="en-US"/>
           </a:p>
         </p:txBody>
       </p:sp>
@@ -3178,7 +3028,7 @@
           <a:p>
             <a:fld id="{5BCAD085-E8A6-8845-BD4E-CB4CCA059FC4}" type="datetimeFigureOut">
               <a:rPr lang="en-US" smtClean="0"/>
-              <a:t>1/27/13</a:t>
+              <a:t>5/6/2026</a:t>
             </a:fld>
             <a:endParaRPr lang="en-US"/>
           </a:p>
@@ -3272,10 +3122,9 @@
           <a:lstStyle/>
           <a:p>
             <a:r>
-              <a:rPr lang="en-US" smtClean="0"/>
+              <a:rPr lang="en-US"/>
               <a:t>Click to edit Master title style</a:t>
             </a:r>
-            <a:endParaRPr lang="en-US"/>
           </a:p>
         </p:txBody>
       </p:sp>
@@ -3296,7 +3145,7 @@
           <a:p>
             <a:fld id="{5BCAD085-E8A6-8845-BD4E-CB4CCA059FC4}" type="datetimeFigureOut">
               <a:rPr lang="en-US" smtClean="0"/>
-              <a:t>1/27/13</a:t>
+              <a:t>5/6/2026</a:t>
             </a:fld>
             <a:endParaRPr lang="en-US"/>
           </a:p>
@@ -3391,7 +3240,7 @@
           <a:p>
             <a:fld id="{5BCAD085-E8A6-8845-BD4E-CB4CCA059FC4}" type="datetimeFigureOut">
               <a:rPr lang="en-US" smtClean="0"/>
-              <a:t>1/27/13</a:t>
+              <a:t>5/6/2026</a:t>
             </a:fld>
             <a:endParaRPr lang="en-US"/>
           </a:p>
@@ -3494,10 +3343,9 @@
           </a:lstStyle>
           <a:p>
             <a:r>
-              <a:rPr lang="en-US" smtClean="0"/>
+              <a:rPr lang="en-US"/>
               <a:t>Click to edit Master title style</a:t>
             </a:r>
-            <a:endParaRPr lang="en-US"/>
           </a:p>
         </p:txBody>
       </p:sp>
@@ -3551,38 +3399,37 @@
           <a:p>
             <a:pPr lvl="0"/>
             <a:r>
-              <a:rPr lang="en-US" smtClean="0"/>
+              <a:rPr lang="en-US"/>
               <a:t>Click to edit Master text styles</a:t>
             </a:r>
           </a:p>
           <a:p>
             <a:pPr lvl="1"/>
             <a:r>
-              <a:rPr lang="en-US" smtClean="0"/>
+              <a:rPr lang="en-US"/>
               <a:t>Second level</a:t>
             </a:r>
           </a:p>
           <a:p>
             <a:pPr lvl="2"/>
             <a:r>
-              <a:rPr lang="en-US" smtClean="0"/>
+              <a:rPr lang="en-US"/>
               <a:t>Third level</a:t>
             </a:r>
           </a:p>
           <a:p>
             <a:pPr lvl="3"/>
             <a:r>
-              <a:rPr lang="en-US" smtClean="0"/>
+              <a:rPr lang="en-US"/>
               <a:t>Fourth level</a:t>
             </a:r>
           </a:p>
           <a:p>
             <a:pPr lvl="4"/>
             <a:r>
-              <a:rPr lang="en-US" smtClean="0"/>
+              <a:rPr lang="en-US"/>
               <a:t>Fifth level</a:t>
             </a:r>
-            <a:endParaRPr lang="en-US"/>
           </a:p>
         </p:txBody>
       </p:sp>
@@ -3645,7 +3492,7 @@
           <a:p>
             <a:pPr lvl="0"/>
             <a:r>
-              <a:rPr lang="en-US" smtClean="0"/>
+              <a:rPr lang="en-US"/>
               <a:t>Click to edit Master text styles</a:t>
             </a:r>
           </a:p>
@@ -3668,7 +3515,7 @@
           <a:p>
             <a:fld id="{5BCAD085-E8A6-8845-BD4E-CB4CCA059FC4}" type="datetimeFigureOut">
               <a:rPr lang="en-US" smtClean="0"/>
-              <a:t>1/27/13</a:t>
+              <a:t>5/6/2026</a:t>
             </a:fld>
             <a:endParaRPr lang="en-US"/>
           </a:p>
@@ -3771,10 +3618,9 @@
           </a:lstStyle>
           <a:p>
             <a:r>
-              <a:rPr lang="en-US" smtClean="0"/>
+              <a:rPr lang="en-US"/>
               <a:t>Click to edit Master title style</a:t>
             </a:r>
-            <a:endParaRPr lang="en-US"/>
           </a:p>
         </p:txBody>
       </p:sp>
@@ -3898,7 +3744,7 @@
           <a:p>
             <a:pPr lvl="0"/>
             <a:r>
-              <a:rPr lang="en-US" smtClean="0"/>
+              <a:rPr lang="en-US"/>
               <a:t>Click to edit Master text styles</a:t>
             </a:r>
           </a:p>
@@ -3921,7 +3767,7 @@
           <a:p>
             <a:fld id="{5BCAD085-E8A6-8845-BD4E-CB4CCA059FC4}" type="datetimeFigureOut">
               <a:rPr lang="en-US" smtClean="0"/>
-              <a:t>1/27/13</a:t>
+              <a:t>5/6/2026</a:t>
             </a:fld>
             <a:endParaRPr lang="en-US"/>
           </a:p>
@@ -4030,10 +3876,9 @@
           <a:lstStyle/>
           <a:p>
             <a:r>
-              <a:rPr lang="en-US" smtClean="0"/>
+              <a:rPr lang="en-US"/>
               <a:t>Click to edit Master title style</a:t>
             </a:r>
-            <a:endParaRPr lang="en-US"/>
           </a:p>
         </p:txBody>
       </p:sp>
@@ -4064,38 +3909,37 @@
           <a:p>
             <a:pPr lvl="0"/>
             <a:r>
-              <a:rPr lang="en-US" smtClean="0"/>
+              <a:rPr lang="en-US"/>
               <a:t>Click to edit Master text styles</a:t>
             </a:r>
           </a:p>
           <a:p>
             <a:pPr lvl="1"/>
             <a:r>
-              <a:rPr lang="en-US" smtClean="0"/>
+              <a:rPr lang="en-US"/>
               <a:t>Second level</a:t>
             </a:r>
           </a:p>
           <a:p>
             <a:pPr lvl="2"/>
             <a:r>
-              <a:rPr lang="en-US" smtClean="0"/>
+              <a:rPr lang="en-US"/>
               <a:t>Third level</a:t>
             </a:r>
           </a:p>
           <a:p>
             <a:pPr lvl="3"/>
             <a:r>
-              <a:rPr lang="en-US" smtClean="0"/>
+              <a:rPr lang="en-US"/>
               <a:t>Fourth level</a:t>
             </a:r>
           </a:p>
           <a:p>
             <a:pPr lvl="4"/>
             <a:r>
-              <a:rPr lang="en-US" smtClean="0"/>
+              <a:rPr lang="en-US"/>
               <a:t>Fifth level</a:t>
             </a:r>
-            <a:endParaRPr lang="en-US"/>
           </a:p>
         </p:txBody>
       </p:sp>
@@ -4134,7 +3978,7 @@
           <a:p>
             <a:fld id="{5BCAD085-E8A6-8845-BD4E-CB4CCA059FC4}" type="datetimeFigureOut">
               <a:rPr lang="en-US" smtClean="0"/>
-              <a:t>1/27/13</a:t>
+              <a:t>5/6/2026</a:t>
             </a:fld>
             <a:endParaRPr lang="en-US"/>
           </a:p>
@@ -4493,7 +4337,7 @@
 </file>
 
 <file path=ppt/slides/slide1.xml><?xml version="1.0" encoding="utf-8"?>
-<p:sld xmlns:a="http://schemas.openxmlformats.org/drawingml/2006/main" xmlns:p="http://schemas.openxmlformats.org/presentationml/2006/main" xmlns:r="http://schemas.openxmlformats.org/officeDocument/2006/relationships">
+<p:sld xmlns:a="http://schemas.openxmlformats.org/drawingml/2006/main" xmlns:r="http://schemas.openxmlformats.org/officeDocument/2006/relationships" xmlns:p="http://schemas.openxmlformats.org/presentationml/2006/main">
   <p:cSld>
     <p:bg>
       <p:bgPr>
@@ -4509,7 +4353,14 @@
         <p:cNvGrpSpPr/>
         <p:nvPr/>
       </p:nvGrpSpPr>
-      <p:grpSpPr/>
+      <p:grpSpPr>
+        <a:xfrm>
+          <a:off x="0" y="0"/>
+          <a:ext cx="0" cy="0"/>
+          <a:chOff x="0" y="0"/>
+          <a:chExt cx="0" cy="0"/>
+        </a:xfrm>
+      </p:grpSpPr>
       <p:sp>
         <p:nvSpPr>
           <p:cNvPr id="2" name="Rectangle 1"/>
@@ -4550,6 +4401,7 @@
           <a:lstStyle/>
           <a:p>
             <a:pPr algn="ctr"/>
+            <a:endParaRPr/>
           </a:p>
         </p:txBody>
       </p:sp>
@@ -4734,7 +4586,7 @@
 </file>
 
 <file path=ppt/slides/slide10.xml><?xml version="1.0" encoding="utf-8"?>
-<p:sld xmlns:a="http://schemas.openxmlformats.org/drawingml/2006/main" xmlns:p="http://schemas.openxmlformats.org/presentationml/2006/main" xmlns:r="http://schemas.openxmlformats.org/officeDocument/2006/relationships">
+<p:sld xmlns:a="http://schemas.openxmlformats.org/drawingml/2006/main" xmlns:r="http://schemas.openxmlformats.org/officeDocument/2006/relationships" xmlns:p="http://schemas.openxmlformats.org/presentationml/2006/main">
   <p:cSld>
     <p:bg>
       <p:bgPr>
@@ -4750,7 +4602,14 @@
         <p:cNvGrpSpPr/>
         <p:nvPr/>
       </p:nvGrpSpPr>
-      <p:grpSpPr/>
+      <p:grpSpPr>
+        <a:xfrm>
+          <a:off x="0" y="0"/>
+          <a:ext cx="0" cy="0"/>
+          <a:chOff x="0" y="0"/>
+          <a:chExt cx="0" cy="0"/>
+        </a:xfrm>
+      </p:grpSpPr>
       <p:sp>
         <p:nvSpPr>
           <p:cNvPr id="2" name="Rectangle 1"/>
@@ -4787,7 +4646,709 @@
           </a:fontRef>
         </p:style>
         <p:txBody>
-          <a:bodyPr rtlCol="0" anchor="ctr" wrap="square" lIns="274320" tIns="164592"/>
+          <a:bodyPr wrap="square" lIns="274320" tIns="164592" rtlCol="0" anchor="ctr"/>
+          <a:lstStyle/>
+          <a:p>
+            <a:pPr algn="l"/>
+            <a:r>
+              <a:rPr sz="2800" b="1">
+                <a:solidFill>
+                  <a:srgbClr val="FFFFFF"/>
+                </a:solidFill>
+              </a:rPr>
+              <a:t>The Proposed Agent — What It Does</a:t>
+            </a:r>
+          </a:p>
+        </p:txBody>
+      </p:sp>
+      <p:sp>
+        <p:nvSpPr>
+          <p:cNvPr id="3" name="Oval 2"/>
+          <p:cNvSpPr/>
+          <p:nvPr/>
+        </p:nvSpPr>
+        <p:spPr>
+          <a:xfrm>
+            <a:off x="274320" y="1481328"/>
+            <a:ext cx="411480" cy="411480"/>
+          </a:xfrm>
+          <a:prstGeom prst="ellipse">
+            <a:avLst/>
+          </a:prstGeom>
+          <a:solidFill>
+            <a:srgbClr val="1F61AA"/>
+          </a:solidFill>
+          <a:ln>
+            <a:noFill/>
+          </a:ln>
+        </p:spPr>
+        <p:style>
+          <a:lnRef idx="1">
+            <a:schemeClr val="accent1"/>
+          </a:lnRef>
+          <a:fillRef idx="3">
+            <a:schemeClr val="accent1"/>
+          </a:fillRef>
+          <a:effectRef idx="2">
+            <a:schemeClr val="accent1"/>
+          </a:effectRef>
+          <a:fontRef idx="minor">
+            <a:schemeClr val="lt1"/>
+          </a:fontRef>
+        </p:style>
+        <p:txBody>
+          <a:bodyPr rtlCol="0" anchor="ctr"/>
+          <a:lstStyle/>
+          <a:p>
+            <a:pPr algn="ctr"/>
+            <a:endParaRPr/>
+          </a:p>
+        </p:txBody>
+      </p:sp>
+      <p:sp>
+        <p:nvSpPr>
+          <p:cNvPr id="4" name="TextBox 3"/>
+          <p:cNvSpPr txBox="1"/>
+          <p:nvPr/>
+        </p:nvSpPr>
+        <p:spPr>
+          <a:xfrm>
+            <a:off x="274320" y="1481328"/>
+            <a:ext cx="411480" cy="411480"/>
+          </a:xfrm>
+          <a:prstGeom prst="rect">
+            <a:avLst/>
+          </a:prstGeom>
+          <a:noFill/>
+        </p:spPr>
+        <p:txBody>
+          <a:bodyPr wrap="square">
+            <a:spAutoFit/>
+          </a:bodyPr>
+          <a:lstStyle/>
+          <a:p>
+            <a:pPr algn="ctr"/>
+            <a:r>
+              <a:rPr sz="1400" b="1">
+                <a:solidFill>
+                  <a:srgbClr val="FFFFFF"/>
+                </a:solidFill>
+              </a:rPr>
+              <a:t>1</a:t>
+            </a:r>
+          </a:p>
+        </p:txBody>
+      </p:sp>
+      <p:sp>
+        <p:nvSpPr>
+          <p:cNvPr id="5" name="TextBox 4"/>
+          <p:cNvSpPr txBox="1"/>
+          <p:nvPr/>
+        </p:nvSpPr>
+        <p:spPr>
+          <a:xfrm>
+            <a:off x="822960" y="1463040"/>
+            <a:ext cx="10789920" cy="347472"/>
+          </a:xfrm>
+          <a:prstGeom prst="rect">
+            <a:avLst/>
+          </a:prstGeom>
+          <a:noFill/>
+        </p:spPr>
+        <p:txBody>
+          <a:bodyPr wrap="square">
+            <a:spAutoFit/>
+          </a:bodyPr>
+          <a:lstStyle/>
+          <a:p>
+            <a:pPr algn="l"/>
+            <a:r>
+              <a:rPr sz="1400" b="1">
+                <a:solidFill>
+                  <a:srgbClr val="1A2E44"/>
+                </a:solidFill>
+              </a:rPr>
+              <a:t>Receives &amp; assembles evidence</a:t>
+            </a:r>
+          </a:p>
+        </p:txBody>
+      </p:sp>
+      <p:sp>
+        <p:nvSpPr>
+          <p:cNvPr id="6" name="TextBox 5"/>
+          <p:cNvSpPr txBox="1"/>
+          <p:nvPr/>
+        </p:nvSpPr>
+        <p:spPr>
+          <a:xfrm>
+            <a:off x="822960" y="1828800"/>
+            <a:ext cx="10789920" cy="502920"/>
+          </a:xfrm>
+          <a:prstGeom prst="rect">
+            <a:avLst/>
+          </a:prstGeom>
+          <a:noFill/>
+        </p:spPr>
+        <p:txBody>
+          <a:bodyPr wrap="square">
+            <a:spAutoFit/>
+          </a:bodyPr>
+          <a:lstStyle/>
+          <a:p>
+            <a:pPr algn="l"/>
+            <a:r>
+              <a:rPr sz="1200" b="0">
+                <a:solidFill>
+                  <a:srgbClr val="444444"/>
+                </a:solidFill>
+              </a:rPr>
+              <a:t>Retrieves invoice data, surcharge records, delivery outcome, and customer account history — what Sandra currently spends 10–12 minutes retrieving manually.  (D4 T-001 – T-004)</a:t>
+            </a:r>
+          </a:p>
+        </p:txBody>
+      </p:sp>
+      <p:sp>
+        <p:nvSpPr>
+          <p:cNvPr id="7" name="Oval 6"/>
+          <p:cNvSpPr/>
+          <p:nvPr/>
+        </p:nvSpPr>
+        <p:spPr>
+          <a:xfrm>
+            <a:off x="274320" y="2487168"/>
+            <a:ext cx="411480" cy="411480"/>
+          </a:xfrm>
+          <a:prstGeom prst="ellipse">
+            <a:avLst/>
+          </a:prstGeom>
+          <a:solidFill>
+            <a:srgbClr val="1F61AA"/>
+          </a:solidFill>
+          <a:ln>
+            <a:noFill/>
+          </a:ln>
+        </p:spPr>
+        <p:style>
+          <a:lnRef idx="1">
+            <a:schemeClr val="accent1"/>
+          </a:lnRef>
+          <a:fillRef idx="3">
+            <a:schemeClr val="accent1"/>
+          </a:fillRef>
+          <a:effectRef idx="2">
+            <a:schemeClr val="accent1"/>
+          </a:effectRef>
+          <a:fontRef idx="minor">
+            <a:schemeClr val="lt1"/>
+          </a:fontRef>
+        </p:style>
+        <p:txBody>
+          <a:bodyPr rtlCol="0" anchor="ctr"/>
+          <a:lstStyle/>
+          <a:p>
+            <a:pPr algn="ctr"/>
+            <a:endParaRPr/>
+          </a:p>
+        </p:txBody>
+      </p:sp>
+      <p:sp>
+        <p:nvSpPr>
+          <p:cNvPr id="8" name="TextBox 7"/>
+          <p:cNvSpPr txBox="1"/>
+          <p:nvPr/>
+        </p:nvSpPr>
+        <p:spPr>
+          <a:xfrm>
+            <a:off x="274320" y="2487168"/>
+            <a:ext cx="411480" cy="411480"/>
+          </a:xfrm>
+          <a:prstGeom prst="rect">
+            <a:avLst/>
+          </a:prstGeom>
+          <a:noFill/>
+        </p:spPr>
+        <p:txBody>
+          <a:bodyPr wrap="square">
+            <a:spAutoFit/>
+          </a:bodyPr>
+          <a:lstStyle/>
+          <a:p>
+            <a:pPr algn="ctr"/>
+            <a:r>
+              <a:rPr sz="1400" b="1">
+                <a:solidFill>
+                  <a:srgbClr val="FFFFFF"/>
+                </a:solidFill>
+              </a:rPr>
+              <a:t>2</a:t>
+            </a:r>
+          </a:p>
+        </p:txBody>
+      </p:sp>
+      <p:sp>
+        <p:nvSpPr>
+          <p:cNvPr id="9" name="TextBox 8"/>
+          <p:cNvSpPr txBox="1"/>
+          <p:nvPr/>
+        </p:nvSpPr>
+        <p:spPr>
+          <a:xfrm>
+            <a:off x="822960" y="2468880"/>
+            <a:ext cx="10789920" cy="347472"/>
+          </a:xfrm>
+          <a:prstGeom prst="rect">
+            <a:avLst/>
+          </a:prstGeom>
+          <a:noFill/>
+        </p:spPr>
+        <p:txBody>
+          <a:bodyPr wrap="square">
+            <a:spAutoFit/>
+          </a:bodyPr>
+          <a:lstStyle/>
+          <a:p>
+            <a:pPr algn="l"/>
+            <a:r>
+              <a:rPr sz="1400" b="1">
+                <a:solidFill>
+                  <a:srgbClr val="1A2E44"/>
+                </a:solidFill>
+              </a:rPr>
+              <a:t>Assesses charge validity</a:t>
+            </a:r>
+          </a:p>
+        </p:txBody>
+      </p:sp>
+      <p:sp>
+        <p:nvSpPr>
+          <p:cNvPr id="10" name="TextBox 9"/>
+          <p:cNvSpPr txBox="1"/>
+          <p:nvPr/>
+        </p:nvSpPr>
+        <p:spPr>
+          <a:xfrm>
+            <a:off x="822960" y="2834640"/>
+            <a:ext cx="10789920" cy="502920"/>
+          </a:xfrm>
+          <a:prstGeom prst="rect">
+            <a:avLst/>
+          </a:prstGeom>
+          <a:noFill/>
+        </p:spPr>
+        <p:txBody>
+          <a:bodyPr wrap="square">
+            <a:spAutoFit/>
+          </a:bodyPr>
+          <a:lstStyle/>
+          <a:p>
+            <a:pPr algn="l"/>
+            <a:r>
+              <a:rPr sz="1200" b="0">
+                <a:solidFill>
+                  <a:srgbClr val="444444"/>
+                </a:solidFill>
+              </a:rPr>
+              <a:t>Rule-based checks for fuel surcharges, dimensional weight, and redelivery fees. Routes clear-cut cases with a structured verdict; routes ambiguous cases to a human reviewer with all evidence assembled and a confidence score.  (D4 T-007)</a:t>
+            </a:r>
+          </a:p>
+        </p:txBody>
+      </p:sp>
+      <p:sp>
+        <p:nvSpPr>
+          <p:cNvPr id="11" name="Oval 10"/>
+          <p:cNvSpPr/>
+          <p:nvPr/>
+        </p:nvSpPr>
+        <p:spPr>
+          <a:xfrm>
+            <a:off x="274320" y="3493008"/>
+            <a:ext cx="411480" cy="411480"/>
+          </a:xfrm>
+          <a:prstGeom prst="ellipse">
+            <a:avLst/>
+          </a:prstGeom>
+          <a:solidFill>
+            <a:srgbClr val="1F61AA"/>
+          </a:solidFill>
+          <a:ln>
+            <a:noFill/>
+          </a:ln>
+        </p:spPr>
+        <p:style>
+          <a:lnRef idx="1">
+            <a:schemeClr val="accent1"/>
+          </a:lnRef>
+          <a:fillRef idx="3">
+            <a:schemeClr val="accent1"/>
+          </a:fillRef>
+          <a:effectRef idx="2">
+            <a:schemeClr val="accent1"/>
+          </a:effectRef>
+          <a:fontRef idx="minor">
+            <a:schemeClr val="lt1"/>
+          </a:fontRef>
+        </p:style>
+        <p:txBody>
+          <a:bodyPr rtlCol="0" anchor="ctr"/>
+          <a:lstStyle/>
+          <a:p>
+            <a:pPr algn="ctr"/>
+            <a:endParaRPr/>
+          </a:p>
+        </p:txBody>
+      </p:sp>
+      <p:sp>
+        <p:nvSpPr>
+          <p:cNvPr id="12" name="TextBox 11"/>
+          <p:cNvSpPr txBox="1"/>
+          <p:nvPr/>
+        </p:nvSpPr>
+        <p:spPr>
+          <a:xfrm>
+            <a:off x="274320" y="3493008"/>
+            <a:ext cx="411480" cy="411480"/>
+          </a:xfrm>
+          <a:prstGeom prst="rect">
+            <a:avLst/>
+          </a:prstGeom>
+          <a:noFill/>
+        </p:spPr>
+        <p:txBody>
+          <a:bodyPr wrap="square">
+            <a:spAutoFit/>
+          </a:bodyPr>
+          <a:lstStyle/>
+          <a:p>
+            <a:pPr algn="ctr"/>
+            <a:r>
+              <a:rPr sz="1400" b="1">
+                <a:solidFill>
+                  <a:srgbClr val="FFFFFF"/>
+                </a:solidFill>
+              </a:rPr>
+              <a:t>3</a:t>
+            </a:r>
+          </a:p>
+        </p:txBody>
+      </p:sp>
+      <p:sp>
+        <p:nvSpPr>
+          <p:cNvPr id="13" name="TextBox 12"/>
+          <p:cNvSpPr txBox="1"/>
+          <p:nvPr/>
+        </p:nvSpPr>
+        <p:spPr>
+          <a:xfrm>
+            <a:off x="822960" y="3474720"/>
+            <a:ext cx="10789920" cy="347472"/>
+          </a:xfrm>
+          <a:prstGeom prst="rect">
+            <a:avLst/>
+          </a:prstGeom>
+          <a:noFill/>
+        </p:spPr>
+        <p:txBody>
+          <a:bodyPr wrap="square">
+            <a:spAutoFit/>
+          </a:bodyPr>
+          <a:lstStyle/>
+          <a:p>
+            <a:pPr algn="l"/>
+            <a:r>
+              <a:rPr sz="1400" b="1">
+                <a:solidFill>
+                  <a:srgbClr val="1A2E44"/>
+                </a:solidFill>
+              </a:rPr>
+              <a:t>Enforces a complete audit trail on every credit record</a:t>
+            </a:r>
+          </a:p>
+        </p:txBody>
+      </p:sp>
+      <p:sp>
+        <p:nvSpPr>
+          <p:cNvPr id="14" name="TextBox 13"/>
+          <p:cNvSpPr txBox="1"/>
+          <p:nvPr/>
+        </p:nvSpPr>
+        <p:spPr>
+          <a:xfrm>
+            <a:off x="822960" y="3840480"/>
+            <a:ext cx="10789920" cy="502920"/>
+          </a:xfrm>
+          <a:prstGeom prst="rect">
+            <a:avLst/>
+          </a:prstGeom>
+          <a:noFill/>
+        </p:spPr>
+        <p:txBody>
+          <a:bodyPr wrap="square">
+            <a:spAutoFit/>
+          </a:bodyPr>
+          <a:lstStyle/>
+          <a:p>
+            <a:pPr algn="l"/>
+            <a:r>
+              <a:rPr sz="1200" b="0">
+                <a:solidFill>
+                  <a:srgbClr val="444444"/>
+                </a:solidFill>
+              </a:rPr>
+              <a:t>Named approver, CRM case reference, approved reason code — every field the current process routinely leaves blank.  (D4 T-011, FM-3)</a:t>
+            </a:r>
+          </a:p>
+        </p:txBody>
+      </p:sp>
+      <p:sp>
+        <p:nvSpPr>
+          <p:cNvPr id="15" name="Oval 14"/>
+          <p:cNvSpPr/>
+          <p:nvPr/>
+        </p:nvSpPr>
+        <p:spPr>
+          <a:xfrm>
+            <a:off x="274320" y="4498848"/>
+            <a:ext cx="411480" cy="411480"/>
+          </a:xfrm>
+          <a:prstGeom prst="ellipse">
+            <a:avLst/>
+          </a:prstGeom>
+          <a:solidFill>
+            <a:srgbClr val="1F61AA"/>
+          </a:solidFill>
+          <a:ln>
+            <a:noFill/>
+          </a:ln>
+        </p:spPr>
+        <p:style>
+          <a:lnRef idx="1">
+            <a:schemeClr val="accent1"/>
+          </a:lnRef>
+          <a:fillRef idx="3">
+            <a:schemeClr val="accent1"/>
+          </a:fillRef>
+          <a:effectRef idx="2">
+            <a:schemeClr val="accent1"/>
+          </a:effectRef>
+          <a:fontRef idx="minor">
+            <a:schemeClr val="lt1"/>
+          </a:fontRef>
+        </p:style>
+        <p:txBody>
+          <a:bodyPr rtlCol="0" anchor="ctr"/>
+          <a:lstStyle/>
+          <a:p>
+            <a:pPr algn="ctr"/>
+            <a:endParaRPr/>
+          </a:p>
+        </p:txBody>
+      </p:sp>
+      <p:sp>
+        <p:nvSpPr>
+          <p:cNvPr id="16" name="TextBox 15"/>
+          <p:cNvSpPr txBox="1"/>
+          <p:nvPr/>
+        </p:nvSpPr>
+        <p:spPr>
+          <a:xfrm>
+            <a:off x="274320" y="4498848"/>
+            <a:ext cx="411480" cy="411480"/>
+          </a:xfrm>
+          <a:prstGeom prst="rect">
+            <a:avLst/>
+          </a:prstGeom>
+          <a:noFill/>
+        </p:spPr>
+        <p:txBody>
+          <a:bodyPr wrap="square">
+            <a:spAutoFit/>
+          </a:bodyPr>
+          <a:lstStyle/>
+          <a:p>
+            <a:pPr algn="ctr"/>
+            <a:r>
+              <a:rPr sz="1400" b="1">
+                <a:solidFill>
+                  <a:srgbClr val="FFFFFF"/>
+                </a:solidFill>
+              </a:rPr>
+              <a:t>4</a:t>
+            </a:r>
+          </a:p>
+        </p:txBody>
+      </p:sp>
+      <p:sp>
+        <p:nvSpPr>
+          <p:cNvPr id="17" name="TextBox 16"/>
+          <p:cNvSpPr txBox="1"/>
+          <p:nvPr/>
+        </p:nvSpPr>
+        <p:spPr>
+          <a:xfrm>
+            <a:off x="822960" y="4480560"/>
+            <a:ext cx="10789920" cy="347472"/>
+          </a:xfrm>
+          <a:prstGeom prst="rect">
+            <a:avLst/>
+          </a:prstGeom>
+          <a:noFill/>
+        </p:spPr>
+        <p:txBody>
+          <a:bodyPr wrap="square">
+            <a:spAutoFit/>
+          </a:bodyPr>
+          <a:lstStyle/>
+          <a:p>
+            <a:pPr algn="l"/>
+            <a:r>
+              <a:rPr sz="1400" b="1">
+                <a:solidFill>
+                  <a:srgbClr val="1A2E44"/>
+                </a:solidFill>
+              </a:rPr>
+              <a:t>Flags repeat dispute patterns automatically</a:t>
+            </a:r>
+          </a:p>
+        </p:txBody>
+      </p:sp>
+      <p:sp>
+        <p:nvSpPr>
+          <p:cNvPr id="18" name="TextBox 17"/>
+          <p:cNvSpPr txBox="1"/>
+          <p:nvPr/>
+        </p:nvSpPr>
+        <p:spPr>
+          <a:xfrm>
+            <a:off x="822960" y="4846320"/>
+            <a:ext cx="10789920" cy="502920"/>
+          </a:xfrm>
+          <a:prstGeom prst="rect">
+            <a:avLst/>
+          </a:prstGeom>
+          <a:noFill/>
+        </p:spPr>
+        <p:txBody>
+          <a:bodyPr wrap="square">
+            <a:spAutoFit/>
+          </a:bodyPr>
+          <a:lstStyle/>
+          <a:p>
+            <a:pPr algn="l"/>
+            <a:r>
+              <a:rPr sz="1200" b="0">
+                <a:solidFill>
+                  <a:srgbClr val="444444"/>
+                </a:solidFill>
+              </a:rPr>
+              <a:t>A customer with multiple open disputes of the same type triggers senior review rather than being handled as three separate cases — the Hayes &amp; Sons situation would have been surfaced on day one.  (D4 T-008, ET-005)</a:t>
+            </a:r>
+          </a:p>
+        </p:txBody>
+      </p:sp>
+      <p:sp>
+        <p:nvSpPr>
+          <p:cNvPr id="19" name="TextBox 18"/>
+          <p:cNvSpPr txBox="1"/>
+          <p:nvPr/>
+        </p:nvSpPr>
+        <p:spPr>
+          <a:xfrm>
+            <a:off x="182880" y="6537960"/>
+            <a:ext cx="11795760" cy="274320"/>
+          </a:xfrm>
+          <a:prstGeom prst="rect">
+            <a:avLst/>
+          </a:prstGeom>
+          <a:noFill/>
+        </p:spPr>
+        <p:txBody>
+          <a:bodyPr wrap="square">
+            <a:spAutoFit/>
+          </a:bodyPr>
+          <a:lstStyle/>
+          <a:p>
+            <a:pPr algn="ctr"/>
+            <a:r>
+              <a:rPr sz="900" b="0">
+                <a:solidFill>
+                  <a:srgbClr val="999999"/>
+                </a:solidFill>
+              </a:rPr>
+              <a:t>Apex Distribution Ltd  |  Billing Disputes — Assessment &amp; Proposed Solution  |  Confidential</a:t>
+            </a:r>
+          </a:p>
+        </p:txBody>
+      </p:sp>
+    </p:spTree>
+  </p:cSld>
+  <p:clrMapOvr>
+    <a:masterClrMapping/>
+  </p:clrMapOvr>
+</p:sld>
+</file>
+
+<file path=ppt/slides/slide11.xml><?xml version="1.0" encoding="utf-8"?>
+<p:sld xmlns:a="http://schemas.openxmlformats.org/drawingml/2006/main" xmlns:r="http://schemas.openxmlformats.org/officeDocument/2006/relationships" xmlns:p="http://schemas.openxmlformats.org/presentationml/2006/main">
+  <p:cSld>
+    <p:bg>
+      <p:bgPr>
+        <a:solidFill>
+          <a:srgbClr val="FFFFFF"/>
+        </a:solidFill>
+        <a:effectLst/>
+      </p:bgPr>
+    </p:bg>
+    <p:spTree>
+      <p:nvGrpSpPr>
+        <p:cNvPr id="1" name=""/>
+        <p:cNvGrpSpPr/>
+        <p:nvPr/>
+      </p:nvGrpSpPr>
+      <p:grpSpPr>
+        <a:xfrm>
+          <a:off x="0" y="0"/>
+          <a:ext cx="0" cy="0"/>
+          <a:chOff x="0" y="0"/>
+          <a:chExt cx="0" cy="0"/>
+        </a:xfrm>
+      </p:grpSpPr>
+      <p:sp>
+        <p:nvSpPr>
+          <p:cNvPr id="2" name="Rectangle 1"/>
+          <p:cNvSpPr/>
+          <p:nvPr/>
+        </p:nvSpPr>
+        <p:spPr>
+          <a:xfrm>
+            <a:off x="0" y="0"/>
+            <a:ext cx="12188952" cy="1280160"/>
+          </a:xfrm>
+          <a:prstGeom prst="rect">
+            <a:avLst/>
+          </a:prstGeom>
+          <a:solidFill>
+            <a:srgbClr val="1A2E44"/>
+          </a:solidFill>
+          <a:ln>
+            <a:noFill/>
+          </a:ln>
+        </p:spPr>
+        <p:style>
+          <a:lnRef idx="1">
+            <a:schemeClr val="accent1"/>
+          </a:lnRef>
+          <a:fillRef idx="3">
+            <a:schemeClr val="accent1"/>
+          </a:fillRef>
+          <a:effectRef idx="2">
+            <a:schemeClr val="accent1"/>
+          </a:effectRef>
+          <a:fontRef idx="minor">
+            <a:schemeClr val="lt1"/>
+          </a:fontRef>
+        </p:style>
+        <p:txBody>
+          <a:bodyPr wrap="square" lIns="274320" tIns="164592" rtlCol="0" anchor="ctr"/>
           <a:lstStyle/>
           <a:p>
             <a:pPr algn="l"/>
@@ -4821,9 +5382,27 @@
                 <a:tableStyleId>{5C22544A-7EE6-4342-B048-85BDC9FD1C3A}</a:tableStyleId>
               </a:tblPr>
               <a:tblGrid>
-                <a:gridCol w="2011680"/>
-                <a:gridCol w="5029200"/>
-                <a:gridCol w="4572000"/>
+                <a:gridCol w="2011680">
+                  <a:extLst>
+                    <a:ext uri="{9D8B030D-6E8A-4147-A177-3AD203B41FA5}">
+                      <a16:colId xmlns:a16="http://schemas.microsoft.com/office/drawing/2014/main" val="20000"/>
+                    </a:ext>
+                  </a:extLst>
+                </a:gridCol>
+                <a:gridCol w="5029200">
+                  <a:extLst>
+                    <a:ext uri="{9D8B030D-6E8A-4147-A177-3AD203B41FA5}">
+                      <a16:colId xmlns:a16="http://schemas.microsoft.com/office/drawing/2014/main" val="20001"/>
+                    </a:ext>
+                  </a:extLst>
+                </a:gridCol>
+                <a:gridCol w="4572000">
+                  <a:extLst>
+                    <a:ext uri="{9D8B030D-6E8A-4147-A177-3AD203B41FA5}">
+                      <a16:colId xmlns:a16="http://schemas.microsoft.com/office/drawing/2014/main" val="20002"/>
+                    </a:ext>
+                  </a:extLst>
+                </a:gridCol>
               </a:tblGrid>
               <a:tr h="1120140">
                 <a:tc>
@@ -4832,7 +5411,7 @@
                     <a:lstStyle/>
                     <a:p>
                       <a:r>
-                        <a:rPr b="1" sz="1200">
+                        <a:rPr sz="1200" b="1">
                           <a:solidFill>
                             <a:srgbClr val="FFFFFF"/>
                           </a:solidFill>
@@ -4853,7 +5432,7 @@
                     <a:lstStyle/>
                     <a:p>
                       <a:r>
-                        <a:rPr b="1" sz="1200">
+                        <a:rPr sz="1200" b="1">
                           <a:solidFill>
                             <a:srgbClr val="FFFFFF"/>
                           </a:solidFill>
@@ -4874,7 +5453,7 @@
                     <a:lstStyle/>
                     <a:p>
                       <a:r>
-                        <a:rPr b="1" sz="1200">
+                        <a:rPr sz="1200" b="1">
                           <a:solidFill>
                             <a:srgbClr val="FFFFFF"/>
                           </a:solidFill>
@@ -4889,6 +5468,11 @@
                     </a:solidFill>
                   </a:tcPr>
                 </a:tc>
+                <a:extLst>
+                  <a:ext uri="{0D108BD9-81ED-4DB2-BD59-A6C34878D82A}">
+                    <a16:rowId xmlns:a16="http://schemas.microsoft.com/office/drawing/2014/main" val="10000"/>
+                  </a:ext>
+                </a:extLst>
               </a:tr>
               <a:tr h="1120140">
                 <a:tc>
@@ -4954,6 +5538,11 @@
                     </a:solidFill>
                   </a:tcPr>
                 </a:tc>
+                <a:extLst>
+                  <a:ext uri="{0D108BD9-81ED-4DB2-BD59-A6C34878D82A}">
+                    <a16:rowId xmlns:a16="http://schemas.microsoft.com/office/drawing/2014/main" val="10001"/>
+                  </a:ext>
+                </a:extLst>
               </a:tr>
               <a:tr h="1120140">
                 <a:tc>
@@ -5019,6 +5608,11 @@
                     </a:solidFill>
                   </a:tcPr>
                 </a:tc>
+                <a:extLst>
+                  <a:ext uri="{0D108BD9-81ED-4DB2-BD59-A6C34878D82A}">
+                    <a16:rowId xmlns:a16="http://schemas.microsoft.com/office/drawing/2014/main" val="10002"/>
+                  </a:ext>
+                </a:extLst>
               </a:tr>
               <a:tr h="1120140">
                 <a:tc>
@@ -5084,6 +5678,11 @@
                     </a:solidFill>
                   </a:tcPr>
                 </a:tc>
+                <a:extLst>
+                  <a:ext uri="{0D108BD9-81ED-4DB2-BD59-A6C34878D82A}">
+                    <a16:rowId xmlns:a16="http://schemas.microsoft.com/office/drawing/2014/main" val="10003"/>
+                  </a:ext>
+                </a:extLst>
               </a:tr>
             </a:tbl>
           </a:graphicData>
@@ -5165,8 +5764,8 @@
 </p:sld>
 </file>
 
-<file path=ppt/slides/slide11.xml><?xml version="1.0" encoding="utf-8"?>
-<p:sld xmlns:a="http://schemas.openxmlformats.org/drawingml/2006/main" xmlns:p="http://schemas.openxmlformats.org/presentationml/2006/main" xmlns:r="http://schemas.openxmlformats.org/officeDocument/2006/relationships">
+<file path=ppt/slides/slide12.xml><?xml version="1.0" encoding="utf-8"?>
+<p:sld xmlns:a="http://schemas.openxmlformats.org/drawingml/2006/main" xmlns:r="http://schemas.openxmlformats.org/officeDocument/2006/relationships" xmlns:p="http://schemas.openxmlformats.org/presentationml/2006/main">
   <p:cSld>
     <p:bg>
       <p:bgPr>
@@ -5182,7 +5781,14 @@
         <p:cNvGrpSpPr/>
         <p:nvPr/>
       </p:nvGrpSpPr>
-      <p:grpSpPr/>
+      <p:grpSpPr>
+        <a:xfrm>
+          <a:off x="0" y="0"/>
+          <a:ext cx="0" cy="0"/>
+          <a:chOff x="0" y="0"/>
+          <a:chExt cx="0" cy="0"/>
+        </a:xfrm>
+      </p:grpSpPr>
       <p:sp>
         <p:nvSpPr>
           <p:cNvPr id="2" name="Rectangle 1"/>
@@ -5219,7 +5825,7 @@
           </a:fontRef>
         </p:style>
         <p:txBody>
-          <a:bodyPr rtlCol="0" anchor="ctr" wrap="square" lIns="274320" tIns="164592"/>
+          <a:bodyPr wrap="square" lIns="274320" tIns="164592" rtlCol="0" anchor="ctr"/>
           <a:lstStyle/>
           <a:p>
             <a:pPr algn="l"/>
@@ -5253,9 +5859,27 @@
                 <a:tableStyleId>{5C22544A-7EE6-4342-B048-85BDC9FD1C3A}</a:tableStyleId>
               </a:tblPr>
               <a:tblGrid>
-                <a:gridCol w="4114800"/>
-                <a:gridCol w="1645920"/>
-                <a:gridCol w="5852160"/>
+                <a:gridCol w="4114800">
+                  <a:extLst>
+                    <a:ext uri="{9D8B030D-6E8A-4147-A177-3AD203B41FA5}">
+                      <a16:colId xmlns:a16="http://schemas.microsoft.com/office/drawing/2014/main" val="20000"/>
+                    </a:ext>
+                  </a:extLst>
+                </a:gridCol>
+                <a:gridCol w="1645920">
+                  <a:extLst>
+                    <a:ext uri="{9D8B030D-6E8A-4147-A177-3AD203B41FA5}">
+                      <a16:colId xmlns:a16="http://schemas.microsoft.com/office/drawing/2014/main" val="20001"/>
+                    </a:ext>
+                  </a:extLst>
+                </a:gridCol>
+                <a:gridCol w="5852160">
+                  <a:extLst>
+                    <a:ext uri="{9D8B030D-6E8A-4147-A177-3AD203B41FA5}">
+                      <a16:colId xmlns:a16="http://schemas.microsoft.com/office/drawing/2014/main" val="20002"/>
+                    </a:ext>
+                  </a:extLst>
+                </a:gridCol>
               </a:tblGrid>
               <a:tr h="914400">
                 <a:tc>
@@ -5264,7 +5888,7 @@
                     <a:lstStyle/>
                     <a:p>
                       <a:r>
-                        <a:rPr b="1" sz="1200">
+                        <a:rPr sz="1200" b="1">
                           <a:solidFill>
                             <a:srgbClr val="FFFFFF"/>
                           </a:solidFill>
@@ -5285,7 +5909,7 @@
                     <a:lstStyle/>
                     <a:p>
                       <a:r>
-                        <a:rPr b="1" sz="1200">
+                        <a:rPr sz="1200" b="1">
                           <a:solidFill>
                             <a:srgbClr val="FFFFFF"/>
                           </a:solidFill>
@@ -5306,7 +5930,7 @@
                     <a:lstStyle/>
                     <a:p>
                       <a:r>
-                        <a:rPr b="1" sz="1200">
+                        <a:rPr sz="1200" b="1">
                           <a:solidFill>
                             <a:srgbClr val="FFFFFF"/>
                           </a:solidFill>
@@ -5321,6 +5945,11 @@
                     </a:solidFill>
                   </a:tcPr>
                 </a:tc>
+                <a:extLst>
+                  <a:ext uri="{0D108BD9-81ED-4DB2-BD59-A6C34878D82A}">
+                    <a16:rowId xmlns:a16="http://schemas.microsoft.com/office/drawing/2014/main" val="10000"/>
+                  </a:ext>
+                </a:extLst>
               </a:tr>
               <a:tr h="914400">
                 <a:tc>
@@ -5386,6 +6015,11 @@
                     </a:solidFill>
                   </a:tcPr>
                 </a:tc>
+                <a:extLst>
+                  <a:ext uri="{0D108BD9-81ED-4DB2-BD59-A6C34878D82A}">
+                    <a16:rowId xmlns:a16="http://schemas.microsoft.com/office/drawing/2014/main" val="10001"/>
+                  </a:ext>
+                </a:extLst>
               </a:tr>
               <a:tr h="914400">
                 <a:tc>
@@ -5451,6 +6085,11 @@
                     </a:solidFill>
                   </a:tcPr>
                 </a:tc>
+                <a:extLst>
+                  <a:ext uri="{0D108BD9-81ED-4DB2-BD59-A6C34878D82A}">
+                    <a16:rowId xmlns:a16="http://schemas.microsoft.com/office/drawing/2014/main" val="10002"/>
+                  </a:ext>
+                </a:extLst>
               </a:tr>
               <a:tr h="914400">
                 <a:tc>
@@ -5516,6 +6155,11 @@
                     </a:solidFill>
                   </a:tcPr>
                 </a:tc>
+                <a:extLst>
+                  <a:ext uri="{0D108BD9-81ED-4DB2-BD59-A6C34878D82A}">
+                    <a16:rowId xmlns:a16="http://schemas.microsoft.com/office/drawing/2014/main" val="10003"/>
+                  </a:ext>
+                </a:extLst>
               </a:tr>
             </a:tbl>
           </a:graphicData>
@@ -5598,8 +6242,8 @@
 </p:sld>
 </file>
 
-<file path=ppt/slides/slide12.xml><?xml version="1.0" encoding="utf-8"?>
-<p:sld xmlns:a="http://schemas.openxmlformats.org/drawingml/2006/main" xmlns:p="http://schemas.openxmlformats.org/presentationml/2006/main" xmlns:r="http://schemas.openxmlformats.org/officeDocument/2006/relationships">
+<file path=ppt/slides/slide13.xml><?xml version="1.0" encoding="utf-8"?>
+<p:sld xmlns:a="http://schemas.openxmlformats.org/drawingml/2006/main" xmlns:r="http://schemas.openxmlformats.org/officeDocument/2006/relationships" xmlns:p="http://schemas.openxmlformats.org/presentationml/2006/main">
   <p:cSld>
     <p:bg>
       <p:bgPr>
@@ -5615,7 +6259,14 @@
         <p:cNvGrpSpPr/>
         <p:nvPr/>
       </p:nvGrpSpPr>
-      <p:grpSpPr/>
+      <p:grpSpPr>
+        <a:xfrm>
+          <a:off x="0" y="0"/>
+          <a:ext cx="0" cy="0"/>
+          <a:chOff x="0" y="0"/>
+          <a:chExt cx="0" cy="0"/>
+        </a:xfrm>
+      </p:grpSpPr>
       <p:sp>
         <p:nvSpPr>
           <p:cNvPr id="2" name="Rectangle 1"/>
@@ -5652,7 +6303,7 @@
           </a:fontRef>
         </p:style>
         <p:txBody>
-          <a:bodyPr rtlCol="0" anchor="ctr" wrap="square" lIns="274320" tIns="164592"/>
+          <a:bodyPr wrap="square" lIns="274320" tIns="164592" rtlCol="0" anchor="ctr"/>
           <a:lstStyle/>
           <a:p>
             <a:pPr algn="l"/>
@@ -6054,8 +6705,8 @@
 </p:sld>
 </file>
 
-<file path=ppt/slides/slide13.xml><?xml version="1.0" encoding="utf-8"?>
-<p:sld xmlns:a="http://schemas.openxmlformats.org/drawingml/2006/main" xmlns:p="http://schemas.openxmlformats.org/presentationml/2006/main" xmlns:r="http://schemas.openxmlformats.org/officeDocument/2006/relationships">
+<file path=ppt/slides/slide14.xml><?xml version="1.0" encoding="utf-8"?>
+<p:sld xmlns:a="http://schemas.openxmlformats.org/drawingml/2006/main" xmlns:r="http://schemas.openxmlformats.org/officeDocument/2006/relationships" xmlns:p="http://schemas.openxmlformats.org/presentationml/2006/main">
   <p:cSld>
     <p:bg>
       <p:bgPr>
@@ -6071,7 +6722,14 @@
         <p:cNvGrpSpPr/>
         <p:nvPr/>
       </p:nvGrpSpPr>
-      <p:grpSpPr/>
+      <p:grpSpPr>
+        <a:xfrm>
+          <a:off x="0" y="0"/>
+          <a:ext cx="0" cy="0"/>
+          <a:chOff x="0" y="0"/>
+          <a:chExt cx="0" cy="0"/>
+        </a:xfrm>
+      </p:grpSpPr>
       <p:sp>
         <p:nvSpPr>
           <p:cNvPr id="2" name="Rectangle 1"/>
@@ -6108,7 +6766,7 @@
           </a:fontRef>
         </p:style>
         <p:txBody>
-          <a:bodyPr rtlCol="0" anchor="ctr" wrap="square" lIns="274320" tIns="164592"/>
+          <a:bodyPr wrap="square" lIns="274320" tIns="164592" rtlCol="0" anchor="ctr"/>
           <a:lstStyle/>
           <a:p>
             <a:pPr algn="l"/>
@@ -6369,8 +7027,8 @@
 </p:sld>
 </file>
 
-<file path=ppt/slides/slide14.xml><?xml version="1.0" encoding="utf-8"?>
-<p:sld xmlns:a="http://schemas.openxmlformats.org/drawingml/2006/main" xmlns:p="http://schemas.openxmlformats.org/presentationml/2006/main" xmlns:r="http://schemas.openxmlformats.org/officeDocument/2006/relationships">
+<file path=ppt/slides/slide15.xml><?xml version="1.0" encoding="utf-8"?>
+<p:sld xmlns:a="http://schemas.openxmlformats.org/drawingml/2006/main" xmlns:r="http://schemas.openxmlformats.org/officeDocument/2006/relationships" xmlns:p="http://schemas.openxmlformats.org/presentationml/2006/main">
   <p:cSld>
     <p:bg>
       <p:bgPr>
@@ -6386,7 +7044,14 @@
         <p:cNvGrpSpPr/>
         <p:nvPr/>
       </p:nvGrpSpPr>
-      <p:grpSpPr/>
+      <p:grpSpPr>
+        <a:xfrm>
+          <a:off x="0" y="0"/>
+          <a:ext cx="0" cy="0"/>
+          <a:chOff x="0" y="0"/>
+          <a:chExt cx="0" cy="0"/>
+        </a:xfrm>
+      </p:grpSpPr>
       <p:sp>
         <p:nvSpPr>
           <p:cNvPr id="2" name="Rectangle 1"/>
@@ -6423,7 +7088,7 @@
           </a:fontRef>
         </p:style>
         <p:txBody>
-          <a:bodyPr rtlCol="0" anchor="ctr" wrap="square" lIns="274320" tIns="164592"/>
+          <a:bodyPr wrap="square" lIns="274320" tIns="164592" rtlCol="0" anchor="ctr"/>
           <a:lstStyle/>
           <a:p>
             <a:pPr algn="l"/>
@@ -6457,10 +7122,34 @@
                 <a:tableStyleId>{5C22544A-7EE6-4342-B048-85BDC9FD1C3A}</a:tableStyleId>
               </a:tblPr>
               <a:tblGrid>
-                <a:gridCol w="4754880"/>
-                <a:gridCol w="1828800"/>
-                <a:gridCol w="2194560"/>
-                <a:gridCol w="2560320"/>
+                <a:gridCol w="4754880">
+                  <a:extLst>
+                    <a:ext uri="{9D8B030D-6E8A-4147-A177-3AD203B41FA5}">
+                      <a16:colId xmlns:a16="http://schemas.microsoft.com/office/drawing/2014/main" val="20000"/>
+                    </a:ext>
+                  </a:extLst>
+                </a:gridCol>
+                <a:gridCol w="1828800">
+                  <a:extLst>
+                    <a:ext uri="{9D8B030D-6E8A-4147-A177-3AD203B41FA5}">
+                      <a16:colId xmlns:a16="http://schemas.microsoft.com/office/drawing/2014/main" val="20001"/>
+                    </a:ext>
+                  </a:extLst>
+                </a:gridCol>
+                <a:gridCol w="2194560">
+                  <a:extLst>
+                    <a:ext uri="{9D8B030D-6E8A-4147-A177-3AD203B41FA5}">
+                      <a16:colId xmlns:a16="http://schemas.microsoft.com/office/drawing/2014/main" val="20002"/>
+                    </a:ext>
+                  </a:extLst>
+                </a:gridCol>
+                <a:gridCol w="2560320">
+                  <a:extLst>
+                    <a:ext uri="{9D8B030D-6E8A-4147-A177-3AD203B41FA5}">
+                      <a16:colId xmlns:a16="http://schemas.microsoft.com/office/drawing/2014/main" val="20003"/>
+                    </a:ext>
+                  </a:extLst>
+                </a:gridCol>
               </a:tblGrid>
               <a:tr h="877824">
                 <a:tc>
@@ -6469,7 +7158,7 @@
                     <a:lstStyle/>
                     <a:p>
                       <a:r>
-                        <a:rPr b="1" sz="1200">
+                        <a:rPr sz="1200" b="1">
                           <a:solidFill>
                             <a:srgbClr val="FFFFFF"/>
                           </a:solidFill>
@@ -6490,7 +7179,7 @@
                     <a:lstStyle/>
                     <a:p>
                       <a:r>
-                        <a:rPr b="1" sz="1200">
+                        <a:rPr sz="1200" b="1">
                           <a:solidFill>
                             <a:srgbClr val="FFFFFF"/>
                           </a:solidFill>
@@ -6511,7 +7200,7 @@
                     <a:lstStyle/>
                     <a:p>
                       <a:r>
-                        <a:rPr b="1" sz="1200">
+                        <a:rPr sz="1200" b="1">
                           <a:solidFill>
                             <a:srgbClr val="FFFFFF"/>
                           </a:solidFill>
@@ -6532,7 +7221,7 @@
                     <a:lstStyle/>
                     <a:p>
                       <a:r>
-                        <a:rPr b="1" sz="1200">
+                        <a:rPr sz="1200" b="1">
                           <a:solidFill>
                             <a:srgbClr val="FFFFFF"/>
                           </a:solidFill>
@@ -6547,6 +7236,11 @@
                     </a:solidFill>
                   </a:tcPr>
                 </a:tc>
+                <a:extLst>
+                  <a:ext uri="{0D108BD9-81ED-4DB2-BD59-A6C34878D82A}">
+                    <a16:rowId xmlns:a16="http://schemas.microsoft.com/office/drawing/2014/main" val="10000"/>
+                  </a:ext>
+                </a:extLst>
               </a:tr>
               <a:tr h="877824">
                 <a:tc>
@@ -6633,6 +7327,11 @@
                     </a:solidFill>
                   </a:tcPr>
                 </a:tc>
+                <a:extLst>
+                  <a:ext uri="{0D108BD9-81ED-4DB2-BD59-A6C34878D82A}">
+                    <a16:rowId xmlns:a16="http://schemas.microsoft.com/office/drawing/2014/main" val="10001"/>
+                  </a:ext>
+                </a:extLst>
               </a:tr>
               <a:tr h="877824">
                 <a:tc>
@@ -6719,6 +7418,11 @@
                     </a:solidFill>
                   </a:tcPr>
                 </a:tc>
+                <a:extLst>
+                  <a:ext uri="{0D108BD9-81ED-4DB2-BD59-A6C34878D82A}">
+                    <a16:rowId xmlns:a16="http://schemas.microsoft.com/office/drawing/2014/main" val="10002"/>
+                  </a:ext>
+                </a:extLst>
               </a:tr>
               <a:tr h="877824">
                 <a:tc>
@@ -6805,6 +7509,11 @@
                     </a:solidFill>
                   </a:tcPr>
                 </a:tc>
+                <a:extLst>
+                  <a:ext uri="{0D108BD9-81ED-4DB2-BD59-A6C34878D82A}">
+                    <a16:rowId xmlns:a16="http://schemas.microsoft.com/office/drawing/2014/main" val="10003"/>
+                  </a:ext>
+                </a:extLst>
               </a:tr>
               <a:tr h="877824">
                 <a:tc>
@@ -6891,6 +7600,11 @@
                     </a:solidFill>
                   </a:tcPr>
                 </a:tc>
+                <a:extLst>
+                  <a:ext uri="{0D108BD9-81ED-4DB2-BD59-A6C34878D82A}">
+                    <a16:rowId xmlns:a16="http://schemas.microsoft.com/office/drawing/2014/main" val="10004"/>
+                  </a:ext>
+                </a:extLst>
               </a:tr>
             </a:tbl>
           </a:graphicData>
@@ -6938,8 +7652,8 @@
 </p:sld>
 </file>
 
-<file path=ppt/slides/slide15.xml><?xml version="1.0" encoding="utf-8"?>
-<p:sld xmlns:a="http://schemas.openxmlformats.org/drawingml/2006/main" xmlns:p="http://schemas.openxmlformats.org/presentationml/2006/main" xmlns:r="http://schemas.openxmlformats.org/officeDocument/2006/relationships">
+<file path=ppt/slides/slide16.xml><?xml version="1.0" encoding="utf-8"?>
+<p:sld xmlns:a="http://schemas.openxmlformats.org/drawingml/2006/main" xmlns:r="http://schemas.openxmlformats.org/officeDocument/2006/relationships" xmlns:p="http://schemas.openxmlformats.org/presentationml/2006/main">
   <p:cSld>
     <p:bg>
       <p:bgPr>
@@ -6955,7 +7669,14 @@
         <p:cNvGrpSpPr/>
         <p:nvPr/>
       </p:nvGrpSpPr>
-      <p:grpSpPr/>
+      <p:grpSpPr>
+        <a:xfrm>
+          <a:off x="0" y="0"/>
+          <a:ext cx="0" cy="0"/>
+          <a:chOff x="0" y="0"/>
+          <a:chExt cx="0" cy="0"/>
+        </a:xfrm>
+      </p:grpSpPr>
       <p:sp>
         <p:nvSpPr>
           <p:cNvPr id="2" name="Rectangle 1"/>
@@ -6996,6 +7717,7 @@
           <a:lstStyle/>
           <a:p>
             <a:pPr algn="ctr"/>
+            <a:endParaRPr/>
           </a:p>
         </p:txBody>
       </p:sp>
@@ -7178,7 +7900,7 @@
 </file>
 
 <file path=ppt/slides/slide2.xml><?xml version="1.0" encoding="utf-8"?>
-<p:sld xmlns:a="http://schemas.openxmlformats.org/drawingml/2006/main" xmlns:p="http://schemas.openxmlformats.org/presentationml/2006/main" xmlns:r="http://schemas.openxmlformats.org/officeDocument/2006/relationships">
+<p:sld xmlns:a="http://schemas.openxmlformats.org/drawingml/2006/main" xmlns:r="http://schemas.openxmlformats.org/officeDocument/2006/relationships" xmlns:p="http://schemas.openxmlformats.org/presentationml/2006/main">
   <p:cSld>
     <p:bg>
       <p:bgPr>
@@ -7194,7 +7916,14 @@
         <p:cNvGrpSpPr/>
         <p:nvPr/>
       </p:nvGrpSpPr>
-      <p:grpSpPr/>
+      <p:grpSpPr>
+        <a:xfrm>
+          <a:off x="0" y="0"/>
+          <a:ext cx="0" cy="0"/>
+          <a:chOff x="0" y="0"/>
+          <a:chExt cx="0" cy="0"/>
+        </a:xfrm>
+      </p:grpSpPr>
       <p:sp>
         <p:nvSpPr>
           <p:cNvPr id="2" name="Rectangle 1"/>
@@ -7231,7 +7960,7 @@
           </a:fontRef>
         </p:style>
         <p:txBody>
-          <a:bodyPr rtlCol="0" anchor="ctr" wrap="square" lIns="274320" tIns="164592"/>
+          <a:bodyPr wrap="square" lIns="274320" tIns="164592" rtlCol="0" anchor="ctr"/>
           <a:lstStyle/>
           <a:p>
             <a:pPr algn="l"/>
@@ -7459,7 +8188,7 @@
 </file>
 
 <file path=ppt/slides/slide3.xml><?xml version="1.0" encoding="utf-8"?>
-<p:sld xmlns:a="http://schemas.openxmlformats.org/drawingml/2006/main" xmlns:p="http://schemas.openxmlformats.org/presentationml/2006/main" xmlns:r="http://schemas.openxmlformats.org/officeDocument/2006/relationships">
+<p:sld xmlns:a="http://schemas.openxmlformats.org/drawingml/2006/main" xmlns:r="http://schemas.openxmlformats.org/officeDocument/2006/relationships" xmlns:p="http://schemas.openxmlformats.org/presentationml/2006/main">
   <p:cSld>
     <p:bg>
       <p:bgPr>
@@ -7475,7 +8204,14 @@
         <p:cNvGrpSpPr/>
         <p:nvPr/>
       </p:nvGrpSpPr>
-      <p:grpSpPr/>
+      <p:grpSpPr>
+        <a:xfrm>
+          <a:off x="0" y="0"/>
+          <a:ext cx="0" cy="0"/>
+          <a:chOff x="0" y="0"/>
+          <a:chExt cx="0" cy="0"/>
+        </a:xfrm>
+      </p:grpSpPr>
       <p:sp>
         <p:nvSpPr>
           <p:cNvPr id="2" name="Rectangle 1"/>
@@ -7512,7 +8248,7 @@
           </a:fontRef>
         </p:style>
         <p:txBody>
-          <a:bodyPr rtlCol="0" anchor="ctr" wrap="square" lIns="274320" tIns="164592"/>
+          <a:bodyPr wrap="square" lIns="274320" tIns="164592" rtlCol="0" anchor="ctr"/>
           <a:lstStyle/>
           <a:p>
             <a:pPr algn="l"/>
@@ -7546,10 +8282,34 @@
                 <a:tableStyleId>{5C22544A-7EE6-4342-B048-85BDC9FD1C3A}</a:tableStyleId>
               </a:tblPr>
               <a:tblGrid>
-                <a:gridCol w="2194560"/>
-                <a:gridCol w="1280160"/>
-                <a:gridCol w="1280160"/>
-                <a:gridCol w="6766560"/>
+                <a:gridCol w="2194560">
+                  <a:extLst>
+                    <a:ext uri="{9D8B030D-6E8A-4147-A177-3AD203B41FA5}">
+                      <a16:colId xmlns:a16="http://schemas.microsoft.com/office/drawing/2014/main" val="20000"/>
+                    </a:ext>
+                  </a:extLst>
+                </a:gridCol>
+                <a:gridCol w="1280160">
+                  <a:extLst>
+                    <a:ext uri="{9D8B030D-6E8A-4147-A177-3AD203B41FA5}">
+                      <a16:colId xmlns:a16="http://schemas.microsoft.com/office/drawing/2014/main" val="20001"/>
+                    </a:ext>
+                  </a:extLst>
+                </a:gridCol>
+                <a:gridCol w="1280160">
+                  <a:extLst>
+                    <a:ext uri="{9D8B030D-6E8A-4147-A177-3AD203B41FA5}">
+                      <a16:colId xmlns:a16="http://schemas.microsoft.com/office/drawing/2014/main" val="20002"/>
+                    </a:ext>
+                  </a:extLst>
+                </a:gridCol>
+                <a:gridCol w="6766560">
+                  <a:extLst>
+                    <a:ext uri="{9D8B030D-6E8A-4147-A177-3AD203B41FA5}">
+                      <a16:colId xmlns:a16="http://schemas.microsoft.com/office/drawing/2014/main" val="20003"/>
+                    </a:ext>
+                  </a:extLst>
+                </a:gridCol>
               </a:tblGrid>
               <a:tr h="475488">
                 <a:tc>
@@ -7558,7 +8318,7 @@
                     <a:lstStyle/>
                     <a:p>
                       <a:r>
-                        <a:rPr b="1" sz="1200">
+                        <a:rPr sz="1200" b="1">
                           <a:solidFill>
                             <a:srgbClr val="FFFFFF"/>
                           </a:solidFill>
@@ -7579,7 +8339,7 @@
                     <a:lstStyle/>
                     <a:p>
                       <a:r>
-                        <a:rPr b="1" sz="1200">
+                        <a:rPr sz="1200" b="1">
                           <a:solidFill>
                             <a:srgbClr val="FFFFFF"/>
                           </a:solidFill>
@@ -7600,7 +8360,7 @@
                     <a:lstStyle/>
                     <a:p>
                       <a:r>
-                        <a:rPr b="1" sz="1200">
+                        <a:rPr sz="1200" b="1">
                           <a:solidFill>
                             <a:srgbClr val="FFFFFF"/>
                           </a:solidFill>
@@ -7621,7 +8381,7 @@
                     <a:lstStyle/>
                     <a:p>
                       <a:r>
-                        <a:rPr b="1" sz="1200">
+                        <a:rPr sz="1200" b="1">
                           <a:solidFill>
                             <a:srgbClr val="FFFFFF"/>
                           </a:solidFill>
@@ -7636,6 +8396,11 @@
                     </a:solidFill>
                   </a:tcPr>
                 </a:tc>
+                <a:extLst>
+                  <a:ext uri="{0D108BD9-81ED-4DB2-BD59-A6C34878D82A}">
+                    <a16:rowId xmlns:a16="http://schemas.microsoft.com/office/drawing/2014/main" val="10000"/>
+                  </a:ext>
+                </a:extLst>
               </a:tr>
               <a:tr h="475488">
                 <a:tc>
@@ -7706,6 +8471,11 @@
                   </a:txBody>
                   <a:tcPr/>
                 </a:tc>
+                <a:extLst>
+                  <a:ext uri="{0D108BD9-81ED-4DB2-BD59-A6C34878D82A}">
+                    <a16:rowId xmlns:a16="http://schemas.microsoft.com/office/drawing/2014/main" val="10001"/>
+                  </a:ext>
+                </a:extLst>
               </a:tr>
               <a:tr h="475488">
                 <a:tc>
@@ -7776,6 +8546,11 @@
                   </a:txBody>
                   <a:tcPr/>
                 </a:tc>
+                <a:extLst>
+                  <a:ext uri="{0D108BD9-81ED-4DB2-BD59-A6C34878D82A}">
+                    <a16:rowId xmlns:a16="http://schemas.microsoft.com/office/drawing/2014/main" val="10002"/>
+                  </a:ext>
+                </a:extLst>
               </a:tr>
               <a:tr h="475488">
                 <a:tc>
@@ -7846,6 +8621,11 @@
                   </a:txBody>
                   <a:tcPr/>
                 </a:tc>
+                <a:extLst>
+                  <a:ext uri="{0D108BD9-81ED-4DB2-BD59-A6C34878D82A}">
+                    <a16:rowId xmlns:a16="http://schemas.microsoft.com/office/drawing/2014/main" val="10003"/>
+                  </a:ext>
+                </a:extLst>
               </a:tr>
               <a:tr h="475488">
                 <a:tc>
@@ -7932,6 +8712,11 @@
                     </a:solidFill>
                   </a:tcPr>
                 </a:tc>
+                <a:extLst>
+                  <a:ext uri="{0D108BD9-81ED-4DB2-BD59-A6C34878D82A}">
+                    <a16:rowId xmlns:a16="http://schemas.microsoft.com/office/drawing/2014/main" val="10004"/>
+                  </a:ext>
+                </a:extLst>
               </a:tr>
             </a:tbl>
           </a:graphicData>
@@ -8082,7 +8867,7 @@
 </file>
 
 <file path=ppt/slides/slide4.xml><?xml version="1.0" encoding="utf-8"?>
-<p:sld xmlns:a="http://schemas.openxmlformats.org/drawingml/2006/main" xmlns:p="http://schemas.openxmlformats.org/presentationml/2006/main" xmlns:r="http://schemas.openxmlformats.org/officeDocument/2006/relationships">
+<p:sld xmlns:a="http://schemas.openxmlformats.org/drawingml/2006/main" xmlns:r="http://schemas.openxmlformats.org/officeDocument/2006/relationships" xmlns:p="http://schemas.openxmlformats.org/presentationml/2006/main">
   <p:cSld>
     <p:bg>
       <p:bgPr>
@@ -8098,7 +8883,14 @@
         <p:cNvGrpSpPr/>
         <p:nvPr/>
       </p:nvGrpSpPr>
-      <p:grpSpPr/>
+      <p:grpSpPr>
+        <a:xfrm>
+          <a:off x="0" y="0"/>
+          <a:ext cx="0" cy="0"/>
+          <a:chOff x="0" y="0"/>
+          <a:chExt cx="0" cy="0"/>
+        </a:xfrm>
+      </p:grpSpPr>
       <p:sp>
         <p:nvSpPr>
           <p:cNvPr id="2" name="Rectangle 1"/>
@@ -8135,7 +8927,7 @@
           </a:fontRef>
         </p:style>
         <p:txBody>
-          <a:bodyPr rtlCol="0" anchor="ctr" wrap="square" lIns="274320" tIns="164592"/>
+          <a:bodyPr wrap="square" lIns="274320" tIns="164592" rtlCol="0" anchor="ctr"/>
           <a:lstStyle/>
           <a:p>
             <a:pPr algn="l"/>
@@ -8145,236 +8937,41 @@
                   <a:srgbClr val="FFFFFF"/>
                 </a:solidFill>
               </a:rPr>
-              <a:t>Why We Are Here — The Business Problem</a:t>
-            </a:r>
-          </a:p>
-        </p:txBody>
-      </p:sp>
-      <p:sp>
-        <p:nvSpPr>
-          <p:cNvPr id="3" name="TextBox 2"/>
-          <p:cNvSpPr txBox="1"/>
-          <p:nvPr/>
-        </p:nvSpPr>
-        <p:spPr>
-          <a:xfrm>
-            <a:off x="548640" y="1508760"/>
-            <a:ext cx="11064240" cy="347472"/>
-          </a:xfrm>
-          <a:prstGeom prst="rect">
-            <a:avLst/>
-          </a:prstGeom>
-          <a:noFill/>
-        </p:spPr>
-        <p:txBody>
-          <a:bodyPr wrap="square">
-            <a:spAutoFit/>
-          </a:bodyPr>
-          <a:lstStyle/>
+              <a:t>The Opportunity — Non-Determinism × Volume Grid</a:t>
+            </a:r>
+          </a:p>
           <a:p>
             <a:pPr algn="l"/>
             <a:r>
-              <a:rPr sz="1600" b="1">
-                <a:solidFill>
-                  <a:srgbClr val="1A2E44"/>
-                </a:solidFill>
-              </a:rPr>
-              <a:t>60 billing disputes per day at 28 min each</a:t>
-            </a:r>
-          </a:p>
-        </p:txBody>
-      </p:sp>
-      <p:sp>
-        <p:nvSpPr>
-          <p:cNvPr id="4" name="TextBox 3"/>
-          <p:cNvSpPr txBox="1"/>
-          <p:nvPr/>
-        </p:nvSpPr>
-        <p:spPr>
-          <a:xfrm>
-            <a:off x="822960" y="1856232"/>
-            <a:ext cx="10789920" cy="384048"/>
-          </a:xfrm>
-          <a:prstGeom prst="rect">
-            <a:avLst/>
-          </a:prstGeom>
-          <a:noFill/>
-        </p:spPr>
-        <p:txBody>
-          <a:bodyPr wrap="square">
-            <a:spAutoFit/>
-          </a:bodyPr>
-          <a:lstStyle/>
-          <a:p>
-            <a:pPr algn="l"/>
-            <a:r>
-              <a:rPr sz="1400" b="0">
-                <a:solidFill>
-                  <a:srgbClr val="444444"/>
-                </a:solidFill>
-              </a:rPr>
-              <a:t>Highest handle time in Customer Operations — absorbing 1,600+ minutes of skilled agent time daily with no structured support</a:t>
-            </a:r>
-          </a:p>
-        </p:txBody>
-      </p:sp>
-      <p:sp>
-        <p:nvSpPr>
-          <p:cNvPr id="5" name="TextBox 4"/>
-          <p:cNvSpPr txBox="1"/>
-          <p:nvPr/>
-        </p:nvSpPr>
-        <p:spPr>
-          <a:xfrm>
-            <a:off x="548640" y="2359152"/>
-            <a:ext cx="11064240" cy="347472"/>
-          </a:xfrm>
-          <a:prstGeom prst="rect">
-            <a:avLst/>
-          </a:prstGeom>
-          <a:noFill/>
-        </p:spPr>
-        <p:txBody>
-          <a:bodyPr wrap="square">
-            <a:spAutoFit/>
-          </a:bodyPr>
-          <a:lstStyle/>
-          <a:p>
-            <a:pPr algn="l"/>
-            <a:r>
-              <a:rPr sz="1600" b="1">
-                <a:solidFill>
-                  <a:srgbClr val="1A2E44"/>
-                </a:solidFill>
-              </a:rPr>
-              <a:t>Credits applied without an audit trail</a:t>
-            </a:r>
-          </a:p>
-        </p:txBody>
-      </p:sp>
-      <p:sp>
-        <p:nvSpPr>
-          <p:cNvPr id="6" name="TextBox 5"/>
-          <p:cNvSpPr txBox="1"/>
-          <p:nvPr/>
-        </p:nvSpPr>
-        <p:spPr>
-          <a:xfrm>
-            <a:off x="822960" y="2706624"/>
-            <a:ext cx="10789920" cy="384048"/>
-          </a:xfrm>
-          <a:prstGeom prst="rect">
-            <a:avLst/>
-          </a:prstGeom>
-          <a:noFill/>
-        </p:spPr>
-        <p:txBody>
-          <a:bodyPr wrap="square">
-            <a:spAutoFit/>
-          </a:bodyPr>
-          <a:lstStyle/>
-          <a:p>
-            <a:pPr algn="l"/>
-            <a:r>
-              <a:rPr sz="1400" b="0">
-                <a:solidFill>
-                  <a:srgbClr val="444444"/>
-                </a:solidFill>
-              </a:rPr>
-              <a:t>Live case records show at least one £170 credit applied with no named approver and no audit log entry (Artefact 2, D3)</a:t>
-            </a:r>
-          </a:p>
-        </p:txBody>
-      </p:sp>
-      <p:sp>
-        <p:nvSpPr>
-          <p:cNvPr id="7" name="TextBox 6"/>
-          <p:cNvSpPr txBox="1"/>
-          <p:nvPr/>
-        </p:nvSpPr>
-        <p:spPr>
-          <a:xfrm>
-            <a:off x="548640" y="3209544"/>
-            <a:ext cx="11064240" cy="347472"/>
-          </a:xfrm>
-          <a:prstGeom prst="rect">
-            <a:avLst/>
-          </a:prstGeom>
-          <a:noFill/>
-        </p:spPr>
-        <p:txBody>
-          <a:bodyPr wrap="square">
-            <a:spAutoFit/>
-          </a:bodyPr>
-          <a:lstStyle/>
-          <a:p>
-            <a:pPr algn="l"/>
-            <a:r>
-              <a:rPr sz="1600" b="1">
-                <a:solidFill>
-                  <a:srgbClr val="1A2E44"/>
-                </a:solidFill>
-              </a:rPr>
-              <a:t>Competitor benchmark: £1.2M annualised saving</a:t>
-            </a:r>
-          </a:p>
-        </p:txBody>
-      </p:sp>
-      <p:sp>
-        <p:nvSpPr>
-          <p:cNvPr id="8" name="TextBox 7"/>
-          <p:cNvSpPr txBox="1"/>
-          <p:nvPr/>
-        </p:nvSpPr>
-        <p:spPr>
-          <a:xfrm>
-            <a:off x="822960" y="3557016"/>
-            <a:ext cx="10789920" cy="384048"/>
-          </a:xfrm>
-          <a:prstGeom prst="rect">
-            <a:avLst/>
-          </a:prstGeom>
-          <a:noFill/>
-        </p:spPr>
-        <p:txBody>
-          <a:bodyPr wrap="square">
-            <a:spAutoFit/>
-          </a:bodyPr>
-          <a:lstStyle/>
-          <a:p>
-            <a:pPr algn="l"/>
-            <a:r>
-              <a:rPr sz="1400" b="0">
-                <a:solidFill>
-                  <a:srgbClr val="444444"/>
-                </a:solidFill>
-              </a:rPr>
-              <a:t>CEO has asked whether Apex can achieve something comparable (scenario_context.md)</a:t>
-            </a:r>
-          </a:p>
-        </p:txBody>
-      </p:sp>
-      <p:sp>
-        <p:nvSpPr>
-          <p:cNvPr id="9" name="Rectangle 8"/>
+              <a:rPr sz="1400">
+                <a:solidFill>
+                  <a:srgbClr val="AACCEE"/>
+                </a:solidFill>
+              </a:rPr>
+              <a:t>Alternative to Slide 8 (choose one before presenting)</a:t>
+            </a:r>
+          </a:p>
+        </p:txBody>
+      </p:sp>
+      <p:sp>
+        <p:nvSpPr>
+          <p:cNvPr id="3" name="Rectangle 2"/>
           <p:cNvSpPr/>
           <p:nvPr/>
         </p:nvSpPr>
         <p:spPr>
           <a:xfrm>
-            <a:off x="365760" y="5120640"/>
-            <a:ext cx="11155680" cy="822960"/>
+            <a:off x="3886200" y="1481328"/>
+            <a:ext cx="3383280" cy="2423160"/>
           </a:xfrm>
           <a:prstGeom prst="rect">
             <a:avLst/>
           </a:prstGeom>
           <a:solidFill>
-            <a:srgbClr val="E8F1FB"/>
+            <a:srgbClr val="E8F4EA"/>
           </a:solidFill>
           <a:ln>
-            <a:solidFill>
-              <a:srgbClr val="1F61AA"/>
-            </a:solidFill>
+            <a:noFill/>
           </a:ln>
         </p:spPr>
         <p:style>
@@ -8396,19 +8993,240 @@
           <a:lstStyle/>
           <a:p>
             <a:pPr algn="ctr"/>
-          </a:p>
-        </p:txBody>
-      </p:sp>
-      <p:sp>
-        <p:nvSpPr>
-          <p:cNvPr id="10" name="TextBox 9"/>
+            <a:endParaRPr/>
+          </a:p>
+        </p:txBody>
+      </p:sp>
+      <p:sp>
+        <p:nvSpPr>
+          <p:cNvPr id="4" name="Rectangle 3"/>
+          <p:cNvSpPr/>
+          <p:nvPr/>
+        </p:nvSpPr>
+        <p:spPr>
+          <a:xfrm>
+            <a:off x="502920" y="1481328"/>
+            <a:ext cx="3383280" cy="2423160"/>
+          </a:xfrm>
+          <a:prstGeom prst="rect">
+            <a:avLst/>
+          </a:prstGeom>
+          <a:solidFill>
+            <a:srgbClr val="FFF8E8"/>
+          </a:solidFill>
+          <a:ln>
+            <a:noFill/>
+          </a:ln>
+        </p:spPr>
+        <p:style>
+          <a:lnRef idx="1">
+            <a:schemeClr val="accent1"/>
+          </a:lnRef>
+          <a:fillRef idx="3">
+            <a:schemeClr val="accent1"/>
+          </a:fillRef>
+          <a:effectRef idx="2">
+            <a:schemeClr val="accent1"/>
+          </a:effectRef>
+          <a:fontRef idx="minor">
+            <a:schemeClr val="lt1"/>
+          </a:fontRef>
+        </p:style>
+        <p:txBody>
+          <a:bodyPr rtlCol="0" anchor="ctr"/>
+          <a:lstStyle/>
+          <a:p>
+            <a:pPr algn="ctr"/>
+            <a:endParaRPr/>
+          </a:p>
+        </p:txBody>
+      </p:sp>
+      <p:sp>
+        <p:nvSpPr>
+          <p:cNvPr id="5" name="Rectangle 4"/>
+          <p:cNvSpPr/>
+          <p:nvPr/>
+        </p:nvSpPr>
+        <p:spPr>
+          <a:xfrm>
+            <a:off x="502920" y="3904488"/>
+            <a:ext cx="3383280" cy="2423160"/>
+          </a:xfrm>
+          <a:prstGeom prst="rect">
+            <a:avLst/>
+          </a:prstGeom>
+          <a:solidFill>
+            <a:srgbClr val="F5F5F5"/>
+          </a:solidFill>
+          <a:ln>
+            <a:noFill/>
+          </a:ln>
+        </p:spPr>
+        <p:style>
+          <a:lnRef idx="1">
+            <a:schemeClr val="accent1"/>
+          </a:lnRef>
+          <a:fillRef idx="3">
+            <a:schemeClr val="accent1"/>
+          </a:fillRef>
+          <a:effectRef idx="2">
+            <a:schemeClr val="accent1"/>
+          </a:effectRef>
+          <a:fontRef idx="minor">
+            <a:schemeClr val="lt1"/>
+          </a:fontRef>
+        </p:style>
+        <p:txBody>
+          <a:bodyPr rtlCol="0" anchor="ctr"/>
+          <a:lstStyle/>
+          <a:p>
+            <a:pPr algn="ctr"/>
+            <a:endParaRPr/>
+          </a:p>
+        </p:txBody>
+      </p:sp>
+      <p:sp>
+        <p:nvSpPr>
+          <p:cNvPr id="6" name="Rectangle 5"/>
+          <p:cNvSpPr/>
+          <p:nvPr/>
+        </p:nvSpPr>
+        <p:spPr>
+          <a:xfrm>
+            <a:off x="3886200" y="3904488"/>
+            <a:ext cx="3383280" cy="2423160"/>
+          </a:xfrm>
+          <a:prstGeom prst="rect">
+            <a:avLst/>
+          </a:prstGeom>
+          <a:solidFill>
+            <a:srgbClr val="F0F4FF"/>
+          </a:solidFill>
+          <a:ln>
+            <a:noFill/>
+          </a:ln>
+        </p:spPr>
+        <p:style>
+          <a:lnRef idx="1">
+            <a:schemeClr val="accent1"/>
+          </a:lnRef>
+          <a:fillRef idx="3">
+            <a:schemeClr val="accent1"/>
+          </a:fillRef>
+          <a:effectRef idx="2">
+            <a:schemeClr val="accent1"/>
+          </a:effectRef>
+          <a:fontRef idx="minor">
+            <a:schemeClr val="lt1"/>
+          </a:fontRef>
+        </p:style>
+        <p:txBody>
+          <a:bodyPr rtlCol="0" anchor="ctr"/>
+          <a:lstStyle/>
+          <a:p>
+            <a:pPr algn="ctr"/>
+            <a:endParaRPr/>
+          </a:p>
+        </p:txBody>
+      </p:sp>
+      <p:sp>
+        <p:nvSpPr>
+          <p:cNvPr id="7" name="Rectangle 6"/>
+          <p:cNvSpPr/>
+          <p:nvPr/>
+        </p:nvSpPr>
+        <p:spPr>
+          <a:xfrm>
+            <a:off x="502920" y="3886200"/>
+            <a:ext cx="6766560" cy="36576"/>
+          </a:xfrm>
+          <a:prstGeom prst="rect">
+            <a:avLst/>
+          </a:prstGeom>
+          <a:solidFill>
+            <a:srgbClr val="AAAAAA"/>
+          </a:solidFill>
+          <a:ln>
+            <a:noFill/>
+          </a:ln>
+        </p:spPr>
+        <p:style>
+          <a:lnRef idx="1">
+            <a:schemeClr val="accent1"/>
+          </a:lnRef>
+          <a:fillRef idx="3">
+            <a:schemeClr val="accent1"/>
+          </a:fillRef>
+          <a:effectRef idx="2">
+            <a:schemeClr val="accent1"/>
+          </a:effectRef>
+          <a:fontRef idx="minor">
+            <a:schemeClr val="lt1"/>
+          </a:fontRef>
+        </p:style>
+        <p:txBody>
+          <a:bodyPr rtlCol="0" anchor="ctr"/>
+          <a:lstStyle/>
+          <a:p>
+            <a:pPr algn="ctr"/>
+            <a:endParaRPr/>
+          </a:p>
+        </p:txBody>
+      </p:sp>
+      <p:sp>
+        <p:nvSpPr>
+          <p:cNvPr id="8" name="Rectangle 7"/>
+          <p:cNvSpPr/>
+          <p:nvPr/>
+        </p:nvSpPr>
+        <p:spPr>
+          <a:xfrm>
+            <a:off x="3867912" y="1481328"/>
+            <a:ext cx="36576" cy="4846320"/>
+          </a:xfrm>
+          <a:prstGeom prst="rect">
+            <a:avLst/>
+          </a:prstGeom>
+          <a:solidFill>
+            <a:srgbClr val="AAAAAA"/>
+          </a:solidFill>
+          <a:ln>
+            <a:noFill/>
+          </a:ln>
+        </p:spPr>
+        <p:style>
+          <a:lnRef idx="1">
+            <a:schemeClr val="accent1"/>
+          </a:lnRef>
+          <a:fillRef idx="3">
+            <a:schemeClr val="accent1"/>
+          </a:fillRef>
+          <a:effectRef idx="2">
+            <a:schemeClr val="accent1"/>
+          </a:effectRef>
+          <a:fontRef idx="minor">
+            <a:schemeClr val="lt1"/>
+          </a:fontRef>
+        </p:style>
+        <p:txBody>
+          <a:bodyPr rtlCol="0" anchor="ctr"/>
+          <a:lstStyle/>
+          <a:p>
+            <a:pPr algn="ctr"/>
+            <a:endParaRPr/>
+          </a:p>
+        </p:txBody>
+      </p:sp>
+      <p:sp>
+        <p:nvSpPr>
+          <p:cNvPr id="9" name="TextBox 8"/>
           <p:cNvSpPr txBox="1"/>
           <p:nvPr/>
         </p:nvSpPr>
         <p:spPr>
           <a:xfrm>
-            <a:off x="502920" y="5166360"/>
-            <a:ext cx="10972800" cy="749808"/>
+            <a:off x="4089196" y="1554480"/>
+            <a:ext cx="3017520" cy="256032"/>
           </a:xfrm>
           <a:prstGeom prst="rect">
             <a:avLst/>
@@ -8423,19 +9241,1065 @@
           <a:p>
             <a:pPr algn="l"/>
             <a:r>
-              <a:rPr sz="1300" b="0">
+              <a:rPr sz="900" b="1">
+                <a:solidFill>
+                  <a:srgbClr val="007A33"/>
+                </a:solidFill>
+              </a:rPr>
+              <a:t>Primary agentic targets</a:t>
+            </a:r>
+          </a:p>
+        </p:txBody>
+      </p:sp>
+      <p:sp>
+        <p:nvSpPr>
+          <p:cNvPr id="10" name="TextBox 9"/>
+          <p:cNvSpPr txBox="1"/>
+          <p:nvPr/>
+        </p:nvSpPr>
+        <p:spPr>
+          <a:xfrm>
+            <a:off x="594360" y="1554480"/>
+            <a:ext cx="3017520" cy="256032"/>
+          </a:xfrm>
+          <a:prstGeom prst="rect">
+            <a:avLst/>
+          </a:prstGeom>
+          <a:noFill/>
+        </p:spPr>
+        <p:txBody>
+          <a:bodyPr wrap="square">
+            <a:spAutoFit/>
+          </a:bodyPr>
+          <a:lstStyle/>
+          <a:p>
+            <a:pPr algn="l"/>
+            <a:r>
+              <a:rPr sz="900" b="1">
+                <a:solidFill>
+                  <a:srgbClr val="FF9900"/>
+                </a:solidFill>
+              </a:rPr>
+              <a:t>Rules / RPA only</a:t>
+            </a:r>
+          </a:p>
+        </p:txBody>
+      </p:sp>
+      <p:sp>
+        <p:nvSpPr>
+          <p:cNvPr id="11" name="TextBox 10"/>
+          <p:cNvSpPr txBox="1"/>
+          <p:nvPr/>
+        </p:nvSpPr>
+        <p:spPr>
+          <a:xfrm>
+            <a:off x="594360" y="4146804"/>
+            <a:ext cx="3017520" cy="256032"/>
+          </a:xfrm>
+          <a:prstGeom prst="rect">
+            <a:avLst/>
+          </a:prstGeom>
+          <a:noFill/>
+        </p:spPr>
+        <p:txBody>
+          <a:bodyPr wrap="square">
+            <a:spAutoFit/>
+          </a:bodyPr>
+          <a:lstStyle/>
+          <a:p>
+            <a:pPr algn="l"/>
+            <a:r>
+              <a:rPr sz="900" b="1">
+                <a:solidFill>
+                  <a:srgbClr val="444444"/>
+                </a:solidFill>
+              </a:rPr>
+              <a:t>Not worth automating</a:t>
+            </a:r>
+          </a:p>
+        </p:txBody>
+      </p:sp>
+      <p:sp>
+        <p:nvSpPr>
+          <p:cNvPr id="12" name="TextBox 11"/>
+          <p:cNvSpPr txBox="1"/>
+          <p:nvPr/>
+        </p:nvSpPr>
+        <p:spPr>
+          <a:xfrm>
+            <a:off x="4089196" y="4146804"/>
+            <a:ext cx="3017520" cy="256032"/>
+          </a:xfrm>
+          <a:prstGeom prst="rect">
+            <a:avLst/>
+          </a:prstGeom>
+          <a:noFill/>
+        </p:spPr>
+        <p:txBody>
+          <a:bodyPr wrap="square">
+            <a:spAutoFit/>
+          </a:bodyPr>
+          <a:lstStyle/>
+          <a:p>
+            <a:pPr algn="l"/>
+            <a:r>
+              <a:rPr sz="900" b="1">
+                <a:solidFill>
+                  <a:srgbClr val="1F61AA"/>
+                </a:solidFill>
+              </a:rPr>
+              <a:t>Select agentic use cases</a:t>
+            </a:r>
+          </a:p>
+        </p:txBody>
+      </p:sp>
+      <p:sp>
+        <p:nvSpPr>
+          <p:cNvPr id="13" name="TextBox 12"/>
+          <p:cNvSpPr txBox="1"/>
+          <p:nvPr/>
+        </p:nvSpPr>
+        <p:spPr>
+          <a:xfrm>
+            <a:off x="502920" y="6400800"/>
+            <a:ext cx="6766560" cy="256032"/>
+          </a:xfrm>
+          <a:prstGeom prst="rect">
+            <a:avLst/>
+          </a:prstGeom>
+          <a:noFill/>
+        </p:spPr>
+        <p:txBody>
+          <a:bodyPr wrap="square">
+            <a:spAutoFit/>
+          </a:bodyPr>
+          <a:lstStyle/>
+          <a:p>
+            <a:pPr algn="ctr"/>
+            <a:r>
+              <a:rPr sz="1000" b="0">
+                <a:solidFill>
+                  <a:srgbClr val="444444"/>
+                </a:solidFill>
+              </a:rPr>
+              <a:t>← Low Non-Determinism                    High Non-Determinism →</a:t>
+            </a:r>
+          </a:p>
+        </p:txBody>
+      </p:sp>
+      <p:sp>
+        <p:nvSpPr>
+          <p:cNvPr id="14" name="TextBox 13"/>
+          <p:cNvSpPr txBox="1"/>
+          <p:nvPr/>
+        </p:nvSpPr>
+        <p:spPr>
+          <a:xfrm>
+            <a:off x="45720" y="5687568"/>
+            <a:ext cx="411480" cy="548640"/>
+          </a:xfrm>
+          <a:prstGeom prst="rect">
+            <a:avLst/>
+          </a:prstGeom>
+          <a:noFill/>
+        </p:spPr>
+        <p:txBody>
+          <a:bodyPr wrap="square">
+            <a:spAutoFit/>
+          </a:bodyPr>
+          <a:lstStyle/>
+          <a:p>
+            <a:pPr algn="ctr"/>
+            <a:r>
+              <a:rPr sz="900" b="0">
+                <a:solidFill>
+                  <a:srgbClr val="444444"/>
+                </a:solidFill>
+              </a:rPr>
+              <a:t>Low
+Volume</a:t>
+            </a:r>
+          </a:p>
+        </p:txBody>
+      </p:sp>
+      <p:sp>
+        <p:nvSpPr>
+          <p:cNvPr id="15" name="TextBox 14"/>
+          <p:cNvSpPr txBox="1"/>
+          <p:nvPr/>
+        </p:nvSpPr>
+        <p:spPr>
+          <a:xfrm>
+            <a:off x="45720" y="1481328"/>
+            <a:ext cx="411480" cy="548640"/>
+          </a:xfrm>
+          <a:prstGeom prst="rect">
+            <a:avLst/>
+          </a:prstGeom>
+          <a:noFill/>
+        </p:spPr>
+        <p:txBody>
+          <a:bodyPr wrap="square">
+            <a:spAutoFit/>
+          </a:bodyPr>
+          <a:lstStyle/>
+          <a:p>
+            <a:pPr algn="ctr"/>
+            <a:r>
+              <a:rPr sz="900" b="0">
+                <a:solidFill>
+                  <a:srgbClr val="444444"/>
+                </a:solidFill>
+              </a:rPr>
+              <a:t>High
+Volume</a:t>
+            </a:r>
+          </a:p>
+        </p:txBody>
+      </p:sp>
+      <p:sp>
+        <p:nvSpPr>
+          <p:cNvPr id="16" name="Oval 15"/>
+          <p:cNvSpPr/>
+          <p:nvPr/>
+        </p:nvSpPr>
+        <p:spPr>
+          <a:xfrm>
+            <a:off x="6248095" y="2212848"/>
+            <a:ext cx="960120" cy="960120"/>
+          </a:xfrm>
+          <a:prstGeom prst="ellipse">
+            <a:avLst/>
+          </a:prstGeom>
+          <a:solidFill>
+            <a:srgbClr val="1F61AA"/>
+          </a:solidFill>
+          <a:ln>
+            <a:noFill/>
+          </a:ln>
+        </p:spPr>
+        <p:style>
+          <a:lnRef idx="1">
+            <a:schemeClr val="accent1"/>
+          </a:lnRef>
+          <a:fillRef idx="3">
+            <a:schemeClr val="accent1"/>
+          </a:fillRef>
+          <a:effectRef idx="2">
+            <a:schemeClr val="accent1"/>
+          </a:effectRef>
+          <a:fontRef idx="minor">
+            <a:schemeClr val="lt1"/>
+          </a:fontRef>
+        </p:style>
+        <p:txBody>
+          <a:bodyPr rtlCol="0" anchor="ctr"/>
+          <a:lstStyle/>
+          <a:p>
+            <a:pPr algn="ctr"/>
+            <a:endParaRPr/>
+          </a:p>
+        </p:txBody>
+      </p:sp>
+      <p:sp>
+        <p:nvSpPr>
+          <p:cNvPr id="17" name="TextBox 16"/>
+          <p:cNvSpPr txBox="1"/>
+          <p:nvPr/>
+        </p:nvSpPr>
+        <p:spPr>
+          <a:xfrm>
+            <a:off x="6156655" y="3209544"/>
+            <a:ext cx="1143000" cy="658368"/>
+          </a:xfrm>
+          <a:prstGeom prst="rect">
+            <a:avLst/>
+          </a:prstGeom>
+          <a:noFill/>
+        </p:spPr>
+        <p:txBody>
+          <a:bodyPr wrap="square">
+            <a:spAutoFit/>
+          </a:bodyPr>
+          <a:lstStyle/>
+          <a:p>
+            <a:pPr algn="ctr"/>
+            <a:r>
+              <a:rPr sz="1000" b="1">
                 <a:solidFill>
                   <a:srgbClr val="1A2E44"/>
                 </a:solidFill>
               </a:rPr>
-              <a:t>Assessment question: Can a targeted agent reduce dispute handling time, close the compliance gap, and give Apex an auditable trace of every credit decision — without repeating the failures of 2024?</a:t>
-            </a:r>
-          </a:p>
-        </p:txBody>
-      </p:sp>
-      <p:sp>
-        <p:nvSpPr>
-          <p:cNvPr id="11" name="TextBox 10"/>
+              <a:t>WS4
+Billing Disputes
+★ PRIMARY</a:t>
+            </a:r>
+          </a:p>
+        </p:txBody>
+      </p:sp>
+      <p:sp>
+        <p:nvSpPr>
+          <p:cNvPr id="18" name="Oval 17"/>
+          <p:cNvSpPr/>
+          <p:nvPr/>
+        </p:nvSpPr>
+        <p:spPr>
+          <a:xfrm>
+            <a:off x="5189220" y="2304288"/>
+            <a:ext cx="777240" cy="777240"/>
+          </a:xfrm>
+          <a:prstGeom prst="ellipse">
+            <a:avLst/>
+          </a:prstGeom>
+          <a:solidFill>
+            <a:srgbClr val="88AACC"/>
+          </a:solidFill>
+          <a:ln>
+            <a:noFill/>
+          </a:ln>
+        </p:spPr>
+        <p:style>
+          <a:lnRef idx="1">
+            <a:schemeClr val="accent1"/>
+          </a:lnRef>
+          <a:fillRef idx="3">
+            <a:schemeClr val="accent1"/>
+          </a:fillRef>
+          <a:effectRef idx="2">
+            <a:schemeClr val="accent1"/>
+          </a:effectRef>
+          <a:fontRef idx="minor">
+            <a:schemeClr val="lt1"/>
+          </a:fontRef>
+        </p:style>
+        <p:txBody>
+          <a:bodyPr rtlCol="0" anchor="ctr"/>
+          <a:lstStyle/>
+          <a:p>
+            <a:pPr algn="ctr"/>
+            <a:endParaRPr/>
+          </a:p>
+        </p:txBody>
+      </p:sp>
+      <p:sp>
+        <p:nvSpPr>
+          <p:cNvPr id="19" name="TextBox 18"/>
+          <p:cNvSpPr txBox="1"/>
+          <p:nvPr/>
+        </p:nvSpPr>
+        <p:spPr>
+          <a:xfrm>
+            <a:off x="5097780" y="3118104"/>
+            <a:ext cx="960120" cy="658368"/>
+          </a:xfrm>
+          <a:prstGeom prst="rect">
+            <a:avLst/>
+          </a:prstGeom>
+          <a:noFill/>
+        </p:spPr>
+        <p:txBody>
+          <a:bodyPr wrap="square">
+            <a:spAutoFit/>
+          </a:bodyPr>
+          <a:lstStyle/>
+          <a:p>
+            <a:pPr algn="ctr"/>
+            <a:r>
+              <a:rPr sz="900" b="0">
+                <a:solidFill>
+                  <a:srgbClr val="444444"/>
+                </a:solidFill>
+              </a:rPr>
+              <a:t>WS1
+Delivery Exceptions</a:t>
+            </a:r>
+          </a:p>
+        </p:txBody>
+      </p:sp>
+      <p:sp>
+        <p:nvSpPr>
+          <p:cNvPr id="20" name="Oval 19"/>
+          <p:cNvSpPr/>
+          <p:nvPr/>
+        </p:nvSpPr>
+        <p:spPr>
+          <a:xfrm>
+            <a:off x="4647895" y="2788920"/>
+            <a:ext cx="777240" cy="777240"/>
+          </a:xfrm>
+          <a:prstGeom prst="ellipse">
+            <a:avLst/>
+          </a:prstGeom>
+          <a:solidFill>
+            <a:srgbClr val="88AACC"/>
+          </a:solidFill>
+          <a:ln>
+            <a:noFill/>
+          </a:ln>
+        </p:spPr>
+        <p:style>
+          <a:lnRef idx="1">
+            <a:schemeClr val="accent1"/>
+          </a:lnRef>
+          <a:fillRef idx="3">
+            <a:schemeClr val="accent1"/>
+          </a:fillRef>
+          <a:effectRef idx="2">
+            <a:schemeClr val="accent1"/>
+          </a:effectRef>
+          <a:fontRef idx="minor">
+            <a:schemeClr val="lt1"/>
+          </a:fontRef>
+        </p:style>
+        <p:txBody>
+          <a:bodyPr rtlCol="0" anchor="ctr"/>
+          <a:lstStyle/>
+          <a:p>
+            <a:pPr algn="ctr"/>
+            <a:endParaRPr/>
+          </a:p>
+        </p:txBody>
+      </p:sp>
+      <p:sp>
+        <p:nvSpPr>
+          <p:cNvPr id="21" name="TextBox 20"/>
+          <p:cNvSpPr txBox="1"/>
+          <p:nvPr/>
+        </p:nvSpPr>
+        <p:spPr>
+          <a:xfrm>
+            <a:off x="4556455" y="3602736"/>
+            <a:ext cx="960120" cy="658368"/>
+          </a:xfrm>
+          <a:prstGeom prst="rect">
+            <a:avLst/>
+          </a:prstGeom>
+          <a:noFill/>
+        </p:spPr>
+        <p:txBody>
+          <a:bodyPr wrap="square">
+            <a:spAutoFit/>
+          </a:bodyPr>
+          <a:lstStyle/>
+          <a:p>
+            <a:pPr algn="ctr"/>
+            <a:r>
+              <a:rPr sz="900" b="0">
+                <a:solidFill>
+                  <a:srgbClr val="444444"/>
+                </a:solidFill>
+              </a:rPr>
+              <a:t>WS3
+Dispatch Adjustments*</a:t>
+            </a:r>
+          </a:p>
+        </p:txBody>
+      </p:sp>
+      <p:sp>
+        <p:nvSpPr>
+          <p:cNvPr id="22" name="Oval 21"/>
+          <p:cNvSpPr/>
+          <p:nvPr/>
+        </p:nvSpPr>
+        <p:spPr>
+          <a:xfrm>
+            <a:off x="1805940" y="1480413"/>
+            <a:ext cx="777240" cy="777240"/>
+          </a:xfrm>
+          <a:prstGeom prst="ellipse">
+            <a:avLst/>
+          </a:prstGeom>
+          <a:solidFill>
+            <a:srgbClr val="88AACC"/>
+          </a:solidFill>
+          <a:ln>
+            <a:noFill/>
+          </a:ln>
+        </p:spPr>
+        <p:style>
+          <a:lnRef idx="1">
+            <a:schemeClr val="accent1"/>
+          </a:lnRef>
+          <a:fillRef idx="3">
+            <a:schemeClr val="accent1"/>
+          </a:fillRef>
+          <a:effectRef idx="2">
+            <a:schemeClr val="accent1"/>
+          </a:effectRef>
+          <a:fontRef idx="minor">
+            <a:schemeClr val="lt1"/>
+          </a:fontRef>
+        </p:style>
+        <p:txBody>
+          <a:bodyPr rtlCol="0" anchor="ctr"/>
+          <a:lstStyle/>
+          <a:p>
+            <a:pPr algn="ctr"/>
+            <a:endParaRPr/>
+          </a:p>
+        </p:txBody>
+      </p:sp>
+      <p:sp>
+        <p:nvSpPr>
+          <p:cNvPr id="23" name="TextBox 22"/>
+          <p:cNvSpPr txBox="1"/>
+          <p:nvPr/>
+        </p:nvSpPr>
+        <p:spPr>
+          <a:xfrm>
+            <a:off x="1714500" y="2294229"/>
+            <a:ext cx="960120" cy="658368"/>
+          </a:xfrm>
+          <a:prstGeom prst="rect">
+            <a:avLst/>
+          </a:prstGeom>
+          <a:noFill/>
+        </p:spPr>
+        <p:txBody>
+          <a:bodyPr wrap="square">
+            <a:spAutoFit/>
+          </a:bodyPr>
+          <a:lstStyle/>
+          <a:p>
+            <a:pPr algn="ctr"/>
+            <a:r>
+              <a:rPr sz="900" b="0">
+                <a:solidFill>
+                  <a:srgbClr val="444444"/>
+                </a:solidFill>
+              </a:rPr>
+              <a:t>WS2
+ETA Inquiries</a:t>
+            </a:r>
+          </a:p>
+        </p:txBody>
+      </p:sp>
+      <p:sp>
+        <p:nvSpPr>
+          <p:cNvPr id="24" name="Rectangle 23"/>
+          <p:cNvSpPr/>
+          <p:nvPr/>
+        </p:nvSpPr>
+        <p:spPr>
+          <a:xfrm>
+            <a:off x="7589520" y="1481328"/>
+            <a:ext cx="4297680" cy="4846320"/>
+          </a:xfrm>
+          <a:prstGeom prst="rect">
+            <a:avLst/>
+          </a:prstGeom>
+          <a:solidFill>
+            <a:srgbClr val="E8F1FB"/>
+          </a:solidFill>
+          <a:ln>
+            <a:solidFill>
+              <a:srgbClr val="1F61AA"/>
+            </a:solidFill>
+          </a:ln>
+        </p:spPr>
+        <p:style>
+          <a:lnRef idx="1">
+            <a:schemeClr val="accent1"/>
+          </a:lnRef>
+          <a:fillRef idx="3">
+            <a:schemeClr val="accent1"/>
+          </a:fillRef>
+          <a:effectRef idx="2">
+            <a:schemeClr val="accent1"/>
+          </a:effectRef>
+          <a:fontRef idx="minor">
+            <a:schemeClr val="lt1"/>
+          </a:fontRef>
+        </p:style>
+        <p:txBody>
+          <a:bodyPr rtlCol="0" anchor="ctr"/>
+          <a:lstStyle/>
+          <a:p>
+            <a:pPr algn="ctr"/>
+            <a:endParaRPr/>
+          </a:p>
+        </p:txBody>
+      </p:sp>
+      <p:sp>
+        <p:nvSpPr>
+          <p:cNvPr id="25" name="TextBox 24"/>
+          <p:cNvSpPr txBox="1"/>
+          <p:nvPr/>
+        </p:nvSpPr>
+        <p:spPr>
+          <a:xfrm>
+            <a:off x="7772400" y="1664208"/>
+            <a:ext cx="3931920" cy="365760"/>
+          </a:xfrm>
+          <a:prstGeom prst="rect">
+            <a:avLst/>
+          </a:prstGeom>
+          <a:noFill/>
+        </p:spPr>
+        <p:txBody>
+          <a:bodyPr wrap="square">
+            <a:spAutoFit/>
+          </a:bodyPr>
+          <a:lstStyle/>
+          <a:p>
+            <a:pPr algn="l"/>
+            <a:r>
+              <a:rPr sz="1300" b="1">
+                <a:solidFill>
+                  <a:srgbClr val="1A2E44"/>
+                </a:solidFill>
+              </a:rPr>
+              <a:t>WS4 — Billing Disputes</a:t>
+            </a:r>
+          </a:p>
+        </p:txBody>
+      </p:sp>
+      <p:sp>
+        <p:nvSpPr>
+          <p:cNvPr id="26" name="TextBox 25"/>
+          <p:cNvSpPr txBox="1"/>
+          <p:nvPr/>
+        </p:nvSpPr>
+        <p:spPr>
+          <a:xfrm>
+            <a:off x="7772400" y="2121408"/>
+            <a:ext cx="3931920" cy="256032"/>
+          </a:xfrm>
+          <a:prstGeom prst="rect">
+            <a:avLst/>
+          </a:prstGeom>
+          <a:noFill/>
+        </p:spPr>
+        <p:txBody>
+          <a:bodyPr wrap="square">
+            <a:spAutoFit/>
+          </a:bodyPr>
+          <a:lstStyle/>
+          <a:p>
+            <a:pPr algn="l"/>
+            <a:r>
+              <a:rPr sz="1100" b="1">
+                <a:solidFill>
+                  <a:srgbClr val="1A2E44"/>
+                </a:solidFill>
+              </a:rPr>
+              <a:t>Agentic Value Score</a:t>
+            </a:r>
+          </a:p>
+        </p:txBody>
+      </p:sp>
+      <p:sp>
+        <p:nvSpPr>
+          <p:cNvPr id="27" name="TextBox 26"/>
+          <p:cNvSpPr txBox="1"/>
+          <p:nvPr/>
+        </p:nvSpPr>
+        <p:spPr>
+          <a:xfrm>
+            <a:off x="7772400" y="2395728"/>
+            <a:ext cx="3931920" cy="384048"/>
+          </a:xfrm>
+          <a:prstGeom prst="rect">
+            <a:avLst/>
+          </a:prstGeom>
+          <a:noFill/>
+        </p:spPr>
+        <p:txBody>
+          <a:bodyPr wrap="square">
+            <a:spAutoFit/>
+          </a:bodyPr>
+          <a:lstStyle/>
+          <a:p>
+            <a:pPr algn="l"/>
+            <a:r>
+              <a:rPr sz="1100" b="0">
+                <a:solidFill>
+                  <a:srgbClr val="1F61AA"/>
+                </a:solidFill>
+              </a:rPr>
+              <a:t>20 / 25  — highest reasoning complexity
+(Non-Determinism 5) combined with confirmed daily volume</a:t>
+            </a:r>
+          </a:p>
+        </p:txBody>
+      </p:sp>
+      <p:sp>
+        <p:nvSpPr>
+          <p:cNvPr id="28" name="TextBox 27"/>
+          <p:cNvSpPr txBox="1"/>
+          <p:nvPr/>
+        </p:nvSpPr>
+        <p:spPr>
+          <a:xfrm>
+            <a:off x="7772400" y="2852928"/>
+            <a:ext cx="3931920" cy="256032"/>
+          </a:xfrm>
+          <a:prstGeom prst="rect">
+            <a:avLst/>
+          </a:prstGeom>
+          <a:noFill/>
+        </p:spPr>
+        <p:txBody>
+          <a:bodyPr wrap="square">
+            <a:spAutoFit/>
+          </a:bodyPr>
+          <a:lstStyle/>
+          <a:p>
+            <a:pPr algn="l"/>
+            <a:r>
+              <a:rPr sz="1100" b="1">
+                <a:solidFill>
+                  <a:srgbClr val="1A2E44"/>
+                </a:solidFill>
+              </a:rPr>
+              <a:t>Annual baseline cost</a:t>
+            </a:r>
+          </a:p>
+        </p:txBody>
+      </p:sp>
+      <p:sp>
+        <p:nvSpPr>
+          <p:cNvPr id="29" name="TextBox 28"/>
+          <p:cNvSpPr txBox="1"/>
+          <p:nvPr/>
+        </p:nvSpPr>
+        <p:spPr>
+          <a:xfrm>
+            <a:off x="7772400" y="3127248"/>
+            <a:ext cx="3931920" cy="384048"/>
+          </a:xfrm>
+          <a:prstGeom prst="rect">
+            <a:avLst/>
+          </a:prstGeom>
+          <a:noFill/>
+        </p:spPr>
+        <p:txBody>
+          <a:bodyPr wrap="square">
+            <a:spAutoFit/>
+          </a:bodyPr>
+          <a:lstStyle/>
+          <a:p>
+            <a:pPr algn="l"/>
+            <a:r>
+              <a:rPr sz="1100" b="0">
+                <a:solidFill>
+                  <a:srgbClr val="1F61AA"/>
+                </a:solidFill>
+              </a:rPr>
+              <a:t>~£245k / year at current handle time</a:t>
+            </a:r>
+          </a:p>
+        </p:txBody>
+      </p:sp>
+      <p:sp>
+        <p:nvSpPr>
+          <p:cNvPr id="30" name="TextBox 29"/>
+          <p:cNvSpPr txBox="1"/>
+          <p:nvPr/>
+        </p:nvSpPr>
+        <p:spPr>
+          <a:xfrm>
+            <a:off x="7772400" y="3584448"/>
+            <a:ext cx="3931920" cy="256032"/>
+          </a:xfrm>
+          <a:prstGeom prst="rect">
+            <a:avLst/>
+          </a:prstGeom>
+          <a:noFill/>
+        </p:spPr>
+        <p:txBody>
+          <a:bodyPr wrap="square">
+            <a:spAutoFit/>
+          </a:bodyPr>
+          <a:lstStyle/>
+          <a:p>
+            <a:pPr algn="l"/>
+            <a:r>
+              <a:rPr sz="1100" b="1">
+                <a:solidFill>
+                  <a:srgbClr val="1A2E44"/>
+                </a:solidFill>
+              </a:rPr>
+              <a:t>Projected agent cost</a:t>
+            </a:r>
+          </a:p>
+        </p:txBody>
+      </p:sp>
+      <p:sp>
+        <p:nvSpPr>
+          <p:cNvPr id="31" name="TextBox 30"/>
+          <p:cNvSpPr txBox="1"/>
+          <p:nvPr/>
+        </p:nvSpPr>
+        <p:spPr>
+          <a:xfrm>
+            <a:off x="7772400" y="3858768"/>
+            <a:ext cx="3931920" cy="384048"/>
+          </a:xfrm>
+          <a:prstGeom prst="rect">
+            <a:avLst/>
+          </a:prstGeom>
+          <a:noFill/>
+        </p:spPr>
+        <p:txBody>
+          <a:bodyPr wrap="square">
+            <a:spAutoFit/>
+          </a:bodyPr>
+          <a:lstStyle/>
+          <a:p>
+            <a:pPr algn="l"/>
+            <a:r>
+              <a:rPr sz="1100" b="0">
+                <a:solidFill>
+                  <a:srgbClr val="1F61AA"/>
+                </a:solidFill>
+              </a:rPr>
+              <a:t>~£70k / year (incl. human review time)</a:t>
+            </a:r>
+          </a:p>
+        </p:txBody>
+      </p:sp>
+      <p:sp>
+        <p:nvSpPr>
+          <p:cNvPr id="32" name="TextBox 31"/>
+          <p:cNvSpPr txBox="1"/>
+          <p:nvPr/>
+        </p:nvSpPr>
+        <p:spPr>
+          <a:xfrm>
+            <a:off x="7772400" y="4315968"/>
+            <a:ext cx="3931920" cy="256032"/>
+          </a:xfrm>
+          <a:prstGeom prst="rect">
+            <a:avLst/>
+          </a:prstGeom>
+          <a:noFill/>
+        </p:spPr>
+        <p:txBody>
+          <a:bodyPr wrap="square">
+            <a:spAutoFit/>
+          </a:bodyPr>
+          <a:lstStyle/>
+          <a:p>
+            <a:pPr algn="l"/>
+            <a:r>
+              <a:rPr sz="1100" b="1">
+                <a:solidFill>
+                  <a:srgbClr val="1A2E44"/>
+                </a:solidFill>
+              </a:rPr>
+              <a:t>Directional saving</a:t>
+            </a:r>
+          </a:p>
+        </p:txBody>
+      </p:sp>
+      <p:sp>
+        <p:nvSpPr>
+          <p:cNvPr id="33" name="TextBox 32"/>
+          <p:cNvSpPr txBox="1"/>
+          <p:nvPr/>
+        </p:nvSpPr>
+        <p:spPr>
+          <a:xfrm>
+            <a:off x="7772400" y="4590288"/>
+            <a:ext cx="3931920" cy="384048"/>
+          </a:xfrm>
+          <a:prstGeom prst="rect">
+            <a:avLst/>
+          </a:prstGeom>
+          <a:noFill/>
+        </p:spPr>
+        <p:txBody>
+          <a:bodyPr wrap="square">
+            <a:spAutoFit/>
+          </a:bodyPr>
+          <a:lstStyle/>
+          <a:p>
+            <a:pPr algn="l"/>
+            <a:r>
+              <a:rPr sz="1100" b="0">
+                <a:solidFill>
+                  <a:srgbClr val="1F61AA"/>
+                </a:solidFill>
+              </a:rPr>
+              <a:t>~£175k / year</a:t>
+            </a:r>
+          </a:p>
+        </p:txBody>
+      </p:sp>
+      <p:sp>
+        <p:nvSpPr>
+          <p:cNvPr id="34" name="TextBox 33"/>
+          <p:cNvSpPr txBox="1"/>
+          <p:nvPr/>
+        </p:nvSpPr>
+        <p:spPr>
+          <a:xfrm>
+            <a:off x="7772400" y="5047488"/>
+            <a:ext cx="3931920" cy="256032"/>
+          </a:xfrm>
+          <a:prstGeom prst="rect">
+            <a:avLst/>
+          </a:prstGeom>
+          <a:noFill/>
+        </p:spPr>
+        <p:txBody>
+          <a:bodyPr wrap="square">
+            <a:spAutoFit/>
+          </a:bodyPr>
+          <a:lstStyle/>
+          <a:p>
+            <a:pPr algn="l"/>
+            <a:r>
+              <a:rPr sz="1100" b="1">
+                <a:solidFill>
+                  <a:srgbClr val="1A2E44"/>
+                </a:solidFill>
+              </a:rPr>
+              <a:t>Build cost estimate</a:t>
+            </a:r>
+          </a:p>
+        </p:txBody>
+      </p:sp>
+      <p:sp>
+        <p:nvSpPr>
+          <p:cNvPr id="35" name="TextBox 34"/>
+          <p:cNvSpPr txBox="1"/>
+          <p:nvPr/>
+        </p:nvSpPr>
+        <p:spPr>
+          <a:xfrm>
+            <a:off x="7772400" y="5321808"/>
+            <a:ext cx="3931920" cy="384048"/>
+          </a:xfrm>
+          <a:prstGeom prst="rect">
+            <a:avLst/>
+          </a:prstGeom>
+          <a:noFill/>
+        </p:spPr>
+        <p:txBody>
+          <a:bodyPr wrap="square">
+            <a:spAutoFit/>
+          </a:bodyPr>
+          <a:lstStyle/>
+          <a:p>
+            <a:pPr algn="l"/>
+            <a:r>
+              <a:rPr sz="1100" b="0">
+                <a:solidFill>
+                  <a:srgbClr val="1F61AA"/>
+                </a:solidFill>
+              </a:rPr>
+              <a:t>~£100k</a:t>
+            </a:r>
+          </a:p>
+        </p:txBody>
+      </p:sp>
+      <p:sp>
+        <p:nvSpPr>
+          <p:cNvPr id="36" name="TextBox 35"/>
+          <p:cNvSpPr txBox="1"/>
+          <p:nvPr/>
+        </p:nvSpPr>
+        <p:spPr>
+          <a:xfrm>
+            <a:off x="7772400" y="5779008"/>
+            <a:ext cx="3931920" cy="256032"/>
+          </a:xfrm>
+          <a:prstGeom prst="rect">
+            <a:avLst/>
+          </a:prstGeom>
+          <a:noFill/>
+        </p:spPr>
+        <p:txBody>
+          <a:bodyPr wrap="square">
+            <a:spAutoFit/>
+          </a:bodyPr>
+          <a:lstStyle/>
+          <a:p>
+            <a:pPr algn="l"/>
+            <a:r>
+              <a:rPr sz="1100" b="1">
+                <a:solidFill>
+                  <a:srgbClr val="1A2E44"/>
+                </a:solidFill>
+              </a:rPr>
+              <a:t>Payback period</a:t>
+            </a:r>
+          </a:p>
+        </p:txBody>
+      </p:sp>
+      <p:sp>
+        <p:nvSpPr>
+          <p:cNvPr id="37" name="TextBox 36"/>
+          <p:cNvSpPr txBox="1"/>
+          <p:nvPr/>
+        </p:nvSpPr>
+        <p:spPr>
+          <a:xfrm>
+            <a:off x="7772400" y="6053328"/>
+            <a:ext cx="3931920" cy="384048"/>
+          </a:xfrm>
+          <a:prstGeom prst="rect">
+            <a:avLst/>
+          </a:prstGeom>
+          <a:noFill/>
+        </p:spPr>
+        <p:txBody>
+          <a:bodyPr wrap="square">
+            <a:spAutoFit/>
+          </a:bodyPr>
+          <a:lstStyle/>
+          <a:p>
+            <a:pPr algn="l"/>
+            <a:r>
+              <a:rPr sz="1100" b="0">
+                <a:solidFill>
+                  <a:srgbClr val="1F61AA"/>
+                </a:solidFill>
+              </a:rPr>
+              <a:t>~7 months</a:t>
+            </a:r>
+          </a:p>
+        </p:txBody>
+      </p:sp>
+      <p:sp>
+        <p:nvSpPr>
+          <p:cNvPr id="38" name="TextBox 37"/>
+          <p:cNvSpPr txBox="1"/>
+          <p:nvPr/>
+        </p:nvSpPr>
+        <p:spPr>
+          <a:xfrm>
+            <a:off x="513019" y="6080760"/>
+            <a:ext cx="11430000" cy="256032"/>
+          </a:xfrm>
+          <a:prstGeom prst="rect">
+            <a:avLst/>
+          </a:prstGeom>
+          <a:noFill/>
+        </p:spPr>
+        <p:txBody>
+          <a:bodyPr wrap="square">
+            <a:spAutoFit/>
+          </a:bodyPr>
+          <a:lstStyle/>
+          <a:p>
+            <a:pPr algn="l"/>
+            <a:r>
+              <a:rPr sz="900" b="0" dirty="0">
+                <a:solidFill>
+                  <a:srgbClr val="444444"/>
+                </a:solidFill>
+              </a:rPr>
+              <a:t>*WS3 plots in Q1 by score but is excluded — dispatch console has no confirmed programmatic interface (D3 §1)</a:t>
+            </a:r>
+          </a:p>
+        </p:txBody>
+      </p:sp>
+      <p:sp>
+        <p:nvSpPr>
+          <p:cNvPr id="39" name="TextBox 38"/>
           <p:cNvSpPr txBox="1"/>
           <p:nvPr/>
         </p:nvSpPr>
@@ -8476,7 +10340,7 @@
 </file>
 
 <file path=ppt/slides/slide5.xml><?xml version="1.0" encoding="utf-8"?>
-<p:sld xmlns:a="http://schemas.openxmlformats.org/drawingml/2006/main" xmlns:p="http://schemas.openxmlformats.org/presentationml/2006/main" xmlns:r="http://schemas.openxmlformats.org/officeDocument/2006/relationships">
+<p:sld xmlns:a="http://schemas.openxmlformats.org/drawingml/2006/main" xmlns:r="http://schemas.openxmlformats.org/officeDocument/2006/relationships" xmlns:p="http://schemas.openxmlformats.org/presentationml/2006/main">
   <p:cSld>
     <p:bg>
       <p:bgPr>
@@ -8492,7 +10356,14 @@
         <p:cNvGrpSpPr/>
         <p:nvPr/>
       </p:nvGrpSpPr>
-      <p:grpSpPr/>
+      <p:grpSpPr>
+        <a:xfrm>
+          <a:off x="0" y="0"/>
+          <a:ext cx="0" cy="0"/>
+          <a:chOff x="0" y="0"/>
+          <a:chExt cx="0" cy="0"/>
+        </a:xfrm>
+      </p:grpSpPr>
       <p:sp>
         <p:nvSpPr>
           <p:cNvPr id="2" name="Rectangle 1"/>
@@ -8529,7 +10400,7 @@
           </a:fontRef>
         </p:style>
         <p:txBody>
-          <a:bodyPr rtlCol="0" anchor="ctr" wrap="square" lIns="274320" tIns="164592"/>
+          <a:bodyPr wrap="square" lIns="274320" tIns="164592" rtlCol="0" anchor="ctr"/>
           <a:lstStyle/>
           <a:p>
             <a:pPr algn="l"/>
@@ -8539,21 +10410,225 @@
                   <a:srgbClr val="FFFFFF"/>
                 </a:solidFill>
               </a:rPr>
-              <a:t>How the Work Actually Flows Today</a:t>
-            </a:r>
-          </a:p>
-        </p:txBody>
-      </p:sp>
-      <p:sp>
-        <p:nvSpPr>
-          <p:cNvPr id="3" name="Rectangle 2"/>
+              <a:t>Why We Are Here — The Business Problem</a:t>
+            </a:r>
+          </a:p>
+        </p:txBody>
+      </p:sp>
+      <p:sp>
+        <p:nvSpPr>
+          <p:cNvPr id="3" name="TextBox 2"/>
+          <p:cNvSpPr txBox="1"/>
+          <p:nvPr/>
+        </p:nvSpPr>
+        <p:spPr>
+          <a:xfrm>
+            <a:off x="548640" y="1508760"/>
+            <a:ext cx="11064240" cy="347472"/>
+          </a:xfrm>
+          <a:prstGeom prst="rect">
+            <a:avLst/>
+          </a:prstGeom>
+          <a:noFill/>
+        </p:spPr>
+        <p:txBody>
+          <a:bodyPr wrap="square">
+            <a:spAutoFit/>
+          </a:bodyPr>
+          <a:lstStyle/>
+          <a:p>
+            <a:pPr algn="l"/>
+            <a:r>
+              <a:rPr sz="1600" b="1">
+                <a:solidFill>
+                  <a:srgbClr val="1A2E44"/>
+                </a:solidFill>
+              </a:rPr>
+              <a:t>60 billing disputes per day at 28 min each</a:t>
+            </a:r>
+          </a:p>
+        </p:txBody>
+      </p:sp>
+      <p:sp>
+        <p:nvSpPr>
+          <p:cNvPr id="4" name="TextBox 3"/>
+          <p:cNvSpPr txBox="1"/>
+          <p:nvPr/>
+        </p:nvSpPr>
+        <p:spPr>
+          <a:xfrm>
+            <a:off x="822960" y="1856232"/>
+            <a:ext cx="10789920" cy="384048"/>
+          </a:xfrm>
+          <a:prstGeom prst="rect">
+            <a:avLst/>
+          </a:prstGeom>
+          <a:noFill/>
+        </p:spPr>
+        <p:txBody>
+          <a:bodyPr wrap="square">
+            <a:spAutoFit/>
+          </a:bodyPr>
+          <a:lstStyle/>
+          <a:p>
+            <a:pPr algn="l"/>
+            <a:r>
+              <a:rPr sz="1400" b="0">
+                <a:solidFill>
+                  <a:srgbClr val="444444"/>
+                </a:solidFill>
+              </a:rPr>
+              <a:t>Highest handle time in Customer Operations — absorbing 1,600+ minutes of skilled agent time daily with no structured support</a:t>
+            </a:r>
+          </a:p>
+        </p:txBody>
+      </p:sp>
+      <p:sp>
+        <p:nvSpPr>
+          <p:cNvPr id="5" name="TextBox 4"/>
+          <p:cNvSpPr txBox="1"/>
+          <p:nvPr/>
+        </p:nvSpPr>
+        <p:spPr>
+          <a:xfrm>
+            <a:off x="548640" y="2359152"/>
+            <a:ext cx="11064240" cy="347472"/>
+          </a:xfrm>
+          <a:prstGeom prst="rect">
+            <a:avLst/>
+          </a:prstGeom>
+          <a:noFill/>
+        </p:spPr>
+        <p:txBody>
+          <a:bodyPr wrap="square">
+            <a:spAutoFit/>
+          </a:bodyPr>
+          <a:lstStyle/>
+          <a:p>
+            <a:pPr algn="l"/>
+            <a:r>
+              <a:rPr sz="1600" b="1">
+                <a:solidFill>
+                  <a:srgbClr val="1A2E44"/>
+                </a:solidFill>
+              </a:rPr>
+              <a:t>Credits applied without an audit trail</a:t>
+            </a:r>
+          </a:p>
+        </p:txBody>
+      </p:sp>
+      <p:sp>
+        <p:nvSpPr>
+          <p:cNvPr id="6" name="TextBox 5"/>
+          <p:cNvSpPr txBox="1"/>
+          <p:nvPr/>
+        </p:nvSpPr>
+        <p:spPr>
+          <a:xfrm>
+            <a:off x="822960" y="2706624"/>
+            <a:ext cx="10789920" cy="384048"/>
+          </a:xfrm>
+          <a:prstGeom prst="rect">
+            <a:avLst/>
+          </a:prstGeom>
+          <a:noFill/>
+        </p:spPr>
+        <p:txBody>
+          <a:bodyPr wrap="square">
+            <a:spAutoFit/>
+          </a:bodyPr>
+          <a:lstStyle/>
+          <a:p>
+            <a:pPr algn="l"/>
+            <a:r>
+              <a:rPr sz="1400" b="0">
+                <a:solidFill>
+                  <a:srgbClr val="444444"/>
+                </a:solidFill>
+              </a:rPr>
+              <a:t>Live case records show at least one £170 credit applied with no named approver and no audit log entry (Artefact 2, D3)</a:t>
+            </a:r>
+          </a:p>
+        </p:txBody>
+      </p:sp>
+      <p:sp>
+        <p:nvSpPr>
+          <p:cNvPr id="7" name="TextBox 6"/>
+          <p:cNvSpPr txBox="1"/>
+          <p:nvPr/>
+        </p:nvSpPr>
+        <p:spPr>
+          <a:xfrm>
+            <a:off x="548640" y="3209544"/>
+            <a:ext cx="11064240" cy="347472"/>
+          </a:xfrm>
+          <a:prstGeom prst="rect">
+            <a:avLst/>
+          </a:prstGeom>
+          <a:noFill/>
+        </p:spPr>
+        <p:txBody>
+          <a:bodyPr wrap="square">
+            <a:spAutoFit/>
+          </a:bodyPr>
+          <a:lstStyle/>
+          <a:p>
+            <a:pPr algn="l"/>
+            <a:r>
+              <a:rPr sz="1600" b="1">
+                <a:solidFill>
+                  <a:srgbClr val="1A2E44"/>
+                </a:solidFill>
+              </a:rPr>
+              <a:t>Competitor benchmark: £1.2M annualised saving</a:t>
+            </a:r>
+          </a:p>
+        </p:txBody>
+      </p:sp>
+      <p:sp>
+        <p:nvSpPr>
+          <p:cNvPr id="8" name="TextBox 7"/>
+          <p:cNvSpPr txBox="1"/>
+          <p:nvPr/>
+        </p:nvSpPr>
+        <p:spPr>
+          <a:xfrm>
+            <a:off x="822960" y="3557016"/>
+            <a:ext cx="10789920" cy="384048"/>
+          </a:xfrm>
+          <a:prstGeom prst="rect">
+            <a:avLst/>
+          </a:prstGeom>
+          <a:noFill/>
+        </p:spPr>
+        <p:txBody>
+          <a:bodyPr wrap="square">
+            <a:spAutoFit/>
+          </a:bodyPr>
+          <a:lstStyle/>
+          <a:p>
+            <a:pPr algn="l"/>
+            <a:r>
+              <a:rPr sz="1400" b="0">
+                <a:solidFill>
+                  <a:srgbClr val="444444"/>
+                </a:solidFill>
+              </a:rPr>
+              <a:t>CEO has asked whether Apex can achieve something comparable (scenario_context.md)</a:t>
+            </a:r>
+          </a:p>
+        </p:txBody>
+      </p:sp>
+      <p:sp>
+        <p:nvSpPr>
+          <p:cNvPr id="9" name="Rectangle 8"/>
           <p:cNvSpPr/>
           <p:nvPr/>
         </p:nvSpPr>
         <p:spPr>
           <a:xfrm>
-            <a:off x="457200" y="1417320"/>
-            <a:ext cx="11155680" cy="502920"/>
+            <a:off x="365760" y="5120640"/>
+            <a:ext cx="11155680" cy="822960"/>
           </a:xfrm>
           <a:prstGeom prst="rect">
             <a:avLst/>
@@ -8563,7 +10638,7 @@
           </a:solidFill>
           <a:ln>
             <a:solidFill>
-              <a:srgbClr val="CCDDEE"/>
+              <a:srgbClr val="1F61AA"/>
             </a:solidFill>
           </a:ln>
         </p:spPr>
@@ -8586,19 +10661,20 @@
           <a:lstStyle/>
           <a:p>
             <a:pPr algn="ctr"/>
-          </a:p>
-        </p:txBody>
-      </p:sp>
-      <p:sp>
-        <p:nvSpPr>
-          <p:cNvPr id="4" name="TextBox 3"/>
+            <a:endParaRPr/>
+          </a:p>
+        </p:txBody>
+      </p:sp>
+      <p:sp>
+        <p:nvSpPr>
+          <p:cNvPr id="10" name="TextBox 9"/>
           <p:cNvSpPr txBox="1"/>
           <p:nvPr/>
         </p:nvSpPr>
         <p:spPr>
           <a:xfrm>
-            <a:off x="566928" y="1472184"/>
-            <a:ext cx="10927080" cy="411480"/>
+            <a:off x="502920" y="5166360"/>
+            <a:ext cx="10972800" cy="749808"/>
           </a:xfrm>
           <a:prstGeom prst="rect">
             <a:avLst/>
@@ -8618,233 +10694,7 @@
                   <a:srgbClr val="1A2E44"/>
                 </a:solidFill>
               </a:rPr>
-              <a:t>Customer emails billing@ with disputed charge</a:t>
-            </a:r>
-          </a:p>
-        </p:txBody>
-      </p:sp>
-      <p:sp>
-        <p:nvSpPr>
-          <p:cNvPr id="5" name="TextBox 4"/>
-          <p:cNvSpPr txBox="1"/>
-          <p:nvPr/>
-        </p:nvSpPr>
-        <p:spPr>
-          <a:xfrm>
-            <a:off x="5852160" y="1920240"/>
-            <a:ext cx="457200" cy="228600"/>
-          </a:xfrm>
-          <a:prstGeom prst="rect">
-            <a:avLst/>
-          </a:prstGeom>
-          <a:noFill/>
-        </p:spPr>
-        <p:txBody>
-          <a:bodyPr wrap="square">
-            <a:spAutoFit/>
-          </a:bodyPr>
-          <a:lstStyle/>
-          <a:p>
-            <a:pPr algn="ctr"/>
-            <a:r>
-              <a:rPr sz="1400" b="0">
-                <a:solidFill>
-                  <a:srgbClr val="1F61AA"/>
-                </a:solidFill>
-              </a:rPr>
-              <a:t>↓</a:t>
-            </a:r>
-          </a:p>
-        </p:txBody>
-      </p:sp>
-      <p:sp>
-        <p:nvSpPr>
-          <p:cNvPr id="6" name="Rectangle 5"/>
-          <p:cNvSpPr/>
-          <p:nvPr/>
-        </p:nvSpPr>
-        <p:spPr>
-          <a:xfrm>
-            <a:off x="457200" y="2148840"/>
-            <a:ext cx="11155680" cy="502920"/>
-          </a:xfrm>
-          <a:prstGeom prst="rect">
-            <a:avLst/>
-          </a:prstGeom>
-          <a:solidFill>
-            <a:srgbClr val="FFFFFF"/>
-          </a:solidFill>
-          <a:ln>
-            <a:solidFill>
-              <a:srgbClr val="CCDDEE"/>
-            </a:solidFill>
-          </a:ln>
-        </p:spPr>
-        <p:style>
-          <a:lnRef idx="1">
-            <a:schemeClr val="accent1"/>
-          </a:lnRef>
-          <a:fillRef idx="3">
-            <a:schemeClr val="accent1"/>
-          </a:fillRef>
-          <a:effectRef idx="2">
-            <a:schemeClr val="accent1"/>
-          </a:effectRef>
-          <a:fontRef idx="minor">
-            <a:schemeClr val="lt1"/>
-          </a:fontRef>
-        </p:style>
-        <p:txBody>
-          <a:bodyPr rtlCol="0" anchor="ctr"/>
-          <a:lstStyle/>
-          <a:p>
-            <a:pPr algn="ctr"/>
-          </a:p>
-        </p:txBody>
-      </p:sp>
-      <p:sp>
-        <p:nvSpPr>
-          <p:cNvPr id="7" name="TextBox 6"/>
-          <p:cNvSpPr txBox="1"/>
-          <p:nvPr/>
-        </p:nvSpPr>
-        <p:spPr>
-          <a:xfrm>
-            <a:off x="566928" y="2203704"/>
-            <a:ext cx="10927080" cy="411480"/>
-          </a:xfrm>
-          <a:prstGeom prst="rect">
-            <a:avLst/>
-          </a:prstGeom>
-          <a:noFill/>
-        </p:spPr>
-        <p:txBody>
-          <a:bodyPr wrap="square">
-            <a:spAutoFit/>
-          </a:bodyPr>
-          <a:lstStyle/>
-          <a:p>
-            <a:pPr algn="l"/>
-            <a:r>
-              <a:rPr sz="1300" b="0">
-                <a:solidFill>
-                  <a:srgbClr val="1A2E44"/>
-                </a:solidFill>
-              </a:rPr>
-              <a:t>Agent opens CRM → manually retrieves Aurum invoice data (avg 9 days to resolution — Artefact 2)</a:t>
-            </a:r>
-          </a:p>
-        </p:txBody>
-      </p:sp>
-      <p:sp>
-        <p:nvSpPr>
-          <p:cNvPr id="8" name="TextBox 7"/>
-          <p:cNvSpPr txBox="1"/>
-          <p:nvPr/>
-        </p:nvSpPr>
-        <p:spPr>
-          <a:xfrm>
-            <a:off x="5852160" y="2651760"/>
-            <a:ext cx="457200" cy="228600"/>
-          </a:xfrm>
-          <a:prstGeom prst="rect">
-            <a:avLst/>
-          </a:prstGeom>
-          <a:noFill/>
-        </p:spPr>
-        <p:txBody>
-          <a:bodyPr wrap="square">
-            <a:spAutoFit/>
-          </a:bodyPr>
-          <a:lstStyle/>
-          <a:p>
-            <a:pPr algn="ctr"/>
-            <a:r>
-              <a:rPr sz="1400" b="0">
-                <a:solidFill>
-                  <a:srgbClr val="1F61AA"/>
-                </a:solidFill>
-              </a:rPr>
-              <a:t>↓</a:t>
-            </a:r>
-          </a:p>
-        </p:txBody>
-      </p:sp>
-      <p:sp>
-        <p:nvSpPr>
-          <p:cNvPr id="9" name="Rectangle 8"/>
-          <p:cNvSpPr/>
-          <p:nvPr/>
-        </p:nvSpPr>
-        <p:spPr>
-          <a:xfrm>
-            <a:off x="457200" y="2880360"/>
-            <a:ext cx="11155680" cy="502920"/>
-          </a:xfrm>
-          <a:prstGeom prst="rect">
-            <a:avLst/>
-          </a:prstGeom>
-          <a:solidFill>
-            <a:srgbClr val="E8F1FB"/>
-          </a:solidFill>
-          <a:ln>
-            <a:solidFill>
-              <a:srgbClr val="CCDDEE"/>
-            </a:solidFill>
-          </a:ln>
-        </p:spPr>
-        <p:style>
-          <a:lnRef idx="1">
-            <a:schemeClr val="accent1"/>
-          </a:lnRef>
-          <a:fillRef idx="3">
-            <a:schemeClr val="accent1"/>
-          </a:fillRef>
-          <a:effectRef idx="2">
-            <a:schemeClr val="accent1"/>
-          </a:effectRef>
-          <a:fontRef idx="minor">
-            <a:schemeClr val="lt1"/>
-          </a:fontRef>
-        </p:style>
-        <p:txBody>
-          <a:bodyPr rtlCol="0" anchor="ctr"/>
-          <a:lstStyle/>
-          <a:p>
-            <a:pPr algn="ctr"/>
-          </a:p>
-        </p:txBody>
-      </p:sp>
-      <p:sp>
-        <p:nvSpPr>
-          <p:cNvPr id="10" name="TextBox 9"/>
-          <p:cNvSpPr txBox="1"/>
-          <p:nvPr/>
-        </p:nvSpPr>
-        <p:spPr>
-          <a:xfrm>
-            <a:off x="566928" y="2935224"/>
-            <a:ext cx="10927080" cy="411480"/>
-          </a:xfrm>
-          <a:prstGeom prst="rect">
-            <a:avLst/>
-          </a:prstGeom>
-          <a:noFill/>
-        </p:spPr>
-        <p:txBody>
-          <a:bodyPr wrap="square">
-            <a:spAutoFit/>
-          </a:bodyPr>
-          <a:lstStyle/>
-          <a:p>
-            <a:pPr algn="l"/>
-            <a:r>
-              <a:rPr sz="1300" b="0">
-                <a:solidFill>
-                  <a:srgbClr val="1A2E44"/>
-                </a:solidFill>
-              </a:rPr>
-              <a:t>Agent assesses whether the charge is valid — no formal policy to check against</a:t>
+              <a:t>Assessment question: Can a targeted agent reduce dispute handling time, close the compliance gap, and give Apex an auditable trace of every credit decision — without repeating the failures of 2024?</a:t>
             </a:r>
           </a:p>
         </p:txBody>
@@ -8852,345 +10702,6 @@
       <p:sp>
         <p:nvSpPr>
           <p:cNvPr id="11" name="TextBox 10"/>
-          <p:cNvSpPr txBox="1"/>
-          <p:nvPr/>
-        </p:nvSpPr>
-        <p:spPr>
-          <a:xfrm>
-            <a:off x="5852160" y="3383280"/>
-            <a:ext cx="457200" cy="228600"/>
-          </a:xfrm>
-          <a:prstGeom prst="rect">
-            <a:avLst/>
-          </a:prstGeom>
-          <a:noFill/>
-        </p:spPr>
-        <p:txBody>
-          <a:bodyPr wrap="square">
-            <a:spAutoFit/>
-          </a:bodyPr>
-          <a:lstStyle/>
-          <a:p>
-            <a:pPr algn="ctr"/>
-            <a:r>
-              <a:rPr sz="1400" b="0">
-                <a:solidFill>
-                  <a:srgbClr val="1F61AA"/>
-                </a:solidFill>
-              </a:rPr>
-              <a:t>↓</a:t>
-            </a:r>
-          </a:p>
-        </p:txBody>
-      </p:sp>
-      <p:sp>
-        <p:nvSpPr>
-          <p:cNvPr id="12" name="Rectangle 11"/>
-          <p:cNvSpPr/>
-          <p:nvPr/>
-        </p:nvSpPr>
-        <p:spPr>
-          <a:xfrm>
-            <a:off x="457200" y="3611880"/>
-            <a:ext cx="11155680" cy="502920"/>
-          </a:xfrm>
-          <a:prstGeom prst="rect">
-            <a:avLst/>
-          </a:prstGeom>
-          <a:solidFill>
-            <a:srgbClr val="FFFFFF"/>
-          </a:solidFill>
-          <a:ln>
-            <a:solidFill>
-              <a:srgbClr val="CCDDEE"/>
-            </a:solidFill>
-          </a:ln>
-        </p:spPr>
-        <p:style>
-          <a:lnRef idx="1">
-            <a:schemeClr val="accent1"/>
-          </a:lnRef>
-          <a:fillRef idx="3">
-            <a:schemeClr val="accent1"/>
-          </a:fillRef>
-          <a:effectRef idx="2">
-            <a:schemeClr val="accent1"/>
-          </a:effectRef>
-          <a:fontRef idx="minor">
-            <a:schemeClr val="lt1"/>
-          </a:fontRef>
-        </p:style>
-        <p:txBody>
-          <a:bodyPr rtlCol="0" anchor="ctr"/>
-          <a:lstStyle/>
-          <a:p>
-            <a:pPr algn="ctr"/>
-          </a:p>
-        </p:txBody>
-      </p:sp>
-      <p:sp>
-        <p:nvSpPr>
-          <p:cNvPr id="13" name="TextBox 12"/>
-          <p:cNvSpPr txBox="1"/>
-          <p:nvPr/>
-        </p:nvSpPr>
-        <p:spPr>
-          <a:xfrm>
-            <a:off x="566928" y="3666744"/>
-            <a:ext cx="10927080" cy="411480"/>
-          </a:xfrm>
-          <a:prstGeom prst="rect">
-            <a:avLst/>
-          </a:prstGeom>
-          <a:noFill/>
-        </p:spPr>
-        <p:txBody>
-          <a:bodyPr wrap="square">
-            <a:spAutoFit/>
-          </a:bodyPr>
-          <a:lstStyle/>
-          <a:p>
-            <a:pPr algn="l"/>
-            <a:r>
-              <a:rPr sz="1300" b="0">
-                <a:solidFill>
-                  <a:srgbClr val="1A2E44"/>
-                </a:solidFill>
-              </a:rPr>
-              <a:t>Agent decides credit amount from experience (e.g. £170 on £340 dispute) — Sandra's heuristic, not an approved rule</a:t>
-            </a:r>
-          </a:p>
-        </p:txBody>
-      </p:sp>
-      <p:sp>
-        <p:nvSpPr>
-          <p:cNvPr id="14" name="TextBox 13"/>
-          <p:cNvSpPr txBox="1"/>
-          <p:nvPr/>
-        </p:nvSpPr>
-        <p:spPr>
-          <a:xfrm>
-            <a:off x="5852160" y="4114800"/>
-            <a:ext cx="457200" cy="228600"/>
-          </a:xfrm>
-          <a:prstGeom prst="rect">
-            <a:avLst/>
-          </a:prstGeom>
-          <a:noFill/>
-        </p:spPr>
-        <p:txBody>
-          <a:bodyPr wrap="square">
-            <a:spAutoFit/>
-          </a:bodyPr>
-          <a:lstStyle/>
-          <a:p>
-            <a:pPr algn="ctr"/>
-            <a:r>
-              <a:rPr sz="1400" b="0">
-                <a:solidFill>
-                  <a:srgbClr val="1F61AA"/>
-                </a:solidFill>
-              </a:rPr>
-              <a:t>↓</a:t>
-            </a:r>
-          </a:p>
-        </p:txBody>
-      </p:sp>
-      <p:sp>
-        <p:nvSpPr>
-          <p:cNvPr id="15" name="Rectangle 14"/>
-          <p:cNvSpPr/>
-          <p:nvPr/>
-        </p:nvSpPr>
-        <p:spPr>
-          <a:xfrm>
-            <a:off x="457200" y="4343400"/>
-            <a:ext cx="11155680" cy="502920"/>
-          </a:xfrm>
-          <a:prstGeom prst="rect">
-            <a:avLst/>
-          </a:prstGeom>
-          <a:solidFill>
-            <a:srgbClr val="E8F1FB"/>
-          </a:solidFill>
-          <a:ln>
-            <a:solidFill>
-              <a:srgbClr val="CCDDEE"/>
-            </a:solidFill>
-          </a:ln>
-        </p:spPr>
-        <p:style>
-          <a:lnRef idx="1">
-            <a:schemeClr val="accent1"/>
-          </a:lnRef>
-          <a:fillRef idx="3">
-            <a:schemeClr val="accent1"/>
-          </a:fillRef>
-          <a:effectRef idx="2">
-            <a:schemeClr val="accent1"/>
-          </a:effectRef>
-          <a:fontRef idx="minor">
-            <a:schemeClr val="lt1"/>
-          </a:fontRef>
-        </p:style>
-        <p:txBody>
-          <a:bodyPr rtlCol="0" anchor="ctr"/>
-          <a:lstStyle/>
-          <a:p>
-            <a:pPr algn="ctr"/>
-          </a:p>
-        </p:txBody>
-      </p:sp>
-      <p:sp>
-        <p:nvSpPr>
-          <p:cNvPr id="16" name="TextBox 15"/>
-          <p:cNvSpPr txBox="1"/>
-          <p:nvPr/>
-        </p:nvSpPr>
-        <p:spPr>
-          <a:xfrm>
-            <a:off x="566928" y="4398264"/>
-            <a:ext cx="10927080" cy="411480"/>
-          </a:xfrm>
-          <a:prstGeom prst="rect">
-            <a:avLst/>
-          </a:prstGeom>
-          <a:noFill/>
-        </p:spPr>
-        <p:txBody>
-          <a:bodyPr wrap="square">
-            <a:spAutoFit/>
-          </a:bodyPr>
-          <a:lstStyle/>
-          <a:p>
-            <a:pPr algn="l"/>
-            <a:r>
-              <a:rPr sz="1300" b="0">
-                <a:solidFill>
-                  <a:srgbClr val="1A2E44"/>
-                </a:solidFill>
-              </a:rPr>
-              <a:t>Agent applies credit via manual override — no audit log entry recorded</a:t>
-            </a:r>
-          </a:p>
-        </p:txBody>
-      </p:sp>
-      <p:sp>
-        <p:nvSpPr>
-          <p:cNvPr id="17" name="TextBox 16"/>
-          <p:cNvSpPr txBox="1"/>
-          <p:nvPr/>
-        </p:nvSpPr>
-        <p:spPr>
-          <a:xfrm>
-            <a:off x="5852160" y="4846320"/>
-            <a:ext cx="457200" cy="228600"/>
-          </a:xfrm>
-          <a:prstGeom prst="rect">
-            <a:avLst/>
-          </a:prstGeom>
-          <a:noFill/>
-        </p:spPr>
-        <p:txBody>
-          <a:bodyPr wrap="square">
-            <a:spAutoFit/>
-          </a:bodyPr>
-          <a:lstStyle/>
-          <a:p>
-            <a:pPr algn="ctr"/>
-            <a:r>
-              <a:rPr sz="1400" b="0">
-                <a:solidFill>
-                  <a:srgbClr val="1F61AA"/>
-                </a:solidFill>
-              </a:rPr>
-              <a:t>↓</a:t>
-            </a:r>
-          </a:p>
-        </p:txBody>
-      </p:sp>
-      <p:sp>
-        <p:nvSpPr>
-          <p:cNvPr id="18" name="Rectangle 17"/>
-          <p:cNvSpPr/>
-          <p:nvPr/>
-        </p:nvSpPr>
-        <p:spPr>
-          <a:xfrm>
-            <a:off x="457200" y="5074920"/>
-            <a:ext cx="11155680" cy="502920"/>
-          </a:xfrm>
-          <a:prstGeom prst="rect">
-            <a:avLst/>
-          </a:prstGeom>
-          <a:solidFill>
-            <a:srgbClr val="FFFFFF"/>
-          </a:solidFill>
-          <a:ln>
-            <a:solidFill>
-              <a:srgbClr val="CCDDEE"/>
-            </a:solidFill>
-          </a:ln>
-        </p:spPr>
-        <p:style>
-          <a:lnRef idx="1">
-            <a:schemeClr val="accent1"/>
-          </a:lnRef>
-          <a:fillRef idx="3">
-            <a:schemeClr val="accent1"/>
-          </a:fillRef>
-          <a:effectRef idx="2">
-            <a:schemeClr val="accent1"/>
-          </a:effectRef>
-          <a:fontRef idx="minor">
-            <a:schemeClr val="lt1"/>
-          </a:fontRef>
-        </p:style>
-        <p:txBody>
-          <a:bodyPr rtlCol="0" anchor="ctr"/>
-          <a:lstStyle/>
-          <a:p>
-            <a:pPr algn="ctr"/>
-          </a:p>
-        </p:txBody>
-      </p:sp>
-      <p:sp>
-        <p:nvSpPr>
-          <p:cNvPr id="19" name="TextBox 18"/>
-          <p:cNvSpPr txBox="1"/>
-          <p:nvPr/>
-        </p:nvSpPr>
-        <p:spPr>
-          <a:xfrm>
-            <a:off x="566928" y="5129784"/>
-            <a:ext cx="10927080" cy="411480"/>
-          </a:xfrm>
-          <a:prstGeom prst="rect">
-            <a:avLst/>
-          </a:prstGeom>
-          <a:noFill/>
-        </p:spPr>
-        <p:txBody>
-          <a:bodyPr wrap="square">
-            <a:spAutoFit/>
-          </a:bodyPr>
-          <a:lstStyle/>
-          <a:p>
-            <a:pPr algn="l"/>
-            <a:r>
-              <a:rPr sz="1300" b="0">
-                <a:solidFill>
-                  <a:srgbClr val="1A2E44"/>
-                </a:solidFill>
-              </a:rPr>
-              <a:t>Customer receives credit on next statement — case closed informally</a:t>
-            </a:r>
-          </a:p>
-        </p:txBody>
-      </p:sp>
-      <p:sp>
-        <p:nvSpPr>
-          <p:cNvPr id="20" name="TextBox 19"/>
           <p:cNvSpPr txBox="1"/>
           <p:nvPr/>
         </p:nvSpPr>
@@ -9231,7 +10742,7 @@
 </file>
 
 <file path=ppt/slides/slide6.xml><?xml version="1.0" encoding="utf-8"?>
-<p:sld xmlns:a="http://schemas.openxmlformats.org/drawingml/2006/main" xmlns:p="http://schemas.openxmlformats.org/presentationml/2006/main" xmlns:r="http://schemas.openxmlformats.org/officeDocument/2006/relationships">
+<p:sld xmlns:a="http://schemas.openxmlformats.org/drawingml/2006/main" xmlns:r="http://schemas.openxmlformats.org/officeDocument/2006/relationships" xmlns:p="http://schemas.openxmlformats.org/presentationml/2006/main">
   <p:cSld>
     <p:bg>
       <p:bgPr>
@@ -9247,7 +10758,14 @@
         <p:cNvGrpSpPr/>
         <p:nvPr/>
       </p:nvGrpSpPr>
-      <p:grpSpPr/>
+      <p:grpSpPr>
+        <a:xfrm>
+          <a:off x="0" y="0"/>
+          <a:ext cx="0" cy="0"/>
+          <a:chOff x="0" y="0"/>
+          <a:chExt cx="0" cy="0"/>
+        </a:xfrm>
+      </p:grpSpPr>
       <p:sp>
         <p:nvSpPr>
           <p:cNvPr id="2" name="Rectangle 1"/>
@@ -9284,7 +10802,7 @@
           </a:fontRef>
         </p:style>
         <p:txBody>
-          <a:bodyPr rtlCol="0" anchor="ctr" wrap="square" lIns="274320" tIns="164592"/>
+          <a:bodyPr wrap="square" lIns="274320" tIns="164592" rtlCol="0" anchor="ctr"/>
           <a:lstStyle/>
           <a:p>
             <a:pPr algn="l"/>
@@ -9294,7 +10812,7 @@
                   <a:srgbClr val="FFFFFF"/>
                 </a:solidFill>
               </a:rPr>
-              <a:t>Where Time Goes — The Cognitive Hotspots</a:t>
+              <a:t>How the Work Actually Flows Today</a:t>
             </a:r>
           </a:p>
         </p:txBody>
@@ -9307,17 +10825,19 @@
         </p:nvSpPr>
         <p:spPr>
           <a:xfrm>
-            <a:off x="274320" y="1499616"/>
-            <a:ext cx="109728" cy="457200"/>
+            <a:off x="457200" y="1417320"/>
+            <a:ext cx="11155680" cy="502920"/>
           </a:xfrm>
           <a:prstGeom prst="rect">
             <a:avLst/>
           </a:prstGeom>
           <a:solidFill>
-            <a:srgbClr val="1F61AA"/>
+            <a:srgbClr val="E8F1FB"/>
           </a:solidFill>
           <a:ln>
-            <a:noFill/>
+            <a:solidFill>
+              <a:srgbClr val="CCDDEE"/>
+            </a:solidFill>
           </a:ln>
         </p:spPr>
         <p:style>
@@ -9339,6 +10859,7 @@
           <a:lstStyle/>
           <a:p>
             <a:pPr algn="ctr"/>
+            <a:endParaRPr/>
           </a:p>
         </p:txBody>
       </p:sp>
@@ -9350,8 +10871,8 @@
         </p:nvSpPr>
         <p:spPr>
           <a:xfrm>
-            <a:off x="502920" y="1463040"/>
-            <a:ext cx="11064240" cy="384048"/>
+            <a:off x="566928" y="1472184"/>
+            <a:ext cx="10927080" cy="411480"/>
           </a:xfrm>
           <a:prstGeom prst="rect">
             <a:avLst/>
@@ -9366,12 +10887,12 @@
           <a:p>
             <a:pPr algn="l"/>
             <a:r>
-              <a:rPr sz="1500" b="1">
+              <a:rPr sz="1300" b="0">
                 <a:solidFill>
                   <a:srgbClr val="1A2E44"/>
                 </a:solidFill>
               </a:rPr>
-              <a:t>1. Assembling the evidence  (est. 10–12 min per case)</a:t>
+              <a:t>Customer emails billing@ with disputed charge</a:t>
             </a:r>
           </a:p>
         </p:txBody>
@@ -9384,8 +10905,8 @@
         </p:nvSpPr>
         <p:spPr>
           <a:xfrm>
-            <a:off x="502920" y="1847088"/>
-            <a:ext cx="11064240" cy="594360"/>
+            <a:off x="5852160" y="1920240"/>
+            <a:ext cx="457200" cy="228600"/>
           </a:xfrm>
           <a:prstGeom prst="rect">
             <a:avLst/>
@@ -9398,14 +10919,14 @@
           </a:bodyPr>
           <a:lstStyle/>
           <a:p>
-            <a:pPr algn="l"/>
-            <a:r>
-              <a:rPr sz="1200" b="0">
-                <a:solidFill>
-                  <a:srgbClr val="444444"/>
-                </a:solidFill>
-              </a:rPr>
-              <a:t>Sandra manually retrieves invoice data, surcharge details, and delivery records from separate systems — Aurum batch exports and the CRM — that do not talk to each other in real time. There is no single view of a dispute. Each case starts from scratch.  (D1 — WS4 Zone 1, Z2)</a:t>
+            <a:pPr algn="ctr"/>
+            <a:r>
+              <a:rPr sz="1400" b="0">
+                <a:solidFill>
+                  <a:srgbClr val="1F61AA"/>
+                </a:solidFill>
+              </a:rPr>
+              <a:t>↓</a:t>
             </a:r>
           </a:p>
         </p:txBody>
@@ -9418,17 +10939,19 @@
         </p:nvSpPr>
         <p:spPr>
           <a:xfrm>
-            <a:off x="274320" y="2596896"/>
-            <a:ext cx="109728" cy="457200"/>
+            <a:off x="457200" y="2148840"/>
+            <a:ext cx="11155680" cy="502920"/>
           </a:xfrm>
           <a:prstGeom prst="rect">
             <a:avLst/>
           </a:prstGeom>
           <a:solidFill>
-            <a:srgbClr val="FF9900"/>
+            <a:srgbClr val="FFFFFF"/>
           </a:solidFill>
           <a:ln>
-            <a:noFill/>
+            <a:solidFill>
+              <a:srgbClr val="CCDDEE"/>
+            </a:solidFill>
           </a:ln>
         </p:spPr>
         <p:style>
@@ -9450,6 +10973,7 @@
           <a:lstStyle/>
           <a:p>
             <a:pPr algn="ctr"/>
+            <a:endParaRPr/>
           </a:p>
         </p:txBody>
       </p:sp>
@@ -9461,8 +10985,8 @@
         </p:nvSpPr>
         <p:spPr>
           <a:xfrm>
-            <a:off x="502920" y="2560320"/>
-            <a:ext cx="11064240" cy="384048"/>
+            <a:off x="566928" y="2203704"/>
+            <a:ext cx="10927080" cy="411480"/>
           </a:xfrm>
           <a:prstGeom prst="rect">
             <a:avLst/>
@@ -9477,12 +11001,12 @@
           <a:p>
             <a:pPr algn="l"/>
             <a:r>
-              <a:rPr sz="1500" b="1">
+              <a:rPr sz="1300" b="0">
                 <a:solidFill>
                   <a:srgbClr val="1A2E44"/>
                 </a:solidFill>
               </a:rPr>
-              <a:t>2. Deciding the credit amount  (judgment call with no rule)</a:t>
+              <a:t>Agent opens CRM → manually retrieves Aurum invoice data (avg 9 days to resolution — Artefact 2)</a:t>
             </a:r>
           </a:p>
         </p:txBody>
@@ -9495,8 +11019,8 @@
         </p:nvSpPr>
         <p:spPr>
           <a:xfrm>
-            <a:off x="502920" y="2944368"/>
-            <a:ext cx="11064240" cy="594360"/>
+            <a:off x="5852160" y="2651760"/>
+            <a:ext cx="457200" cy="228600"/>
           </a:xfrm>
           <a:prstGeom prst="rect">
             <a:avLst/>
@@ -9509,14 +11033,14 @@
           </a:bodyPr>
           <a:lstStyle/>
           <a:p>
-            <a:pPr algn="l"/>
-            <a:r>
-              <a:rPr sz="1200" b="0">
-                <a:solidFill>
-                  <a:srgbClr val="444444"/>
-                </a:solidFill>
-              </a:rPr>
-              <a:t>No written policy exists for how much to credit. The observed practice — roughly 50% of the disputed amount — is Sandra's heuristic, not an approved rule. Different agents would reach different amounts for the same case.  (D1 — WS4 Zone 3, MT6; D2 — C-7 Human Only)</a:t>
+            <a:pPr algn="ctr"/>
+            <a:r>
+              <a:rPr sz="1400" b="0">
+                <a:solidFill>
+                  <a:srgbClr val="1F61AA"/>
+                </a:solidFill>
+              </a:rPr>
+              <a:t>↓</a:t>
             </a:r>
           </a:p>
         </p:txBody>
@@ -9529,17 +11053,19 @@
         </p:nvSpPr>
         <p:spPr>
           <a:xfrm>
-            <a:off x="274320" y="3694176"/>
-            <a:ext cx="109728" cy="457200"/>
+            <a:off x="457200" y="2880360"/>
+            <a:ext cx="11155680" cy="502920"/>
           </a:xfrm>
           <a:prstGeom prst="rect">
             <a:avLst/>
           </a:prstGeom>
           <a:solidFill>
-            <a:srgbClr val="CC0000"/>
+            <a:srgbClr val="E8F1FB"/>
           </a:solidFill>
           <a:ln>
-            <a:noFill/>
+            <a:solidFill>
+              <a:srgbClr val="CCDDEE"/>
+            </a:solidFill>
           </a:ln>
         </p:spPr>
         <p:style>
@@ -9561,6 +11087,7 @@
           <a:lstStyle/>
           <a:p>
             <a:pPr algn="ctr"/>
+            <a:endParaRPr/>
           </a:p>
         </p:txBody>
       </p:sp>
@@ -9572,8 +11099,8 @@
         </p:nvSpPr>
         <p:spPr>
           <a:xfrm>
-            <a:off x="502920" y="3657600"/>
-            <a:ext cx="11064240" cy="384048"/>
+            <a:off x="566928" y="2935224"/>
+            <a:ext cx="10927080" cy="411480"/>
           </a:xfrm>
           <a:prstGeom prst="rect">
             <a:avLst/>
@@ -9588,12 +11115,12 @@
           <a:p>
             <a:pPr algn="l"/>
             <a:r>
-              <a:rPr sz="1500" b="1">
+              <a:rPr sz="1300" b="0">
                 <a:solidFill>
                   <a:srgbClr val="1A2E44"/>
                 </a:solidFill>
               </a:rPr>
-              <a:t>3. Writing the credit record  (compliance step routinely skipped under pressure)</a:t>
+              <a:t>Agent assesses whether the charge is valid — no formal policy to check against</a:t>
             </a:r>
           </a:p>
         </p:txBody>
@@ -9606,8 +11133,8 @@
         </p:nvSpPr>
         <p:spPr>
           <a:xfrm>
-            <a:off x="502920" y="4041648"/>
-            <a:ext cx="11064240" cy="594360"/>
+            <a:off x="5852160" y="3383280"/>
+            <a:ext cx="457200" cy="228600"/>
           </a:xfrm>
           <a:prstGeom prst="rect">
             <a:avLst/>
@@ -9620,21 +11147,329 @@
           </a:bodyPr>
           <a:lstStyle/>
           <a:p>
+            <a:pPr algn="ctr"/>
+            <a:r>
+              <a:rPr sz="1400" b="0">
+                <a:solidFill>
+                  <a:srgbClr val="1F61AA"/>
+                </a:solidFill>
+              </a:rPr>
+              <a:t>↓</a:t>
+            </a:r>
+          </a:p>
+        </p:txBody>
+      </p:sp>
+      <p:sp>
+        <p:nvSpPr>
+          <p:cNvPr id="12" name="Rectangle 11"/>
+          <p:cNvSpPr/>
+          <p:nvPr/>
+        </p:nvSpPr>
+        <p:spPr>
+          <a:xfrm>
+            <a:off x="457200" y="3611880"/>
+            <a:ext cx="11155680" cy="502920"/>
+          </a:xfrm>
+          <a:prstGeom prst="rect">
+            <a:avLst/>
+          </a:prstGeom>
+          <a:solidFill>
+            <a:srgbClr val="FFFFFF"/>
+          </a:solidFill>
+          <a:ln>
+            <a:solidFill>
+              <a:srgbClr val="CCDDEE"/>
+            </a:solidFill>
+          </a:ln>
+        </p:spPr>
+        <p:style>
+          <a:lnRef idx="1">
+            <a:schemeClr val="accent1"/>
+          </a:lnRef>
+          <a:fillRef idx="3">
+            <a:schemeClr val="accent1"/>
+          </a:fillRef>
+          <a:effectRef idx="2">
+            <a:schemeClr val="accent1"/>
+          </a:effectRef>
+          <a:fontRef idx="minor">
+            <a:schemeClr val="lt1"/>
+          </a:fontRef>
+        </p:style>
+        <p:txBody>
+          <a:bodyPr rtlCol="0" anchor="ctr"/>
+          <a:lstStyle/>
+          <a:p>
+            <a:pPr algn="ctr"/>
+            <a:endParaRPr/>
+          </a:p>
+        </p:txBody>
+      </p:sp>
+      <p:sp>
+        <p:nvSpPr>
+          <p:cNvPr id="13" name="TextBox 12"/>
+          <p:cNvSpPr txBox="1"/>
+          <p:nvPr/>
+        </p:nvSpPr>
+        <p:spPr>
+          <a:xfrm>
+            <a:off x="566928" y="3666744"/>
+            <a:ext cx="10927080" cy="411480"/>
+          </a:xfrm>
+          <a:prstGeom prst="rect">
+            <a:avLst/>
+          </a:prstGeom>
+          <a:noFill/>
+        </p:spPr>
+        <p:txBody>
+          <a:bodyPr wrap="square">
+            <a:spAutoFit/>
+          </a:bodyPr>
+          <a:lstStyle/>
+          <a:p>
             <a:pPr algn="l"/>
             <a:r>
-              <a:rPr sz="1200" b="0">
-                <a:solidFill>
-                  <a:srgbClr val="444444"/>
-                </a:solidFill>
-              </a:rPr>
-              <a:t>The audit trail fields exist in the system — named approver, case reference, reason code — but the current process bypasses them. At least one confirmed miss in live records. At machine speed, this gap would become systematic.  (D1 — WS4 BP-4; Artefact 2 internal note)</a:t>
-            </a:r>
-          </a:p>
-        </p:txBody>
-      </p:sp>
-      <p:sp>
-        <p:nvSpPr>
-          <p:cNvPr id="12" name="TextBox 11"/>
+              <a:rPr sz="1300" b="0">
+                <a:solidFill>
+                  <a:srgbClr val="1A2E44"/>
+                </a:solidFill>
+              </a:rPr>
+              <a:t>Agent decides credit amount from experience (e.g. £170 on £340 dispute) — Sandra's heuristic, not an approved rule</a:t>
+            </a:r>
+          </a:p>
+        </p:txBody>
+      </p:sp>
+      <p:sp>
+        <p:nvSpPr>
+          <p:cNvPr id="14" name="TextBox 13"/>
+          <p:cNvSpPr txBox="1"/>
+          <p:nvPr/>
+        </p:nvSpPr>
+        <p:spPr>
+          <a:xfrm>
+            <a:off x="5852160" y="4114800"/>
+            <a:ext cx="457200" cy="228600"/>
+          </a:xfrm>
+          <a:prstGeom prst="rect">
+            <a:avLst/>
+          </a:prstGeom>
+          <a:noFill/>
+        </p:spPr>
+        <p:txBody>
+          <a:bodyPr wrap="square">
+            <a:spAutoFit/>
+          </a:bodyPr>
+          <a:lstStyle/>
+          <a:p>
+            <a:pPr algn="ctr"/>
+            <a:r>
+              <a:rPr sz="1400" b="0">
+                <a:solidFill>
+                  <a:srgbClr val="1F61AA"/>
+                </a:solidFill>
+              </a:rPr>
+              <a:t>↓</a:t>
+            </a:r>
+          </a:p>
+        </p:txBody>
+      </p:sp>
+      <p:sp>
+        <p:nvSpPr>
+          <p:cNvPr id="15" name="Rectangle 14"/>
+          <p:cNvSpPr/>
+          <p:nvPr/>
+        </p:nvSpPr>
+        <p:spPr>
+          <a:xfrm>
+            <a:off x="457200" y="4343400"/>
+            <a:ext cx="11155680" cy="502920"/>
+          </a:xfrm>
+          <a:prstGeom prst="rect">
+            <a:avLst/>
+          </a:prstGeom>
+          <a:solidFill>
+            <a:srgbClr val="E8F1FB"/>
+          </a:solidFill>
+          <a:ln>
+            <a:solidFill>
+              <a:srgbClr val="CCDDEE"/>
+            </a:solidFill>
+          </a:ln>
+        </p:spPr>
+        <p:style>
+          <a:lnRef idx="1">
+            <a:schemeClr val="accent1"/>
+          </a:lnRef>
+          <a:fillRef idx="3">
+            <a:schemeClr val="accent1"/>
+          </a:fillRef>
+          <a:effectRef idx="2">
+            <a:schemeClr val="accent1"/>
+          </a:effectRef>
+          <a:fontRef idx="minor">
+            <a:schemeClr val="lt1"/>
+          </a:fontRef>
+        </p:style>
+        <p:txBody>
+          <a:bodyPr rtlCol="0" anchor="ctr"/>
+          <a:lstStyle/>
+          <a:p>
+            <a:pPr algn="ctr"/>
+            <a:endParaRPr/>
+          </a:p>
+        </p:txBody>
+      </p:sp>
+      <p:sp>
+        <p:nvSpPr>
+          <p:cNvPr id="16" name="TextBox 15"/>
+          <p:cNvSpPr txBox="1"/>
+          <p:nvPr/>
+        </p:nvSpPr>
+        <p:spPr>
+          <a:xfrm>
+            <a:off x="566928" y="4398264"/>
+            <a:ext cx="10927080" cy="411480"/>
+          </a:xfrm>
+          <a:prstGeom prst="rect">
+            <a:avLst/>
+          </a:prstGeom>
+          <a:noFill/>
+        </p:spPr>
+        <p:txBody>
+          <a:bodyPr wrap="square">
+            <a:spAutoFit/>
+          </a:bodyPr>
+          <a:lstStyle/>
+          <a:p>
+            <a:pPr algn="l"/>
+            <a:r>
+              <a:rPr sz="1300" b="0">
+                <a:solidFill>
+                  <a:srgbClr val="1A2E44"/>
+                </a:solidFill>
+              </a:rPr>
+              <a:t>Agent applies credit via manual override — no audit log entry recorded</a:t>
+            </a:r>
+          </a:p>
+        </p:txBody>
+      </p:sp>
+      <p:sp>
+        <p:nvSpPr>
+          <p:cNvPr id="17" name="TextBox 16"/>
+          <p:cNvSpPr txBox="1"/>
+          <p:nvPr/>
+        </p:nvSpPr>
+        <p:spPr>
+          <a:xfrm>
+            <a:off x="5852160" y="4846320"/>
+            <a:ext cx="457200" cy="228600"/>
+          </a:xfrm>
+          <a:prstGeom prst="rect">
+            <a:avLst/>
+          </a:prstGeom>
+          <a:noFill/>
+        </p:spPr>
+        <p:txBody>
+          <a:bodyPr wrap="square">
+            <a:spAutoFit/>
+          </a:bodyPr>
+          <a:lstStyle/>
+          <a:p>
+            <a:pPr algn="ctr"/>
+            <a:r>
+              <a:rPr sz="1400" b="0">
+                <a:solidFill>
+                  <a:srgbClr val="1F61AA"/>
+                </a:solidFill>
+              </a:rPr>
+              <a:t>↓</a:t>
+            </a:r>
+          </a:p>
+        </p:txBody>
+      </p:sp>
+      <p:sp>
+        <p:nvSpPr>
+          <p:cNvPr id="18" name="Rectangle 17"/>
+          <p:cNvSpPr/>
+          <p:nvPr/>
+        </p:nvSpPr>
+        <p:spPr>
+          <a:xfrm>
+            <a:off x="457200" y="5074920"/>
+            <a:ext cx="11155680" cy="502920"/>
+          </a:xfrm>
+          <a:prstGeom prst="rect">
+            <a:avLst/>
+          </a:prstGeom>
+          <a:solidFill>
+            <a:srgbClr val="FFFFFF"/>
+          </a:solidFill>
+          <a:ln>
+            <a:solidFill>
+              <a:srgbClr val="CCDDEE"/>
+            </a:solidFill>
+          </a:ln>
+        </p:spPr>
+        <p:style>
+          <a:lnRef idx="1">
+            <a:schemeClr val="accent1"/>
+          </a:lnRef>
+          <a:fillRef idx="3">
+            <a:schemeClr val="accent1"/>
+          </a:fillRef>
+          <a:effectRef idx="2">
+            <a:schemeClr val="accent1"/>
+          </a:effectRef>
+          <a:fontRef idx="minor">
+            <a:schemeClr val="lt1"/>
+          </a:fontRef>
+        </p:style>
+        <p:txBody>
+          <a:bodyPr rtlCol="0" anchor="ctr"/>
+          <a:lstStyle/>
+          <a:p>
+            <a:pPr algn="ctr"/>
+            <a:endParaRPr/>
+          </a:p>
+        </p:txBody>
+      </p:sp>
+      <p:sp>
+        <p:nvSpPr>
+          <p:cNvPr id="19" name="TextBox 18"/>
+          <p:cNvSpPr txBox="1"/>
+          <p:nvPr/>
+        </p:nvSpPr>
+        <p:spPr>
+          <a:xfrm>
+            <a:off x="566928" y="5129784"/>
+            <a:ext cx="10927080" cy="411480"/>
+          </a:xfrm>
+          <a:prstGeom prst="rect">
+            <a:avLst/>
+          </a:prstGeom>
+          <a:noFill/>
+        </p:spPr>
+        <p:txBody>
+          <a:bodyPr wrap="square">
+            <a:spAutoFit/>
+          </a:bodyPr>
+          <a:lstStyle/>
+          <a:p>
+            <a:pPr algn="l"/>
+            <a:r>
+              <a:rPr sz="1300" b="0">
+                <a:solidFill>
+                  <a:srgbClr val="1A2E44"/>
+                </a:solidFill>
+              </a:rPr>
+              <a:t>Customer receives credit on next statement — case closed informally</a:t>
+            </a:r>
+          </a:p>
+        </p:txBody>
+      </p:sp>
+      <p:sp>
+        <p:nvSpPr>
+          <p:cNvPr id="20" name="TextBox 19"/>
           <p:cNvSpPr txBox="1"/>
           <p:nvPr/>
         </p:nvSpPr>
@@ -9675,7 +11510,7 @@
 </file>
 
 <file path=ppt/slides/slide7.xml><?xml version="1.0" encoding="utf-8"?>
-<p:sld xmlns:a="http://schemas.openxmlformats.org/drawingml/2006/main" xmlns:p="http://schemas.openxmlformats.org/presentationml/2006/main" xmlns:r="http://schemas.openxmlformats.org/officeDocument/2006/relationships">
+<p:sld xmlns:a="http://schemas.openxmlformats.org/drawingml/2006/main" xmlns:r="http://schemas.openxmlformats.org/officeDocument/2006/relationships" xmlns:p="http://schemas.openxmlformats.org/presentationml/2006/main">
   <p:cSld>
     <p:bg>
       <p:bgPr>
@@ -9691,7 +11526,14 @@
         <p:cNvGrpSpPr/>
         <p:nvPr/>
       </p:nvGrpSpPr>
-      <p:grpSpPr/>
+      <p:grpSpPr>
+        <a:xfrm>
+          <a:off x="0" y="0"/>
+          <a:ext cx="0" cy="0"/>
+          <a:chOff x="0" y="0"/>
+          <a:chExt cx="0" cy="0"/>
+        </a:xfrm>
+      </p:grpSpPr>
       <p:sp>
         <p:nvSpPr>
           <p:cNvPr id="2" name="Rectangle 1"/>
@@ -9728,7 +11570,461 @@
           </a:fontRef>
         </p:style>
         <p:txBody>
-          <a:bodyPr rtlCol="0" anchor="ctr" wrap="square" lIns="274320" tIns="164592"/>
+          <a:bodyPr wrap="square" lIns="274320" tIns="164592" rtlCol="0" anchor="ctr"/>
+          <a:lstStyle/>
+          <a:p>
+            <a:pPr algn="l"/>
+            <a:r>
+              <a:rPr sz="2800" b="1">
+                <a:solidFill>
+                  <a:srgbClr val="FFFFFF"/>
+                </a:solidFill>
+              </a:rPr>
+              <a:t>Where Time Goes — The Cognitive Hotspots</a:t>
+            </a:r>
+          </a:p>
+        </p:txBody>
+      </p:sp>
+      <p:sp>
+        <p:nvSpPr>
+          <p:cNvPr id="3" name="Rectangle 2"/>
+          <p:cNvSpPr/>
+          <p:nvPr/>
+        </p:nvSpPr>
+        <p:spPr>
+          <a:xfrm>
+            <a:off x="274320" y="1499616"/>
+            <a:ext cx="109728" cy="457200"/>
+          </a:xfrm>
+          <a:prstGeom prst="rect">
+            <a:avLst/>
+          </a:prstGeom>
+          <a:solidFill>
+            <a:srgbClr val="1F61AA"/>
+          </a:solidFill>
+          <a:ln>
+            <a:noFill/>
+          </a:ln>
+        </p:spPr>
+        <p:style>
+          <a:lnRef idx="1">
+            <a:schemeClr val="accent1"/>
+          </a:lnRef>
+          <a:fillRef idx="3">
+            <a:schemeClr val="accent1"/>
+          </a:fillRef>
+          <a:effectRef idx="2">
+            <a:schemeClr val="accent1"/>
+          </a:effectRef>
+          <a:fontRef idx="minor">
+            <a:schemeClr val="lt1"/>
+          </a:fontRef>
+        </p:style>
+        <p:txBody>
+          <a:bodyPr rtlCol="0" anchor="ctr"/>
+          <a:lstStyle/>
+          <a:p>
+            <a:pPr algn="ctr"/>
+            <a:endParaRPr/>
+          </a:p>
+        </p:txBody>
+      </p:sp>
+      <p:sp>
+        <p:nvSpPr>
+          <p:cNvPr id="4" name="TextBox 3"/>
+          <p:cNvSpPr txBox="1"/>
+          <p:nvPr/>
+        </p:nvSpPr>
+        <p:spPr>
+          <a:xfrm>
+            <a:off x="502920" y="1463040"/>
+            <a:ext cx="11064240" cy="384048"/>
+          </a:xfrm>
+          <a:prstGeom prst="rect">
+            <a:avLst/>
+          </a:prstGeom>
+          <a:noFill/>
+        </p:spPr>
+        <p:txBody>
+          <a:bodyPr wrap="square">
+            <a:spAutoFit/>
+          </a:bodyPr>
+          <a:lstStyle/>
+          <a:p>
+            <a:pPr algn="l"/>
+            <a:r>
+              <a:rPr sz="1500" b="1">
+                <a:solidFill>
+                  <a:srgbClr val="1A2E44"/>
+                </a:solidFill>
+              </a:rPr>
+              <a:t>1. Assembling the evidence  (est. 10–12 min per case)</a:t>
+            </a:r>
+          </a:p>
+        </p:txBody>
+      </p:sp>
+      <p:sp>
+        <p:nvSpPr>
+          <p:cNvPr id="5" name="TextBox 4"/>
+          <p:cNvSpPr txBox="1"/>
+          <p:nvPr/>
+        </p:nvSpPr>
+        <p:spPr>
+          <a:xfrm>
+            <a:off x="502920" y="1847088"/>
+            <a:ext cx="11064240" cy="594360"/>
+          </a:xfrm>
+          <a:prstGeom prst="rect">
+            <a:avLst/>
+          </a:prstGeom>
+          <a:noFill/>
+        </p:spPr>
+        <p:txBody>
+          <a:bodyPr wrap="square">
+            <a:spAutoFit/>
+          </a:bodyPr>
+          <a:lstStyle/>
+          <a:p>
+            <a:pPr algn="l"/>
+            <a:r>
+              <a:rPr sz="1200" b="0">
+                <a:solidFill>
+                  <a:srgbClr val="444444"/>
+                </a:solidFill>
+              </a:rPr>
+              <a:t>Sandra manually retrieves invoice data, surcharge details, and delivery records from separate systems — Aurum batch exports and the CRM — that do not talk to each other in real time. There is no single view of a dispute. Each case starts from scratch.  (D1 — WS4 Zone 1, Z2)</a:t>
+            </a:r>
+          </a:p>
+        </p:txBody>
+      </p:sp>
+      <p:sp>
+        <p:nvSpPr>
+          <p:cNvPr id="6" name="Rectangle 5"/>
+          <p:cNvSpPr/>
+          <p:nvPr/>
+        </p:nvSpPr>
+        <p:spPr>
+          <a:xfrm>
+            <a:off x="274320" y="2596896"/>
+            <a:ext cx="109728" cy="457200"/>
+          </a:xfrm>
+          <a:prstGeom prst="rect">
+            <a:avLst/>
+          </a:prstGeom>
+          <a:solidFill>
+            <a:srgbClr val="FF9900"/>
+          </a:solidFill>
+          <a:ln>
+            <a:noFill/>
+          </a:ln>
+        </p:spPr>
+        <p:style>
+          <a:lnRef idx="1">
+            <a:schemeClr val="accent1"/>
+          </a:lnRef>
+          <a:fillRef idx="3">
+            <a:schemeClr val="accent1"/>
+          </a:fillRef>
+          <a:effectRef idx="2">
+            <a:schemeClr val="accent1"/>
+          </a:effectRef>
+          <a:fontRef idx="minor">
+            <a:schemeClr val="lt1"/>
+          </a:fontRef>
+        </p:style>
+        <p:txBody>
+          <a:bodyPr rtlCol="0" anchor="ctr"/>
+          <a:lstStyle/>
+          <a:p>
+            <a:pPr algn="ctr"/>
+            <a:endParaRPr/>
+          </a:p>
+        </p:txBody>
+      </p:sp>
+      <p:sp>
+        <p:nvSpPr>
+          <p:cNvPr id="7" name="TextBox 6"/>
+          <p:cNvSpPr txBox="1"/>
+          <p:nvPr/>
+        </p:nvSpPr>
+        <p:spPr>
+          <a:xfrm>
+            <a:off x="502920" y="2560320"/>
+            <a:ext cx="11064240" cy="384048"/>
+          </a:xfrm>
+          <a:prstGeom prst="rect">
+            <a:avLst/>
+          </a:prstGeom>
+          <a:noFill/>
+        </p:spPr>
+        <p:txBody>
+          <a:bodyPr wrap="square">
+            <a:spAutoFit/>
+          </a:bodyPr>
+          <a:lstStyle/>
+          <a:p>
+            <a:pPr algn="l"/>
+            <a:r>
+              <a:rPr sz="1500" b="1">
+                <a:solidFill>
+                  <a:srgbClr val="1A2E44"/>
+                </a:solidFill>
+              </a:rPr>
+              <a:t>2. Deciding the credit amount  (judgment call with no rule)</a:t>
+            </a:r>
+          </a:p>
+        </p:txBody>
+      </p:sp>
+      <p:sp>
+        <p:nvSpPr>
+          <p:cNvPr id="8" name="TextBox 7"/>
+          <p:cNvSpPr txBox="1"/>
+          <p:nvPr/>
+        </p:nvSpPr>
+        <p:spPr>
+          <a:xfrm>
+            <a:off x="502920" y="2944368"/>
+            <a:ext cx="11064240" cy="594360"/>
+          </a:xfrm>
+          <a:prstGeom prst="rect">
+            <a:avLst/>
+          </a:prstGeom>
+          <a:noFill/>
+        </p:spPr>
+        <p:txBody>
+          <a:bodyPr wrap="square">
+            <a:spAutoFit/>
+          </a:bodyPr>
+          <a:lstStyle/>
+          <a:p>
+            <a:pPr algn="l"/>
+            <a:r>
+              <a:rPr sz="1200" b="0">
+                <a:solidFill>
+                  <a:srgbClr val="444444"/>
+                </a:solidFill>
+              </a:rPr>
+              <a:t>No written policy exists for how much to credit. The observed practice — roughly 50% of the disputed amount — is Sandra's heuristic, not an approved rule. Different agents would reach different amounts for the same case.  (D1 — WS4 Zone 3, MT6; D2 — C-7 Human Only)</a:t>
+            </a:r>
+          </a:p>
+        </p:txBody>
+      </p:sp>
+      <p:sp>
+        <p:nvSpPr>
+          <p:cNvPr id="9" name="Rectangle 8"/>
+          <p:cNvSpPr/>
+          <p:nvPr/>
+        </p:nvSpPr>
+        <p:spPr>
+          <a:xfrm>
+            <a:off x="274320" y="3694176"/>
+            <a:ext cx="109728" cy="457200"/>
+          </a:xfrm>
+          <a:prstGeom prst="rect">
+            <a:avLst/>
+          </a:prstGeom>
+          <a:solidFill>
+            <a:srgbClr val="CC0000"/>
+          </a:solidFill>
+          <a:ln>
+            <a:noFill/>
+          </a:ln>
+        </p:spPr>
+        <p:style>
+          <a:lnRef idx="1">
+            <a:schemeClr val="accent1"/>
+          </a:lnRef>
+          <a:fillRef idx="3">
+            <a:schemeClr val="accent1"/>
+          </a:fillRef>
+          <a:effectRef idx="2">
+            <a:schemeClr val="accent1"/>
+          </a:effectRef>
+          <a:fontRef idx="minor">
+            <a:schemeClr val="lt1"/>
+          </a:fontRef>
+        </p:style>
+        <p:txBody>
+          <a:bodyPr rtlCol="0" anchor="ctr"/>
+          <a:lstStyle/>
+          <a:p>
+            <a:pPr algn="ctr"/>
+            <a:endParaRPr/>
+          </a:p>
+        </p:txBody>
+      </p:sp>
+      <p:sp>
+        <p:nvSpPr>
+          <p:cNvPr id="10" name="TextBox 9"/>
+          <p:cNvSpPr txBox="1"/>
+          <p:nvPr/>
+        </p:nvSpPr>
+        <p:spPr>
+          <a:xfrm>
+            <a:off x="502920" y="3657600"/>
+            <a:ext cx="11064240" cy="384048"/>
+          </a:xfrm>
+          <a:prstGeom prst="rect">
+            <a:avLst/>
+          </a:prstGeom>
+          <a:noFill/>
+        </p:spPr>
+        <p:txBody>
+          <a:bodyPr wrap="square">
+            <a:spAutoFit/>
+          </a:bodyPr>
+          <a:lstStyle/>
+          <a:p>
+            <a:pPr algn="l"/>
+            <a:r>
+              <a:rPr sz="1500" b="1">
+                <a:solidFill>
+                  <a:srgbClr val="1A2E44"/>
+                </a:solidFill>
+              </a:rPr>
+              <a:t>3. Writing the credit record  (compliance step routinely skipped under pressure)</a:t>
+            </a:r>
+          </a:p>
+        </p:txBody>
+      </p:sp>
+      <p:sp>
+        <p:nvSpPr>
+          <p:cNvPr id="11" name="TextBox 10"/>
+          <p:cNvSpPr txBox="1"/>
+          <p:nvPr/>
+        </p:nvSpPr>
+        <p:spPr>
+          <a:xfrm>
+            <a:off x="502920" y="4041648"/>
+            <a:ext cx="11064240" cy="594360"/>
+          </a:xfrm>
+          <a:prstGeom prst="rect">
+            <a:avLst/>
+          </a:prstGeom>
+          <a:noFill/>
+        </p:spPr>
+        <p:txBody>
+          <a:bodyPr wrap="square">
+            <a:spAutoFit/>
+          </a:bodyPr>
+          <a:lstStyle/>
+          <a:p>
+            <a:pPr algn="l"/>
+            <a:r>
+              <a:rPr sz="1200" b="0">
+                <a:solidFill>
+                  <a:srgbClr val="444444"/>
+                </a:solidFill>
+              </a:rPr>
+              <a:t>The audit trail fields exist in the system — named approver, case reference, reason code — but the current process bypasses them. At least one confirmed miss in live records. At machine speed, this gap would become systematic.  (D1 — WS4 BP-4; Artefact 2 internal note)</a:t>
+            </a:r>
+          </a:p>
+        </p:txBody>
+      </p:sp>
+      <p:sp>
+        <p:nvSpPr>
+          <p:cNvPr id="12" name="TextBox 11"/>
+          <p:cNvSpPr txBox="1"/>
+          <p:nvPr/>
+        </p:nvSpPr>
+        <p:spPr>
+          <a:xfrm>
+            <a:off x="182880" y="6537960"/>
+            <a:ext cx="11795760" cy="274320"/>
+          </a:xfrm>
+          <a:prstGeom prst="rect">
+            <a:avLst/>
+          </a:prstGeom>
+          <a:noFill/>
+        </p:spPr>
+        <p:txBody>
+          <a:bodyPr wrap="square">
+            <a:spAutoFit/>
+          </a:bodyPr>
+          <a:lstStyle/>
+          <a:p>
+            <a:pPr algn="ctr"/>
+            <a:r>
+              <a:rPr sz="900" b="0">
+                <a:solidFill>
+                  <a:srgbClr val="999999"/>
+                </a:solidFill>
+              </a:rPr>
+              <a:t>Apex Distribution Ltd  |  Billing Disputes — Assessment &amp; Proposed Solution  |  Confidential</a:t>
+            </a:r>
+          </a:p>
+        </p:txBody>
+      </p:sp>
+    </p:spTree>
+  </p:cSld>
+  <p:clrMapOvr>
+    <a:masterClrMapping/>
+  </p:clrMapOvr>
+</p:sld>
+</file>
+
+<file path=ppt/slides/slide8.xml><?xml version="1.0" encoding="utf-8"?>
+<p:sld xmlns:a="http://schemas.openxmlformats.org/drawingml/2006/main" xmlns:r="http://schemas.openxmlformats.org/officeDocument/2006/relationships" xmlns:p="http://schemas.openxmlformats.org/presentationml/2006/main">
+  <p:cSld>
+    <p:bg>
+      <p:bgPr>
+        <a:solidFill>
+          <a:srgbClr val="FFFFFF"/>
+        </a:solidFill>
+        <a:effectLst/>
+      </p:bgPr>
+    </p:bg>
+    <p:spTree>
+      <p:nvGrpSpPr>
+        <p:cNvPr id="1" name=""/>
+        <p:cNvGrpSpPr/>
+        <p:nvPr/>
+      </p:nvGrpSpPr>
+      <p:grpSpPr>
+        <a:xfrm>
+          <a:off x="0" y="0"/>
+          <a:ext cx="0" cy="0"/>
+          <a:chOff x="0" y="0"/>
+          <a:chExt cx="0" cy="0"/>
+        </a:xfrm>
+      </p:grpSpPr>
+      <p:sp>
+        <p:nvSpPr>
+          <p:cNvPr id="2" name="Rectangle 1"/>
+          <p:cNvSpPr/>
+          <p:nvPr/>
+        </p:nvSpPr>
+        <p:spPr>
+          <a:xfrm>
+            <a:off x="0" y="0"/>
+            <a:ext cx="12188952" cy="1280160"/>
+          </a:xfrm>
+          <a:prstGeom prst="rect">
+            <a:avLst/>
+          </a:prstGeom>
+          <a:solidFill>
+            <a:srgbClr val="1A2E44"/>
+          </a:solidFill>
+          <a:ln>
+            <a:noFill/>
+          </a:ln>
+        </p:spPr>
+        <p:style>
+          <a:lnRef idx="1">
+            <a:schemeClr val="accent1"/>
+          </a:lnRef>
+          <a:fillRef idx="3">
+            <a:schemeClr val="accent1"/>
+          </a:fillRef>
+          <a:effectRef idx="2">
+            <a:schemeClr val="accent1"/>
+          </a:effectRef>
+          <a:fontRef idx="minor">
+            <a:schemeClr val="lt1"/>
+          </a:fontRef>
+        </p:style>
+        <p:txBody>
+          <a:bodyPr wrap="square" lIns="274320" tIns="164592" rtlCol="0" anchor="ctr"/>
           <a:lstStyle/>
           <a:p>
             <a:pPr algn="l"/>
@@ -9762,9 +12058,27 @@
                 <a:tableStyleId>{5C22544A-7EE6-4342-B048-85BDC9FD1C3A}</a:tableStyleId>
               </a:tblPr>
               <a:tblGrid>
-                <a:gridCol w="5029200"/>
-                <a:gridCol w="2011680"/>
-                <a:gridCol w="4572000"/>
+                <a:gridCol w="5029200">
+                  <a:extLst>
+                    <a:ext uri="{9D8B030D-6E8A-4147-A177-3AD203B41FA5}">
+                      <a16:colId xmlns:a16="http://schemas.microsoft.com/office/drawing/2014/main" val="20000"/>
+                    </a:ext>
+                  </a:extLst>
+                </a:gridCol>
+                <a:gridCol w="2011680">
+                  <a:extLst>
+                    <a:ext uri="{9D8B030D-6E8A-4147-A177-3AD203B41FA5}">
+                      <a16:colId xmlns:a16="http://schemas.microsoft.com/office/drawing/2014/main" val="20001"/>
+                    </a:ext>
+                  </a:extLst>
+                </a:gridCol>
+                <a:gridCol w="4572000">
+                  <a:extLst>
+                    <a:ext uri="{9D8B030D-6E8A-4147-A177-3AD203B41FA5}">
+                      <a16:colId xmlns:a16="http://schemas.microsoft.com/office/drawing/2014/main" val="20002"/>
+                    </a:ext>
+                  </a:extLst>
+                </a:gridCol>
               </a:tblGrid>
               <a:tr h="548640">
                 <a:tc>
@@ -9773,7 +12087,7 @@
                     <a:lstStyle/>
                     <a:p>
                       <a:r>
-                        <a:rPr b="1" sz="1200">
+                        <a:rPr sz="1200" b="1">
                           <a:solidFill>
                             <a:srgbClr val="FFFFFF"/>
                           </a:solidFill>
@@ -9794,7 +12108,7 @@
                     <a:lstStyle/>
                     <a:p>
                       <a:r>
-                        <a:rPr b="1" sz="1200">
+                        <a:rPr sz="1200" b="1">
                           <a:solidFill>
                             <a:srgbClr val="FFFFFF"/>
                           </a:solidFill>
@@ -9815,7 +12129,7 @@
                     <a:lstStyle/>
                     <a:p>
                       <a:r>
-                        <a:rPr b="1" sz="1200">
+                        <a:rPr sz="1200" b="1">
                           <a:solidFill>
                             <a:srgbClr val="FFFFFF"/>
                           </a:solidFill>
@@ -9830,6 +12144,11 @@
                     </a:solidFill>
                   </a:tcPr>
                 </a:tc>
+                <a:extLst>
+                  <a:ext uri="{0D108BD9-81ED-4DB2-BD59-A6C34878D82A}">
+                    <a16:rowId xmlns:a16="http://schemas.microsoft.com/office/drawing/2014/main" val="10000"/>
+                  </a:ext>
+                </a:extLst>
               </a:tr>
               <a:tr h="548640">
                 <a:tc>
@@ -9883,6 +12202,11 @@
                   </a:txBody>
                   <a:tcPr/>
                 </a:tc>
+                <a:extLst>
+                  <a:ext uri="{0D108BD9-81ED-4DB2-BD59-A6C34878D82A}">
+                    <a16:rowId xmlns:a16="http://schemas.microsoft.com/office/drawing/2014/main" val="10001"/>
+                  </a:ext>
+                </a:extLst>
               </a:tr>
               <a:tr h="548640">
                 <a:tc>
@@ -9936,6 +12260,11 @@
                   </a:txBody>
                   <a:tcPr/>
                 </a:tc>
+                <a:extLst>
+                  <a:ext uri="{0D108BD9-81ED-4DB2-BD59-A6C34878D82A}">
+                    <a16:rowId xmlns:a16="http://schemas.microsoft.com/office/drawing/2014/main" val="10002"/>
+                  </a:ext>
+                </a:extLst>
               </a:tr>
               <a:tr h="548640">
                 <a:tc>
@@ -9989,6 +12318,11 @@
                   </a:txBody>
                   <a:tcPr/>
                 </a:tc>
+                <a:extLst>
+                  <a:ext uri="{0D108BD9-81ED-4DB2-BD59-A6C34878D82A}">
+                    <a16:rowId xmlns:a16="http://schemas.microsoft.com/office/drawing/2014/main" val="10003"/>
+                  </a:ext>
+                </a:extLst>
               </a:tr>
               <a:tr h="548640">
                 <a:tc>
@@ -10042,6 +12376,11 @@
                   </a:txBody>
                   <a:tcPr/>
                 </a:tc>
+                <a:extLst>
+                  <a:ext uri="{0D108BD9-81ED-4DB2-BD59-A6C34878D82A}">
+                    <a16:rowId xmlns:a16="http://schemas.microsoft.com/office/drawing/2014/main" val="10004"/>
+                  </a:ext>
+                </a:extLst>
               </a:tr>
               <a:tr h="548640">
                 <a:tc>
@@ -10095,6 +12434,11 @@
                   </a:txBody>
                   <a:tcPr/>
                 </a:tc>
+                <a:extLst>
+                  <a:ext uri="{0D108BD9-81ED-4DB2-BD59-A6C34878D82A}">
+                    <a16:rowId xmlns:a16="http://schemas.microsoft.com/office/drawing/2014/main" val="10005"/>
+                  </a:ext>
+                </a:extLst>
               </a:tr>
               <a:tr h="548640">
                 <a:tc>
@@ -10160,6 +12504,11 @@
                     </a:solidFill>
                   </a:tcPr>
                 </a:tc>
+                <a:extLst>
+                  <a:ext uri="{0D108BD9-81ED-4DB2-BD59-A6C34878D82A}">
+                    <a16:rowId xmlns:a16="http://schemas.microsoft.com/office/drawing/2014/main" val="10006"/>
+                  </a:ext>
+                </a:extLst>
               </a:tr>
               <a:tr h="548640">
                 <a:tc>
@@ -10225,6 +12574,11 @@
                     </a:solidFill>
                   </a:tcPr>
                 </a:tc>
+                <a:extLst>
+                  <a:ext uri="{0D108BD9-81ED-4DB2-BD59-A6C34878D82A}">
+                    <a16:rowId xmlns:a16="http://schemas.microsoft.com/office/drawing/2014/main" val="10007"/>
+                  </a:ext>
+                </a:extLst>
               </a:tr>
             </a:tbl>
           </a:graphicData>
@@ -10272,8 +12626,8 @@
 </p:sld>
 </file>
 
-<file path=ppt/slides/slide8.xml><?xml version="1.0" encoding="utf-8"?>
-<p:sld xmlns:a="http://schemas.openxmlformats.org/drawingml/2006/main" xmlns:p="http://schemas.openxmlformats.org/presentationml/2006/main" xmlns:r="http://schemas.openxmlformats.org/officeDocument/2006/relationships">
+<file path=ppt/slides/slide9.xml><?xml version="1.0" encoding="utf-8"?>
+<p:sld xmlns:a="http://schemas.openxmlformats.org/drawingml/2006/main" xmlns:r="http://schemas.openxmlformats.org/officeDocument/2006/relationships" xmlns:p="http://schemas.openxmlformats.org/presentationml/2006/main">
   <p:cSld>
     <p:bg>
       <p:bgPr>
@@ -10289,7 +12643,14 @@
         <p:cNvGrpSpPr/>
         <p:nvPr/>
       </p:nvGrpSpPr>
-      <p:grpSpPr/>
+      <p:grpSpPr>
+        <a:xfrm>
+          <a:off x="0" y="0"/>
+          <a:ext cx="0" cy="0"/>
+          <a:chOff x="0" y="0"/>
+          <a:chExt cx="0" cy="0"/>
+        </a:xfrm>
+      </p:grpSpPr>
       <p:sp>
         <p:nvSpPr>
           <p:cNvPr id="2" name="Rectangle 1"/>
@@ -10326,7 +12687,7 @@
           </a:fontRef>
         </p:style>
         <p:txBody>
-          <a:bodyPr rtlCol="0" anchor="ctr" wrap="square" lIns="274320" tIns="164592"/>
+          <a:bodyPr wrap="square" lIns="274320" tIns="164592" rtlCol="0" anchor="ctr"/>
           <a:lstStyle/>
           <a:p>
             <a:pPr algn="l"/>
@@ -10381,6 +12742,7 @@
           <a:lstStyle/>
           <a:p>
             <a:pPr algn="ctr"/>
+            <a:endParaRPr/>
           </a:p>
         </p:txBody>
       </p:sp>
@@ -10424,6 +12786,7 @@
           <a:lstStyle/>
           <a:p>
             <a:pPr algn="ctr"/>
+            <a:endParaRPr/>
           </a:p>
         </p:txBody>
       </p:sp>
@@ -10571,6 +12934,7 @@
           <a:lstStyle/>
           <a:p>
             <a:pPr algn="ctr"/>
+            <a:endParaRPr/>
           </a:p>
         </p:txBody>
       </p:sp>
@@ -10650,6 +13014,7 @@
           <a:lstStyle/>
           <a:p>
             <a:pPr algn="ctr"/>
+            <a:endParaRPr/>
           </a:p>
         </p:txBody>
       </p:sp>
@@ -10728,6 +13093,7 @@
           <a:lstStyle/>
           <a:p>
             <a:pPr algn="ctr"/>
+            <a:endParaRPr/>
           </a:p>
         </p:txBody>
       </p:sp>
@@ -10806,6 +13172,7 @@
           <a:lstStyle/>
           <a:p>
             <a:pPr algn="ctr"/>
+            <a:endParaRPr/>
           </a:p>
         </p:txBody>
       </p:sp>
@@ -10886,6 +13253,7 @@
           <a:lstStyle/>
           <a:p>
             <a:pPr algn="ctr"/>
+            <a:endParaRPr/>
           </a:p>
         </p:txBody>
       </p:sp>
@@ -11334,697 +13702,6 @@
       <p:sp>
         <p:nvSpPr>
           <p:cNvPr id="30" name="TextBox 29"/>
-          <p:cNvSpPr txBox="1"/>
-          <p:nvPr/>
-        </p:nvSpPr>
-        <p:spPr>
-          <a:xfrm>
-            <a:off x="182880" y="6537960"/>
-            <a:ext cx="11795760" cy="274320"/>
-          </a:xfrm>
-          <a:prstGeom prst="rect">
-            <a:avLst/>
-          </a:prstGeom>
-          <a:noFill/>
-        </p:spPr>
-        <p:txBody>
-          <a:bodyPr wrap="square">
-            <a:spAutoFit/>
-          </a:bodyPr>
-          <a:lstStyle/>
-          <a:p>
-            <a:pPr algn="ctr"/>
-            <a:r>
-              <a:rPr sz="900" b="0">
-                <a:solidFill>
-                  <a:srgbClr val="999999"/>
-                </a:solidFill>
-              </a:rPr>
-              <a:t>Apex Distribution Ltd  |  Billing Disputes — Assessment &amp; Proposed Solution  |  Confidential</a:t>
-            </a:r>
-          </a:p>
-        </p:txBody>
-      </p:sp>
-    </p:spTree>
-  </p:cSld>
-  <p:clrMapOvr>
-    <a:masterClrMapping/>
-  </p:clrMapOvr>
-</p:sld>
-</file>
-
-<file path=ppt/slides/slide9.xml><?xml version="1.0" encoding="utf-8"?>
-<p:sld xmlns:a="http://schemas.openxmlformats.org/drawingml/2006/main" xmlns:p="http://schemas.openxmlformats.org/presentationml/2006/main" xmlns:r="http://schemas.openxmlformats.org/officeDocument/2006/relationships">
-  <p:cSld>
-    <p:bg>
-      <p:bgPr>
-        <a:solidFill>
-          <a:srgbClr val="FFFFFF"/>
-        </a:solidFill>
-        <a:effectLst/>
-      </p:bgPr>
-    </p:bg>
-    <p:spTree>
-      <p:nvGrpSpPr>
-        <p:cNvPr id="1" name=""/>
-        <p:cNvGrpSpPr/>
-        <p:nvPr/>
-      </p:nvGrpSpPr>
-      <p:grpSpPr/>
-      <p:sp>
-        <p:nvSpPr>
-          <p:cNvPr id="2" name="Rectangle 1"/>
-          <p:cNvSpPr/>
-          <p:nvPr/>
-        </p:nvSpPr>
-        <p:spPr>
-          <a:xfrm>
-            <a:off x="0" y="0"/>
-            <a:ext cx="12188952" cy="1280160"/>
-          </a:xfrm>
-          <a:prstGeom prst="rect">
-            <a:avLst/>
-          </a:prstGeom>
-          <a:solidFill>
-            <a:srgbClr val="1A2E44"/>
-          </a:solidFill>
-          <a:ln>
-            <a:noFill/>
-          </a:ln>
-        </p:spPr>
-        <p:style>
-          <a:lnRef idx="1">
-            <a:schemeClr val="accent1"/>
-          </a:lnRef>
-          <a:fillRef idx="3">
-            <a:schemeClr val="accent1"/>
-          </a:fillRef>
-          <a:effectRef idx="2">
-            <a:schemeClr val="accent1"/>
-          </a:effectRef>
-          <a:fontRef idx="minor">
-            <a:schemeClr val="lt1"/>
-          </a:fontRef>
-        </p:style>
-        <p:txBody>
-          <a:bodyPr rtlCol="0" anchor="ctr" wrap="square" lIns="274320" tIns="164592"/>
-          <a:lstStyle/>
-          <a:p>
-            <a:pPr algn="l"/>
-            <a:r>
-              <a:rPr sz="2800" b="1">
-                <a:solidFill>
-                  <a:srgbClr val="FFFFFF"/>
-                </a:solidFill>
-              </a:rPr>
-              <a:t>The Proposed Agent — What It Does</a:t>
-            </a:r>
-          </a:p>
-        </p:txBody>
-      </p:sp>
-      <p:sp>
-        <p:nvSpPr>
-          <p:cNvPr id="3" name="Oval 2"/>
-          <p:cNvSpPr/>
-          <p:nvPr/>
-        </p:nvSpPr>
-        <p:spPr>
-          <a:xfrm>
-            <a:off x="274320" y="1481328"/>
-            <a:ext cx="411480" cy="411480"/>
-          </a:xfrm>
-          <a:prstGeom prst="ellipse">
-            <a:avLst/>
-          </a:prstGeom>
-          <a:solidFill>
-            <a:srgbClr val="1F61AA"/>
-          </a:solidFill>
-          <a:ln>
-            <a:noFill/>
-          </a:ln>
-        </p:spPr>
-        <p:style>
-          <a:lnRef idx="1">
-            <a:schemeClr val="accent1"/>
-          </a:lnRef>
-          <a:fillRef idx="3">
-            <a:schemeClr val="accent1"/>
-          </a:fillRef>
-          <a:effectRef idx="2">
-            <a:schemeClr val="accent1"/>
-          </a:effectRef>
-          <a:fontRef idx="minor">
-            <a:schemeClr val="lt1"/>
-          </a:fontRef>
-        </p:style>
-        <p:txBody>
-          <a:bodyPr rtlCol="0" anchor="ctr"/>
-          <a:lstStyle/>
-          <a:p>
-            <a:pPr algn="ctr"/>
-          </a:p>
-        </p:txBody>
-      </p:sp>
-      <p:sp>
-        <p:nvSpPr>
-          <p:cNvPr id="4" name="TextBox 3"/>
-          <p:cNvSpPr txBox="1"/>
-          <p:nvPr/>
-        </p:nvSpPr>
-        <p:spPr>
-          <a:xfrm>
-            <a:off x="274320" y="1481328"/>
-            <a:ext cx="411480" cy="411480"/>
-          </a:xfrm>
-          <a:prstGeom prst="rect">
-            <a:avLst/>
-          </a:prstGeom>
-          <a:noFill/>
-        </p:spPr>
-        <p:txBody>
-          <a:bodyPr wrap="square">
-            <a:spAutoFit/>
-          </a:bodyPr>
-          <a:lstStyle/>
-          <a:p>
-            <a:pPr algn="ctr"/>
-            <a:r>
-              <a:rPr sz="1400" b="1">
-                <a:solidFill>
-                  <a:srgbClr val="FFFFFF"/>
-                </a:solidFill>
-              </a:rPr>
-              <a:t>1</a:t>
-            </a:r>
-          </a:p>
-        </p:txBody>
-      </p:sp>
-      <p:sp>
-        <p:nvSpPr>
-          <p:cNvPr id="5" name="TextBox 4"/>
-          <p:cNvSpPr txBox="1"/>
-          <p:nvPr/>
-        </p:nvSpPr>
-        <p:spPr>
-          <a:xfrm>
-            <a:off x="822960" y="1463040"/>
-            <a:ext cx="10789920" cy="347472"/>
-          </a:xfrm>
-          <a:prstGeom prst="rect">
-            <a:avLst/>
-          </a:prstGeom>
-          <a:noFill/>
-        </p:spPr>
-        <p:txBody>
-          <a:bodyPr wrap="square">
-            <a:spAutoFit/>
-          </a:bodyPr>
-          <a:lstStyle/>
-          <a:p>
-            <a:pPr algn="l"/>
-            <a:r>
-              <a:rPr sz="1400" b="1">
-                <a:solidFill>
-                  <a:srgbClr val="1A2E44"/>
-                </a:solidFill>
-              </a:rPr>
-              <a:t>Receives &amp; assembles evidence</a:t>
-            </a:r>
-          </a:p>
-        </p:txBody>
-      </p:sp>
-      <p:sp>
-        <p:nvSpPr>
-          <p:cNvPr id="6" name="TextBox 5"/>
-          <p:cNvSpPr txBox="1"/>
-          <p:nvPr/>
-        </p:nvSpPr>
-        <p:spPr>
-          <a:xfrm>
-            <a:off x="822960" y="1828800"/>
-            <a:ext cx="10789920" cy="502920"/>
-          </a:xfrm>
-          <a:prstGeom prst="rect">
-            <a:avLst/>
-          </a:prstGeom>
-          <a:noFill/>
-        </p:spPr>
-        <p:txBody>
-          <a:bodyPr wrap="square">
-            <a:spAutoFit/>
-          </a:bodyPr>
-          <a:lstStyle/>
-          <a:p>
-            <a:pPr algn="l"/>
-            <a:r>
-              <a:rPr sz="1200" b="0">
-                <a:solidFill>
-                  <a:srgbClr val="444444"/>
-                </a:solidFill>
-              </a:rPr>
-              <a:t>Retrieves invoice data, surcharge records, delivery outcome, and customer account history — what Sandra currently spends 10–12 minutes retrieving manually.  (D4 T-001 – T-004)</a:t>
-            </a:r>
-          </a:p>
-        </p:txBody>
-      </p:sp>
-      <p:sp>
-        <p:nvSpPr>
-          <p:cNvPr id="7" name="Oval 6"/>
-          <p:cNvSpPr/>
-          <p:nvPr/>
-        </p:nvSpPr>
-        <p:spPr>
-          <a:xfrm>
-            <a:off x="274320" y="2487168"/>
-            <a:ext cx="411480" cy="411480"/>
-          </a:xfrm>
-          <a:prstGeom prst="ellipse">
-            <a:avLst/>
-          </a:prstGeom>
-          <a:solidFill>
-            <a:srgbClr val="1F61AA"/>
-          </a:solidFill>
-          <a:ln>
-            <a:noFill/>
-          </a:ln>
-        </p:spPr>
-        <p:style>
-          <a:lnRef idx="1">
-            <a:schemeClr val="accent1"/>
-          </a:lnRef>
-          <a:fillRef idx="3">
-            <a:schemeClr val="accent1"/>
-          </a:fillRef>
-          <a:effectRef idx="2">
-            <a:schemeClr val="accent1"/>
-          </a:effectRef>
-          <a:fontRef idx="minor">
-            <a:schemeClr val="lt1"/>
-          </a:fontRef>
-        </p:style>
-        <p:txBody>
-          <a:bodyPr rtlCol="0" anchor="ctr"/>
-          <a:lstStyle/>
-          <a:p>
-            <a:pPr algn="ctr"/>
-          </a:p>
-        </p:txBody>
-      </p:sp>
-      <p:sp>
-        <p:nvSpPr>
-          <p:cNvPr id="8" name="TextBox 7"/>
-          <p:cNvSpPr txBox="1"/>
-          <p:nvPr/>
-        </p:nvSpPr>
-        <p:spPr>
-          <a:xfrm>
-            <a:off x="274320" y="2487168"/>
-            <a:ext cx="411480" cy="411480"/>
-          </a:xfrm>
-          <a:prstGeom prst="rect">
-            <a:avLst/>
-          </a:prstGeom>
-          <a:noFill/>
-        </p:spPr>
-        <p:txBody>
-          <a:bodyPr wrap="square">
-            <a:spAutoFit/>
-          </a:bodyPr>
-          <a:lstStyle/>
-          <a:p>
-            <a:pPr algn="ctr"/>
-            <a:r>
-              <a:rPr sz="1400" b="1">
-                <a:solidFill>
-                  <a:srgbClr val="FFFFFF"/>
-                </a:solidFill>
-              </a:rPr>
-              <a:t>2</a:t>
-            </a:r>
-          </a:p>
-        </p:txBody>
-      </p:sp>
-      <p:sp>
-        <p:nvSpPr>
-          <p:cNvPr id="9" name="TextBox 8"/>
-          <p:cNvSpPr txBox="1"/>
-          <p:nvPr/>
-        </p:nvSpPr>
-        <p:spPr>
-          <a:xfrm>
-            <a:off x="822960" y="2468880"/>
-            <a:ext cx="10789920" cy="347472"/>
-          </a:xfrm>
-          <a:prstGeom prst="rect">
-            <a:avLst/>
-          </a:prstGeom>
-          <a:noFill/>
-        </p:spPr>
-        <p:txBody>
-          <a:bodyPr wrap="square">
-            <a:spAutoFit/>
-          </a:bodyPr>
-          <a:lstStyle/>
-          <a:p>
-            <a:pPr algn="l"/>
-            <a:r>
-              <a:rPr sz="1400" b="1">
-                <a:solidFill>
-                  <a:srgbClr val="1A2E44"/>
-                </a:solidFill>
-              </a:rPr>
-              <a:t>Assesses charge validity</a:t>
-            </a:r>
-          </a:p>
-        </p:txBody>
-      </p:sp>
-      <p:sp>
-        <p:nvSpPr>
-          <p:cNvPr id="10" name="TextBox 9"/>
-          <p:cNvSpPr txBox="1"/>
-          <p:nvPr/>
-        </p:nvSpPr>
-        <p:spPr>
-          <a:xfrm>
-            <a:off x="822960" y="2834640"/>
-            <a:ext cx="10789920" cy="502920"/>
-          </a:xfrm>
-          <a:prstGeom prst="rect">
-            <a:avLst/>
-          </a:prstGeom>
-          <a:noFill/>
-        </p:spPr>
-        <p:txBody>
-          <a:bodyPr wrap="square">
-            <a:spAutoFit/>
-          </a:bodyPr>
-          <a:lstStyle/>
-          <a:p>
-            <a:pPr algn="l"/>
-            <a:r>
-              <a:rPr sz="1200" b="0">
-                <a:solidFill>
-                  <a:srgbClr val="444444"/>
-                </a:solidFill>
-              </a:rPr>
-              <a:t>Rule-based checks for fuel surcharges, dimensional weight, and redelivery fees. Routes clear-cut cases with a structured verdict; routes ambiguous cases to a human reviewer with all evidence assembled and a confidence score.  (D4 T-007)</a:t>
-            </a:r>
-          </a:p>
-        </p:txBody>
-      </p:sp>
-      <p:sp>
-        <p:nvSpPr>
-          <p:cNvPr id="11" name="Oval 10"/>
-          <p:cNvSpPr/>
-          <p:nvPr/>
-        </p:nvSpPr>
-        <p:spPr>
-          <a:xfrm>
-            <a:off x="274320" y="3493008"/>
-            <a:ext cx="411480" cy="411480"/>
-          </a:xfrm>
-          <a:prstGeom prst="ellipse">
-            <a:avLst/>
-          </a:prstGeom>
-          <a:solidFill>
-            <a:srgbClr val="1F61AA"/>
-          </a:solidFill>
-          <a:ln>
-            <a:noFill/>
-          </a:ln>
-        </p:spPr>
-        <p:style>
-          <a:lnRef idx="1">
-            <a:schemeClr val="accent1"/>
-          </a:lnRef>
-          <a:fillRef idx="3">
-            <a:schemeClr val="accent1"/>
-          </a:fillRef>
-          <a:effectRef idx="2">
-            <a:schemeClr val="accent1"/>
-          </a:effectRef>
-          <a:fontRef idx="minor">
-            <a:schemeClr val="lt1"/>
-          </a:fontRef>
-        </p:style>
-        <p:txBody>
-          <a:bodyPr rtlCol="0" anchor="ctr"/>
-          <a:lstStyle/>
-          <a:p>
-            <a:pPr algn="ctr"/>
-          </a:p>
-        </p:txBody>
-      </p:sp>
-      <p:sp>
-        <p:nvSpPr>
-          <p:cNvPr id="12" name="TextBox 11"/>
-          <p:cNvSpPr txBox="1"/>
-          <p:nvPr/>
-        </p:nvSpPr>
-        <p:spPr>
-          <a:xfrm>
-            <a:off x="274320" y="3493008"/>
-            <a:ext cx="411480" cy="411480"/>
-          </a:xfrm>
-          <a:prstGeom prst="rect">
-            <a:avLst/>
-          </a:prstGeom>
-          <a:noFill/>
-        </p:spPr>
-        <p:txBody>
-          <a:bodyPr wrap="square">
-            <a:spAutoFit/>
-          </a:bodyPr>
-          <a:lstStyle/>
-          <a:p>
-            <a:pPr algn="ctr"/>
-            <a:r>
-              <a:rPr sz="1400" b="1">
-                <a:solidFill>
-                  <a:srgbClr val="FFFFFF"/>
-                </a:solidFill>
-              </a:rPr>
-              <a:t>3</a:t>
-            </a:r>
-          </a:p>
-        </p:txBody>
-      </p:sp>
-      <p:sp>
-        <p:nvSpPr>
-          <p:cNvPr id="13" name="TextBox 12"/>
-          <p:cNvSpPr txBox="1"/>
-          <p:nvPr/>
-        </p:nvSpPr>
-        <p:spPr>
-          <a:xfrm>
-            <a:off x="822960" y="3474720"/>
-            <a:ext cx="10789920" cy="347472"/>
-          </a:xfrm>
-          <a:prstGeom prst="rect">
-            <a:avLst/>
-          </a:prstGeom>
-          <a:noFill/>
-        </p:spPr>
-        <p:txBody>
-          <a:bodyPr wrap="square">
-            <a:spAutoFit/>
-          </a:bodyPr>
-          <a:lstStyle/>
-          <a:p>
-            <a:pPr algn="l"/>
-            <a:r>
-              <a:rPr sz="1400" b="1">
-                <a:solidFill>
-                  <a:srgbClr val="1A2E44"/>
-                </a:solidFill>
-              </a:rPr>
-              <a:t>Enforces a complete audit trail on every credit record</a:t>
-            </a:r>
-          </a:p>
-        </p:txBody>
-      </p:sp>
-      <p:sp>
-        <p:nvSpPr>
-          <p:cNvPr id="14" name="TextBox 13"/>
-          <p:cNvSpPr txBox="1"/>
-          <p:nvPr/>
-        </p:nvSpPr>
-        <p:spPr>
-          <a:xfrm>
-            <a:off x="822960" y="3840480"/>
-            <a:ext cx="10789920" cy="502920"/>
-          </a:xfrm>
-          <a:prstGeom prst="rect">
-            <a:avLst/>
-          </a:prstGeom>
-          <a:noFill/>
-        </p:spPr>
-        <p:txBody>
-          <a:bodyPr wrap="square">
-            <a:spAutoFit/>
-          </a:bodyPr>
-          <a:lstStyle/>
-          <a:p>
-            <a:pPr algn="l"/>
-            <a:r>
-              <a:rPr sz="1200" b="0">
-                <a:solidFill>
-                  <a:srgbClr val="444444"/>
-                </a:solidFill>
-              </a:rPr>
-              <a:t>Named approver, CRM case reference, approved reason code — every field the current process routinely leaves blank.  (D4 T-011, FM-3)</a:t>
-            </a:r>
-          </a:p>
-        </p:txBody>
-      </p:sp>
-      <p:sp>
-        <p:nvSpPr>
-          <p:cNvPr id="15" name="Oval 14"/>
-          <p:cNvSpPr/>
-          <p:nvPr/>
-        </p:nvSpPr>
-        <p:spPr>
-          <a:xfrm>
-            <a:off x="274320" y="4498848"/>
-            <a:ext cx="411480" cy="411480"/>
-          </a:xfrm>
-          <a:prstGeom prst="ellipse">
-            <a:avLst/>
-          </a:prstGeom>
-          <a:solidFill>
-            <a:srgbClr val="1F61AA"/>
-          </a:solidFill>
-          <a:ln>
-            <a:noFill/>
-          </a:ln>
-        </p:spPr>
-        <p:style>
-          <a:lnRef idx="1">
-            <a:schemeClr val="accent1"/>
-          </a:lnRef>
-          <a:fillRef idx="3">
-            <a:schemeClr val="accent1"/>
-          </a:fillRef>
-          <a:effectRef idx="2">
-            <a:schemeClr val="accent1"/>
-          </a:effectRef>
-          <a:fontRef idx="minor">
-            <a:schemeClr val="lt1"/>
-          </a:fontRef>
-        </p:style>
-        <p:txBody>
-          <a:bodyPr rtlCol="0" anchor="ctr"/>
-          <a:lstStyle/>
-          <a:p>
-            <a:pPr algn="ctr"/>
-          </a:p>
-        </p:txBody>
-      </p:sp>
-      <p:sp>
-        <p:nvSpPr>
-          <p:cNvPr id="16" name="TextBox 15"/>
-          <p:cNvSpPr txBox="1"/>
-          <p:nvPr/>
-        </p:nvSpPr>
-        <p:spPr>
-          <a:xfrm>
-            <a:off x="274320" y="4498848"/>
-            <a:ext cx="411480" cy="411480"/>
-          </a:xfrm>
-          <a:prstGeom prst="rect">
-            <a:avLst/>
-          </a:prstGeom>
-          <a:noFill/>
-        </p:spPr>
-        <p:txBody>
-          <a:bodyPr wrap="square">
-            <a:spAutoFit/>
-          </a:bodyPr>
-          <a:lstStyle/>
-          <a:p>
-            <a:pPr algn="ctr"/>
-            <a:r>
-              <a:rPr sz="1400" b="1">
-                <a:solidFill>
-                  <a:srgbClr val="FFFFFF"/>
-                </a:solidFill>
-              </a:rPr>
-              <a:t>4</a:t>
-            </a:r>
-          </a:p>
-        </p:txBody>
-      </p:sp>
-      <p:sp>
-        <p:nvSpPr>
-          <p:cNvPr id="17" name="TextBox 16"/>
-          <p:cNvSpPr txBox="1"/>
-          <p:nvPr/>
-        </p:nvSpPr>
-        <p:spPr>
-          <a:xfrm>
-            <a:off x="822960" y="4480560"/>
-            <a:ext cx="10789920" cy="347472"/>
-          </a:xfrm>
-          <a:prstGeom prst="rect">
-            <a:avLst/>
-          </a:prstGeom>
-          <a:noFill/>
-        </p:spPr>
-        <p:txBody>
-          <a:bodyPr wrap="square">
-            <a:spAutoFit/>
-          </a:bodyPr>
-          <a:lstStyle/>
-          <a:p>
-            <a:pPr algn="l"/>
-            <a:r>
-              <a:rPr sz="1400" b="1">
-                <a:solidFill>
-                  <a:srgbClr val="1A2E44"/>
-                </a:solidFill>
-              </a:rPr>
-              <a:t>Flags repeat dispute patterns automatically</a:t>
-            </a:r>
-          </a:p>
-        </p:txBody>
-      </p:sp>
-      <p:sp>
-        <p:nvSpPr>
-          <p:cNvPr id="18" name="TextBox 17"/>
-          <p:cNvSpPr txBox="1"/>
-          <p:nvPr/>
-        </p:nvSpPr>
-        <p:spPr>
-          <a:xfrm>
-            <a:off x="822960" y="4846320"/>
-            <a:ext cx="10789920" cy="502920"/>
-          </a:xfrm>
-          <a:prstGeom prst="rect">
-            <a:avLst/>
-          </a:prstGeom>
-          <a:noFill/>
-        </p:spPr>
-        <p:txBody>
-          <a:bodyPr wrap="square">
-            <a:spAutoFit/>
-          </a:bodyPr>
-          <a:lstStyle/>
-          <a:p>
-            <a:pPr algn="l"/>
-            <a:r>
-              <a:rPr sz="1200" b="0">
-                <a:solidFill>
-                  <a:srgbClr val="444444"/>
-                </a:solidFill>
-              </a:rPr>
-              <a:t>A customer with multiple open disputes of the same type triggers senior review rather than being handled as three separate cases — the Hayes &amp; Sons situation would have been surfaced on day one.  (D4 T-008, ET-005)</a:t>
-            </a:r>
-          </a:p>
-        </p:txBody>
-      </p:sp>
-      <p:sp>
-        <p:nvSpPr>
-          <p:cNvPr id="19" name="TextBox 18"/>
           <p:cNvSpPr txBox="1"/>
           <p:nvPr/>
         </p:nvSpPr>
@@ -12395,44 +14072,44 @@
         <a:sysClr val="window" lastClr="FFFFFF"/>
       </a:lt1>
       <a:dk2>
-        <a:srgbClr val="1F497D"/>
+        <a:srgbClr val="0E2841"/>
       </a:dk2>
       <a:lt2>
-        <a:srgbClr val="EEECE1"/>
+        <a:srgbClr val="E8E8E8"/>
       </a:lt2>
       <a:accent1>
-        <a:srgbClr val="4F81BD"/>
+        <a:srgbClr val="156082"/>
       </a:accent1>
       <a:accent2>
-        <a:srgbClr val="C0504D"/>
+        <a:srgbClr val="E97132"/>
       </a:accent2>
       <a:accent3>
-        <a:srgbClr val="9BBB59"/>
+        <a:srgbClr val="196B24"/>
       </a:accent3>
       <a:accent4>
-        <a:srgbClr val="8064A2"/>
+        <a:srgbClr val="0F9ED5"/>
       </a:accent4>
       <a:accent5>
-        <a:srgbClr val="4BACC6"/>
+        <a:srgbClr val="A02B93"/>
       </a:accent5>
       <a:accent6>
-        <a:srgbClr val="F79646"/>
+        <a:srgbClr val="4EA72E"/>
       </a:accent6>
       <a:hlink>
-        <a:srgbClr val="0000FF"/>
+        <a:srgbClr val="467886"/>
       </a:hlink>
       <a:folHlink>
-        <a:srgbClr val="800080"/>
+        <a:srgbClr val="96607D"/>
       </a:folHlink>
     </a:clrScheme>
     <a:fontScheme name="Office">
       <a:majorFont>
-        <a:latin typeface="Calibri"/>
+        <a:latin typeface="Aptos Display" panose="02110004020202020204"/>
         <a:ea typeface=""/>
         <a:cs typeface=""/>
-        <a:font script="Jpan" typeface="ＭＳ Ｐゴシック"/>
+        <a:font script="Jpan" typeface="游ゴシック Light"/>
         <a:font script="Hang" typeface="맑은 고딕"/>
-        <a:font script="Hans" typeface="宋体"/>
+        <a:font script="Hans" typeface="等线 Light"/>
         <a:font script="Hant" typeface="新細明體"/>
         <a:font script="Arab" typeface="Times New Roman"/>
         <a:font script="Hebr" typeface="Times New Roman"/>
@@ -12460,14 +14137,31 @@
         <a:font script="Viet" typeface="Times New Roman"/>
         <a:font script="Uigh" typeface="Microsoft Uighur"/>
         <a:font script="Geor" typeface="Sylfaen"/>
+        <a:font script="Armn" typeface="Arial"/>
+        <a:font script="Bugi" typeface="Leelawadee UI"/>
+        <a:font script="Bopo" typeface="Microsoft JhengHei"/>
+        <a:font script="Java" typeface="Javanese Text"/>
+        <a:font script="Lisu" typeface="Segoe UI"/>
+        <a:font script="Mymr" typeface="Myanmar Text"/>
+        <a:font script="Nkoo" typeface="Ebrima"/>
+        <a:font script="Olck" typeface="Nirmala UI"/>
+        <a:font script="Osma" typeface="Ebrima"/>
+        <a:font script="Phag" typeface="Phagspa"/>
+        <a:font script="Syrn" typeface="Estrangelo Edessa"/>
+        <a:font script="Syrj" typeface="Estrangelo Edessa"/>
+        <a:font script="Syre" typeface="Estrangelo Edessa"/>
+        <a:font script="Sora" typeface="Nirmala UI"/>
+        <a:font script="Tale" typeface="Microsoft Tai Le"/>
+        <a:font script="Talu" typeface="Microsoft New Tai Lue"/>
+        <a:font script="Tfng" typeface="Ebrima"/>
       </a:majorFont>
       <a:minorFont>
-        <a:latin typeface="Calibri"/>
+        <a:latin typeface="Aptos" panose="02110004020202020204"/>
         <a:ea typeface=""/>
         <a:cs typeface=""/>
-        <a:font script="Jpan" typeface="ＭＳ Ｐゴシック"/>
+        <a:font script="Jpan" typeface="游ゴシック"/>
         <a:font script="Hang" typeface="맑은 고딕"/>
-        <a:font script="Hans" typeface="宋体"/>
+        <a:font script="Hans" typeface="等线"/>
         <a:font script="Hant" typeface="新細明體"/>
         <a:font script="Arab" typeface="Arial"/>
         <a:font script="Hebr" typeface="Arial"/>
@@ -12495,6 +14189,23 @@
         <a:font script="Viet" typeface="Arial"/>
         <a:font script="Uigh" typeface="Microsoft Uighur"/>
         <a:font script="Geor" typeface="Sylfaen"/>
+        <a:font script="Armn" typeface="Arial"/>
+        <a:font script="Bugi" typeface="Leelawadee UI"/>
+        <a:font script="Bopo" typeface="Microsoft JhengHei"/>
+        <a:font script="Java" typeface="Javanese Text"/>
+        <a:font script="Lisu" typeface="Segoe UI"/>
+        <a:font script="Mymr" typeface="Myanmar Text"/>
+        <a:font script="Nkoo" typeface="Ebrima"/>
+        <a:font script="Olck" typeface="Nirmala UI"/>
+        <a:font script="Osma" typeface="Ebrima"/>
+        <a:font script="Phag" typeface="Phagspa"/>
+        <a:font script="Syrn" typeface="Estrangelo Edessa"/>
+        <a:font script="Syrj" typeface="Estrangelo Edessa"/>
+        <a:font script="Syre" typeface="Estrangelo Edessa"/>
+        <a:font script="Sora" typeface="Nirmala UI"/>
+        <a:font script="Tale" typeface="Microsoft Tai Le"/>
+        <a:font script="Talu" typeface="Microsoft New Tai Lue"/>
+        <a:font script="Tfng" typeface="Ebrima"/>
       </a:minorFont>
     </a:fontScheme>
     <a:fmtScheme name="Office">
@@ -12506,180 +14217,136 @@
           <a:gsLst>
             <a:gs pos="0">
               <a:schemeClr val="phClr">
-                <a:tint val="50000"/>
-                <a:satMod val="300000"/>
+                <a:lumMod val="110000"/>
+                <a:satMod val="105000"/>
+                <a:tint val="67000"/>
               </a:schemeClr>
             </a:gs>
-            <a:gs pos="35000">
+            <a:gs pos="50000">
               <a:schemeClr val="phClr">
-                <a:tint val="37000"/>
-                <a:satMod val="300000"/>
+                <a:lumMod val="105000"/>
+                <a:satMod val="103000"/>
+                <a:tint val="73000"/>
               </a:schemeClr>
             </a:gs>
             <a:gs pos="100000">
               <a:schemeClr val="phClr">
-                <a:tint val="15000"/>
-                <a:satMod val="350000"/>
+                <a:lumMod val="105000"/>
+                <a:satMod val="109000"/>
+                <a:tint val="81000"/>
               </a:schemeClr>
             </a:gs>
           </a:gsLst>
-          <a:lin ang="16200000" scaled="1"/>
+          <a:lin ang="5400000" scaled="0"/>
         </a:gradFill>
         <a:gradFill rotWithShape="1">
           <a:gsLst>
             <a:gs pos="0">
               <a:schemeClr val="phClr">
-                <a:tint val="100000"/>
+                <a:satMod val="103000"/>
+                <a:lumMod val="102000"/>
+                <a:tint val="94000"/>
+              </a:schemeClr>
+            </a:gs>
+            <a:gs pos="50000">
+              <a:schemeClr val="phClr">
+                <a:satMod val="110000"/>
+                <a:lumMod val="100000"/>
                 <a:shade val="100000"/>
-                <a:satMod val="130000"/>
               </a:schemeClr>
             </a:gs>
             <a:gs pos="100000">
               <a:schemeClr val="phClr">
-                <a:tint val="50000"/>
-                <a:shade val="100000"/>
-                <a:satMod val="350000"/>
+                <a:lumMod val="99000"/>
+                <a:satMod val="120000"/>
+                <a:shade val="78000"/>
               </a:schemeClr>
             </a:gs>
           </a:gsLst>
-          <a:lin ang="16200000" scaled="0"/>
+          <a:lin ang="5400000" scaled="0"/>
         </a:gradFill>
       </a:fillStyleLst>
       <a:lnStyleLst>
-        <a:ln w="9525" cap="flat" cmpd="sng" algn="ctr">
+        <a:ln w="12700" cap="flat" cmpd="sng" algn="ctr">
           <a:solidFill>
-            <a:schemeClr val="phClr">
-              <a:shade val="95000"/>
-              <a:satMod val="105000"/>
-            </a:schemeClr>
+            <a:schemeClr val="phClr"/>
           </a:solidFill>
           <a:prstDash val="solid"/>
+          <a:miter lim="800000"/>
+        </a:ln>
+        <a:ln w="19050" cap="flat" cmpd="sng" algn="ctr">
+          <a:solidFill>
+            <a:schemeClr val="phClr"/>
+          </a:solidFill>
+          <a:prstDash val="solid"/>
+          <a:miter lim="800000"/>
         </a:ln>
         <a:ln w="25400" cap="flat" cmpd="sng" algn="ctr">
           <a:solidFill>
             <a:schemeClr val="phClr"/>
           </a:solidFill>
           <a:prstDash val="solid"/>
-        </a:ln>
-        <a:ln w="38100" cap="flat" cmpd="sng" algn="ctr">
-          <a:solidFill>
-            <a:schemeClr val="phClr"/>
-          </a:solidFill>
-          <a:prstDash val="solid"/>
+          <a:miter lim="800000"/>
         </a:ln>
       </a:lnStyleLst>
       <a:effectStyleLst>
         <a:effectStyle>
+          <a:effectLst/>
+        </a:effectStyle>
+        <a:effectStyle>
+          <a:effectLst/>
+        </a:effectStyle>
+        <a:effectStyle>
           <a:effectLst>
-            <a:outerShdw blurRad="40000" dist="20000" dir="5400000" rotWithShape="0">
+            <a:outerShdw blurRad="57150" dist="19050" dir="5400000" algn="ctr" rotWithShape="0">
               <a:srgbClr val="000000">
-                <a:alpha val="38000"/>
+                <a:alpha val="63000"/>
               </a:srgbClr>
             </a:outerShdw>
           </a:effectLst>
-        </a:effectStyle>
-        <a:effectStyle>
-          <a:effectLst>
-            <a:outerShdw blurRad="40000" dist="23000" dir="5400000" rotWithShape="0">
-              <a:srgbClr val="000000">
-                <a:alpha val="35000"/>
-              </a:srgbClr>
-            </a:outerShdw>
-          </a:effectLst>
-        </a:effectStyle>
-        <a:effectStyle>
-          <a:effectLst>
-            <a:outerShdw blurRad="40000" dist="23000" dir="5400000" rotWithShape="0">
-              <a:srgbClr val="000000">
-                <a:alpha val="35000"/>
-              </a:srgbClr>
-            </a:outerShdw>
-          </a:effectLst>
-          <a:scene3d>
-            <a:camera prst="orthographicFront">
-              <a:rot lat="0" lon="0" rev="0"/>
-            </a:camera>
-            <a:lightRig rig="threePt" dir="t">
-              <a:rot lat="0" lon="0" rev="1200000"/>
-            </a:lightRig>
-          </a:scene3d>
-          <a:sp3d>
-            <a:bevelT w="63500" h="25400"/>
-          </a:sp3d>
         </a:effectStyle>
       </a:effectStyleLst>
       <a:bgFillStyleLst>
         <a:solidFill>
           <a:schemeClr val="phClr"/>
         </a:solidFill>
+        <a:solidFill>
+          <a:schemeClr val="phClr">
+            <a:tint val="95000"/>
+            <a:satMod val="170000"/>
+          </a:schemeClr>
+        </a:solidFill>
         <a:gradFill rotWithShape="1">
           <a:gsLst>
             <a:gs pos="0">
               <a:schemeClr val="phClr">
-                <a:tint val="40000"/>
-                <a:satMod val="350000"/>
+                <a:tint val="93000"/>
+                <a:satMod val="150000"/>
+                <a:shade val="98000"/>
+                <a:lumMod val="102000"/>
               </a:schemeClr>
             </a:gs>
-            <a:gs pos="40000">
+            <a:gs pos="50000">
               <a:schemeClr val="phClr">
-                <a:tint val="45000"/>
-                <a:shade val="99000"/>
-                <a:satMod val="350000"/>
+                <a:tint val="98000"/>
+                <a:satMod val="130000"/>
+                <a:shade val="90000"/>
+                <a:lumMod val="103000"/>
               </a:schemeClr>
             </a:gs>
             <a:gs pos="100000">
               <a:schemeClr val="phClr">
-                <a:shade val="20000"/>
-                <a:satMod val="255000"/>
+                <a:shade val="63000"/>
+                <a:satMod val="120000"/>
               </a:schemeClr>
             </a:gs>
           </a:gsLst>
-          <a:path path="circle">
-            <a:fillToRect l="50000" t="-80000" r="50000" b="180000"/>
-          </a:path>
-        </a:gradFill>
-        <a:gradFill rotWithShape="1">
-          <a:gsLst>
-            <a:gs pos="0">
-              <a:schemeClr val="phClr">
-                <a:tint val="80000"/>
-                <a:satMod val="300000"/>
-              </a:schemeClr>
-            </a:gs>
-            <a:gs pos="100000">
-              <a:schemeClr val="phClr">
-                <a:shade val="30000"/>
-                <a:satMod val="200000"/>
-              </a:schemeClr>
-            </a:gs>
-          </a:gsLst>
-          <a:path path="circle">
-            <a:fillToRect l="50000" t="50000" r="50000" b="50000"/>
-          </a:path>
+          <a:lin ang="5400000" scaled="0"/>
         </a:gradFill>
       </a:bgFillStyleLst>
     </a:fmtScheme>
   </a:themeElements>
   <a:objectDefaults>
-    <a:spDef>
-      <a:spPr/>
-      <a:bodyPr/>
-      <a:lstStyle/>
-      <a:style>
-        <a:lnRef idx="1">
-          <a:schemeClr val="accent1"/>
-        </a:lnRef>
-        <a:fillRef idx="3">
-          <a:schemeClr val="accent1"/>
-        </a:fillRef>
-        <a:effectRef idx="2">
-          <a:schemeClr val="accent1"/>
-        </a:effectRef>
-        <a:fontRef idx="minor">
-          <a:schemeClr val="lt1"/>
-        </a:fontRef>
-      </a:style>
-    </a:spDef>
     <a:lnDef>
       <a:spPr/>
       <a:bodyPr/>
@@ -12701,5 +14368,10 @@
     </a:lnDef>
   </a:objectDefaults>
   <a:extraClrSchemeLst/>
+  <a:extLst>
+    <a:ext uri="{05A4C25C-085E-4340-85A3-A5531E510DB2}">
+      <thm15:themeFamily xmlns:thm15="http://schemas.microsoft.com/office/thememl/2012/main" name="Office Theme" id="{2E142A2C-CD16-42D6-873A-C26D2A0506FA}" vid="{1BDDFF52-6CD6-40A5-AB3C-68EB2F1E4D0A}"/>
+    </a:ext>
+  </a:extLst>
 </a:theme>
 </file>